--- a/docs/lem/images/autosearch.pptx
+++ b/docs/lem/images/autosearch.pptx
@@ -6,6 +6,7 @@
   </p:sldMasterIdLst>
   <p:sldIdLst>
     <p:sldId id="256" r:id="rId2"/>
+    <p:sldId id="257" r:id="rId3"/>
   </p:sldIdLst>
   <p:sldSz cx="12192000" cy="6858000"/>
   <p:notesSz cx="6858000" cy="9144000"/>
@@ -3323,6 +3324,170 @@
       </p:grpSpPr>
       <p:grpSp>
         <p:nvGrpSpPr>
+          <p:cNvPr id="51" name="Group 50">
+            <a:extLst>
+              <a:ext uri="{FF2B5EF4-FFF2-40B4-BE49-F238E27FC236}">
+                <a16:creationId xmlns:a16="http://schemas.microsoft.com/office/drawing/2014/main" id="{ACE03EB8-5C90-5673-F84B-3101D17C7BAC}"/>
+              </a:ext>
+            </a:extLst>
+          </p:cNvPr>
+          <p:cNvGrpSpPr/>
+          <p:nvPr/>
+        </p:nvGrpSpPr>
+        <p:grpSpPr>
+          <a:xfrm>
+            <a:off x="5419036" y="1839783"/>
+            <a:ext cx="1282677" cy="1218998"/>
+            <a:chOff x="5419036" y="1839783"/>
+            <a:chExt cx="1282677" cy="1218998"/>
+          </a:xfrm>
+        </p:grpSpPr>
+        <p:sp>
+          <p:nvSpPr>
+            <p:cNvPr id="38" name="Rectangle 37">
+              <a:extLst>
+                <a:ext uri="{FF2B5EF4-FFF2-40B4-BE49-F238E27FC236}">
+                  <a16:creationId xmlns:a16="http://schemas.microsoft.com/office/drawing/2014/main" id="{B4BE44AB-6619-819A-6406-7679D05A30A0}"/>
+                </a:ext>
+              </a:extLst>
+            </p:cNvPr>
+            <p:cNvSpPr/>
+            <p:nvPr/>
+          </p:nvSpPr>
+          <p:spPr>
+            <a:xfrm>
+              <a:off x="5482464" y="1839783"/>
+              <a:ext cx="1219249" cy="1218998"/>
+            </a:xfrm>
+            <a:prstGeom prst="rect">
+              <a:avLst/>
+            </a:prstGeom>
+            <a:noFill/>
+            <a:ln w="15875">
+              <a:solidFill>
+                <a:schemeClr val="tx1"/>
+              </a:solidFill>
+              <a:prstDash val="sysDash"/>
+            </a:ln>
+          </p:spPr>
+          <p:style>
+            <a:lnRef idx="2">
+              <a:schemeClr val="accent1">
+                <a:shade val="15000"/>
+              </a:schemeClr>
+            </a:lnRef>
+            <a:fillRef idx="1">
+              <a:schemeClr val="accent1"/>
+            </a:fillRef>
+            <a:effectRef idx="0">
+              <a:schemeClr val="accent1"/>
+            </a:effectRef>
+            <a:fontRef idx="minor">
+              <a:schemeClr val="lt1"/>
+            </a:fontRef>
+          </p:style>
+          <p:txBody>
+            <a:bodyPr rtlCol="0" anchor="ctr"/>
+            <a:lstStyle/>
+            <a:p>
+              <a:pPr algn="ctr"/>
+              <a:endParaRPr lang="en-US"/>
+            </a:p>
+          </p:txBody>
+        </p:sp>
+        <p:cxnSp>
+          <p:nvCxnSpPr>
+            <p:cNvPr id="47" name="Straight Connector 46">
+              <a:extLst>
+                <a:ext uri="{FF2B5EF4-FFF2-40B4-BE49-F238E27FC236}">
+                  <a16:creationId xmlns:a16="http://schemas.microsoft.com/office/drawing/2014/main" id="{80A0894A-BECF-30B3-032B-FB11536D2E72}"/>
+                </a:ext>
+              </a:extLst>
+            </p:cNvPr>
+            <p:cNvCxnSpPr>
+              <a:cxnSpLocks/>
+              <a:stCxn id="44" idx="4"/>
+            </p:cNvCxnSpPr>
+            <p:nvPr/>
+          </p:nvCxnSpPr>
+          <p:spPr>
+            <a:xfrm flipH="1">
+              <a:off x="6101028" y="1905105"/>
+              <a:ext cx="2766" cy="1147744"/>
+            </a:xfrm>
+            <a:prstGeom prst="line">
+              <a:avLst/>
+            </a:prstGeom>
+            <a:ln w="15875">
+              <a:solidFill>
+                <a:schemeClr val="tx1"/>
+              </a:solidFill>
+              <a:prstDash val="sysDash"/>
+            </a:ln>
+          </p:spPr>
+          <p:style>
+            <a:lnRef idx="2">
+              <a:schemeClr val="accent1"/>
+            </a:lnRef>
+            <a:fillRef idx="0">
+              <a:schemeClr val="accent1"/>
+            </a:fillRef>
+            <a:effectRef idx="1">
+              <a:schemeClr val="accent1"/>
+            </a:effectRef>
+            <a:fontRef idx="minor">
+              <a:schemeClr val="tx1"/>
+            </a:fontRef>
+          </p:style>
+        </p:cxnSp>
+        <p:cxnSp>
+          <p:nvCxnSpPr>
+            <p:cNvPr id="50" name="Straight Connector 49">
+              <a:extLst>
+                <a:ext uri="{FF2B5EF4-FFF2-40B4-BE49-F238E27FC236}">
+                  <a16:creationId xmlns:a16="http://schemas.microsoft.com/office/drawing/2014/main" id="{5D89D307-05D4-E15C-FEC8-5A8EEFF7B147}"/>
+                </a:ext>
+              </a:extLst>
+            </p:cNvPr>
+            <p:cNvCxnSpPr>
+              <a:stCxn id="42" idx="2"/>
+              <a:endCxn id="39" idx="2"/>
+            </p:cNvCxnSpPr>
+            <p:nvPr/>
+          </p:nvCxnSpPr>
+          <p:spPr>
+            <a:xfrm>
+              <a:off x="5419036" y="2446316"/>
+              <a:ext cx="1211425" cy="0"/>
+            </a:xfrm>
+            <a:prstGeom prst="line">
+              <a:avLst/>
+            </a:prstGeom>
+            <a:ln w="15875">
+              <a:solidFill>
+                <a:schemeClr val="tx1"/>
+              </a:solidFill>
+              <a:prstDash val="sysDash"/>
+            </a:ln>
+          </p:spPr>
+          <p:style>
+            <a:lnRef idx="2">
+              <a:schemeClr val="accent1"/>
+            </a:lnRef>
+            <a:fillRef idx="0">
+              <a:schemeClr val="accent1"/>
+            </a:fillRef>
+            <a:effectRef idx="1">
+              <a:schemeClr val="accent1"/>
+            </a:effectRef>
+            <a:fontRef idx="minor">
+              <a:schemeClr val="tx1"/>
+            </a:fontRef>
+          </p:style>
+        </p:cxnSp>
+      </p:grpSp>
+      <p:grpSp>
+        <p:nvGrpSpPr>
           <p:cNvPr id="20" name="Group 19">
             <a:extLst>
               <a:ext uri="{FF2B5EF4-FFF2-40B4-BE49-F238E27FC236}">
@@ -3335,10 +3500,10 @@
         </p:nvGrpSpPr>
         <p:grpSpPr>
           <a:xfrm>
-            <a:off x="1436915" y="3096492"/>
-            <a:ext cx="8799616" cy="1511135"/>
-            <a:chOff x="1436915" y="3096492"/>
-            <a:chExt cx="8799616" cy="1511135"/>
+            <a:off x="2402958" y="3096492"/>
+            <a:ext cx="6375944" cy="1511135"/>
+            <a:chOff x="2402958" y="3096492"/>
+            <a:chExt cx="6375944" cy="1511135"/>
           </a:xfrm>
         </p:grpSpPr>
         <p:cxnSp>
@@ -3357,8 +3522,8 @@
           </p:nvCxnSpPr>
           <p:spPr>
             <a:xfrm>
-              <a:off x="1436915" y="3096492"/>
-              <a:ext cx="3230088" cy="0"/>
+              <a:off x="2402958" y="3096492"/>
+              <a:ext cx="2264045" cy="0"/>
             </a:xfrm>
             <a:prstGeom prst="line">
               <a:avLst/>
@@ -3434,7 +3599,7 @@
           <p:spPr>
             <a:xfrm>
               <a:off x="5985164" y="4607627"/>
-              <a:ext cx="4251367" cy="0"/>
+              <a:ext cx="2793738" cy="0"/>
             </a:xfrm>
             <a:prstGeom prst="line">
               <a:avLst/>
@@ -3456,178 +3621,6 @@
           </p:style>
         </p:cxnSp>
       </p:grpSp>
-      <p:sp>
-        <p:nvSpPr>
-          <p:cNvPr id="13" name="Oval 12">
-            <a:extLst>
-              <a:ext uri="{FF2B5EF4-FFF2-40B4-BE49-F238E27FC236}">
-                <a16:creationId xmlns:a16="http://schemas.microsoft.com/office/drawing/2014/main" id="{4C58007B-F57D-2A89-2210-B559FDF25F1C}"/>
-              </a:ext>
-            </a:extLst>
-          </p:cNvPr>
-          <p:cNvSpPr/>
-          <p:nvPr/>
-        </p:nvSpPr>
-        <p:spPr>
-          <a:xfrm>
-            <a:off x="9830789" y="1883427"/>
-            <a:ext cx="5735782" cy="5735782"/>
-          </a:xfrm>
-          <a:prstGeom prst="ellipse">
-            <a:avLst/>
-          </a:prstGeom>
-          <a:noFill/>
-          <a:ln>
-            <a:solidFill>
-              <a:srgbClr val="FF0000"/>
-            </a:solidFill>
-          </a:ln>
-        </p:spPr>
-        <p:style>
-          <a:lnRef idx="2">
-            <a:schemeClr val="accent1">
-              <a:shade val="15000"/>
-            </a:schemeClr>
-          </a:lnRef>
-          <a:fillRef idx="1">
-            <a:schemeClr val="accent1"/>
-          </a:fillRef>
-          <a:effectRef idx="0">
-            <a:schemeClr val="accent1"/>
-          </a:effectRef>
-          <a:fontRef idx="minor">
-            <a:schemeClr val="lt1"/>
-          </a:fontRef>
-        </p:style>
-        <p:txBody>
-          <a:bodyPr rtlCol="0" anchor="ctr"/>
-          <a:lstStyle/>
-          <a:p>
-            <a:pPr algn="ctr"/>
-            <a:endParaRPr lang="en-US"/>
-          </a:p>
-        </p:txBody>
-      </p:sp>
-      <p:cxnSp>
-        <p:nvCxnSpPr>
-          <p:cNvPr id="15" name="Straight Connector 14">
-            <a:extLst>
-              <a:ext uri="{FF2B5EF4-FFF2-40B4-BE49-F238E27FC236}">
-                <a16:creationId xmlns:a16="http://schemas.microsoft.com/office/drawing/2014/main" id="{5DAB9F97-4E58-AF03-BF18-BD31F2DF7D64}"/>
-              </a:ext>
-            </a:extLst>
-          </p:cNvPr>
-          <p:cNvCxnSpPr/>
-          <p:nvPr/>
-        </p:nvCxnSpPr>
-        <p:spPr>
-          <a:xfrm>
-            <a:off x="2861953" y="2446317"/>
-            <a:ext cx="6602681" cy="0"/>
-          </a:xfrm>
-          <a:prstGeom prst="line">
-            <a:avLst/>
-          </a:prstGeom>
-        </p:spPr>
-        <p:style>
-          <a:lnRef idx="2">
-            <a:schemeClr val="accent1"/>
-          </a:lnRef>
-          <a:fillRef idx="0">
-            <a:schemeClr val="accent1"/>
-          </a:fillRef>
-          <a:effectRef idx="1">
-            <a:schemeClr val="accent1"/>
-          </a:effectRef>
-          <a:fontRef idx="minor">
-            <a:schemeClr val="tx1"/>
-          </a:fontRef>
-        </p:style>
-      </p:cxnSp>
-      <p:cxnSp>
-        <p:nvCxnSpPr>
-          <p:cNvPr id="16" name="Straight Connector 15">
-            <a:extLst>
-              <a:ext uri="{FF2B5EF4-FFF2-40B4-BE49-F238E27FC236}">
-                <a16:creationId xmlns:a16="http://schemas.microsoft.com/office/drawing/2014/main" id="{B2E12B04-DFE5-835D-2586-971C72AF0F25}"/>
-              </a:ext>
-            </a:extLst>
-          </p:cNvPr>
-          <p:cNvCxnSpPr>
-            <a:cxnSpLocks/>
-          </p:cNvCxnSpPr>
-          <p:nvPr/>
-        </p:nvCxnSpPr>
-        <p:spPr>
-          <a:xfrm>
-            <a:off x="6096000" y="-536369"/>
-            <a:ext cx="0" cy="6462156"/>
-          </a:xfrm>
-          <a:prstGeom prst="line">
-            <a:avLst/>
-          </a:prstGeom>
-        </p:spPr>
-        <p:style>
-          <a:lnRef idx="2">
-            <a:schemeClr val="accent1"/>
-          </a:lnRef>
-          <a:fillRef idx="0">
-            <a:schemeClr val="accent1"/>
-          </a:fillRef>
-          <a:effectRef idx="1">
-            <a:schemeClr val="accent1"/>
-          </a:effectRef>
-          <a:fontRef idx="minor">
-            <a:schemeClr val="tx1"/>
-          </a:fontRef>
-        </p:style>
-      </p:cxnSp>
-      <p:sp>
-        <p:nvSpPr>
-          <p:cNvPr id="19" name="Oval 18">
-            <a:extLst>
-              <a:ext uri="{FF2B5EF4-FFF2-40B4-BE49-F238E27FC236}">
-                <a16:creationId xmlns:a16="http://schemas.microsoft.com/office/drawing/2014/main" id="{6E48F913-8C98-0317-7125-27830A0DC232}"/>
-              </a:ext>
-            </a:extLst>
-          </p:cNvPr>
-          <p:cNvSpPr/>
-          <p:nvPr/>
-        </p:nvSpPr>
-        <p:spPr>
-          <a:xfrm>
-            <a:off x="2125683" y="1175657"/>
-            <a:ext cx="142504" cy="142504"/>
-          </a:xfrm>
-          <a:prstGeom prst="ellipse">
-            <a:avLst/>
-          </a:prstGeom>
-        </p:spPr>
-        <p:style>
-          <a:lnRef idx="2">
-            <a:schemeClr val="accent1">
-              <a:shade val="15000"/>
-            </a:schemeClr>
-          </a:lnRef>
-          <a:fillRef idx="1">
-            <a:schemeClr val="accent1"/>
-          </a:fillRef>
-          <a:effectRef idx="0">
-            <a:schemeClr val="accent1"/>
-          </a:effectRef>
-          <a:fontRef idx="minor">
-            <a:schemeClr val="lt1"/>
-          </a:fontRef>
-        </p:style>
-        <p:txBody>
-          <a:bodyPr rtlCol="0" anchor="ctr"/>
-          <a:lstStyle/>
-          <a:p>
-            <a:pPr algn="ctr"/>
-            <a:endParaRPr lang="en-US"/>
-          </a:p>
-        </p:txBody>
-      </p:sp>
       <p:sp>
         <p:nvSpPr>
           <p:cNvPr id="34" name="Arc 33">
@@ -3675,10 +3668,6588 @@
           </a:p>
         </p:txBody>
       </p:sp>
+      <p:cxnSp>
+        <p:nvCxnSpPr>
+          <p:cNvPr id="36" name="Straight Arrow Connector 35">
+            <a:extLst>
+              <a:ext uri="{FF2B5EF4-FFF2-40B4-BE49-F238E27FC236}">
+                <a16:creationId xmlns:a16="http://schemas.microsoft.com/office/drawing/2014/main" id="{CD6FD384-1685-DE52-4FBC-4547FA294479}"/>
+              </a:ext>
+            </a:extLst>
+          </p:cNvPr>
+          <p:cNvCxnSpPr>
+            <a:cxnSpLocks/>
+          </p:cNvCxnSpPr>
+          <p:nvPr/>
+        </p:nvCxnSpPr>
+        <p:spPr>
+          <a:xfrm flipH="1">
+            <a:off x="4816408" y="2446317"/>
+            <a:ext cx="1279592" cy="2565162"/>
+          </a:xfrm>
+          <a:prstGeom prst="straightConnector1">
+            <a:avLst/>
+          </a:prstGeom>
+          <a:ln>
+            <a:solidFill>
+              <a:srgbClr val="00B050"/>
+            </a:solidFill>
+            <a:prstDash val="dash"/>
+            <a:tailEnd type="triangle" w="lg" len="lg"/>
+          </a:ln>
+        </p:spPr>
+        <p:style>
+          <a:lnRef idx="2">
+            <a:schemeClr val="accent1"/>
+          </a:lnRef>
+          <a:fillRef idx="0">
+            <a:schemeClr val="accent1"/>
+          </a:fillRef>
+          <a:effectRef idx="1">
+            <a:schemeClr val="accent1"/>
+          </a:effectRef>
+          <a:fontRef idx="minor">
+            <a:schemeClr val="tx1"/>
+          </a:fontRef>
+        </p:style>
+      </p:cxnSp>
+      <p:sp>
+        <p:nvSpPr>
+          <p:cNvPr id="37" name="Oval 36">
+            <a:extLst>
+              <a:ext uri="{FF2B5EF4-FFF2-40B4-BE49-F238E27FC236}">
+                <a16:creationId xmlns:a16="http://schemas.microsoft.com/office/drawing/2014/main" id="{8AA8BFEA-FC7B-2CE1-C70D-5543F37C670E}"/>
+              </a:ext>
+            </a:extLst>
+          </p:cNvPr>
+          <p:cNvSpPr/>
+          <p:nvPr/>
+        </p:nvSpPr>
+        <p:spPr>
+          <a:xfrm>
+            <a:off x="6630461" y="2981600"/>
+            <a:ext cx="142504" cy="142504"/>
+          </a:xfrm>
+          <a:prstGeom prst="ellipse">
+            <a:avLst/>
+          </a:prstGeom>
+        </p:spPr>
+        <p:style>
+          <a:lnRef idx="2">
+            <a:schemeClr val="accent1">
+              <a:shade val="15000"/>
+            </a:schemeClr>
+          </a:lnRef>
+          <a:fillRef idx="1">
+            <a:schemeClr val="accent1"/>
+          </a:fillRef>
+          <a:effectRef idx="0">
+            <a:schemeClr val="accent1"/>
+          </a:effectRef>
+          <a:fontRef idx="minor">
+            <a:schemeClr val="lt1"/>
+          </a:fontRef>
+        </p:style>
+        <p:txBody>
+          <a:bodyPr rtlCol="0" anchor="ctr"/>
+          <a:lstStyle/>
+          <a:p>
+            <a:pPr algn="ctr"/>
+            <a:endParaRPr lang="en-US"/>
+          </a:p>
+        </p:txBody>
+      </p:sp>
+      <p:sp>
+        <p:nvSpPr>
+          <p:cNvPr id="39" name="Oval 38">
+            <a:extLst>
+              <a:ext uri="{FF2B5EF4-FFF2-40B4-BE49-F238E27FC236}">
+                <a16:creationId xmlns:a16="http://schemas.microsoft.com/office/drawing/2014/main" id="{9021EDC1-5819-55C6-06FF-6F0534E5C533}"/>
+              </a:ext>
+            </a:extLst>
+          </p:cNvPr>
+          <p:cNvSpPr/>
+          <p:nvPr/>
+        </p:nvSpPr>
+        <p:spPr>
+          <a:xfrm>
+            <a:off x="6630461" y="2375064"/>
+            <a:ext cx="142504" cy="142504"/>
+          </a:xfrm>
+          <a:prstGeom prst="ellipse">
+            <a:avLst/>
+          </a:prstGeom>
+        </p:spPr>
+        <p:style>
+          <a:lnRef idx="2">
+            <a:schemeClr val="accent1">
+              <a:shade val="15000"/>
+            </a:schemeClr>
+          </a:lnRef>
+          <a:fillRef idx="1">
+            <a:schemeClr val="accent1"/>
+          </a:fillRef>
+          <a:effectRef idx="0">
+            <a:schemeClr val="accent1"/>
+          </a:effectRef>
+          <a:fontRef idx="minor">
+            <a:schemeClr val="lt1"/>
+          </a:fontRef>
+        </p:style>
+        <p:txBody>
+          <a:bodyPr rtlCol="0" anchor="ctr"/>
+          <a:lstStyle/>
+          <a:p>
+            <a:pPr algn="ctr"/>
+            <a:endParaRPr lang="en-US"/>
+          </a:p>
+        </p:txBody>
+      </p:sp>
+      <p:sp>
+        <p:nvSpPr>
+          <p:cNvPr id="40" name="Oval 39">
+            <a:extLst>
+              <a:ext uri="{FF2B5EF4-FFF2-40B4-BE49-F238E27FC236}">
+                <a16:creationId xmlns:a16="http://schemas.microsoft.com/office/drawing/2014/main" id="{09B6F4E7-CB88-C5DD-3164-7863767998F4}"/>
+              </a:ext>
+            </a:extLst>
+          </p:cNvPr>
+          <p:cNvSpPr/>
+          <p:nvPr/>
+        </p:nvSpPr>
+        <p:spPr>
+          <a:xfrm>
+            <a:off x="6630461" y="1768528"/>
+            <a:ext cx="142504" cy="142504"/>
+          </a:xfrm>
+          <a:prstGeom prst="ellipse">
+            <a:avLst/>
+          </a:prstGeom>
+        </p:spPr>
+        <p:style>
+          <a:lnRef idx="2">
+            <a:schemeClr val="accent1">
+              <a:shade val="15000"/>
+            </a:schemeClr>
+          </a:lnRef>
+          <a:fillRef idx="1">
+            <a:schemeClr val="accent1"/>
+          </a:fillRef>
+          <a:effectRef idx="0">
+            <a:schemeClr val="accent1"/>
+          </a:effectRef>
+          <a:fontRef idx="minor">
+            <a:schemeClr val="lt1"/>
+          </a:fontRef>
+        </p:style>
+        <p:txBody>
+          <a:bodyPr rtlCol="0" anchor="ctr"/>
+          <a:lstStyle/>
+          <a:p>
+            <a:pPr algn="ctr"/>
+            <a:endParaRPr lang="en-US"/>
+          </a:p>
+        </p:txBody>
+      </p:sp>
+      <p:sp>
+        <p:nvSpPr>
+          <p:cNvPr id="41" name="Oval 40">
+            <a:extLst>
+              <a:ext uri="{FF2B5EF4-FFF2-40B4-BE49-F238E27FC236}">
+                <a16:creationId xmlns:a16="http://schemas.microsoft.com/office/drawing/2014/main" id="{B31FB0C7-66C5-5704-6144-51FDC097E95D}"/>
+              </a:ext>
+            </a:extLst>
+          </p:cNvPr>
+          <p:cNvSpPr/>
+          <p:nvPr/>
+        </p:nvSpPr>
+        <p:spPr>
+          <a:xfrm>
+            <a:off x="5419036" y="2981600"/>
+            <a:ext cx="142504" cy="142504"/>
+          </a:xfrm>
+          <a:prstGeom prst="ellipse">
+            <a:avLst/>
+          </a:prstGeom>
+        </p:spPr>
+        <p:style>
+          <a:lnRef idx="2">
+            <a:schemeClr val="accent1">
+              <a:shade val="15000"/>
+            </a:schemeClr>
+          </a:lnRef>
+          <a:fillRef idx="1">
+            <a:schemeClr val="accent1"/>
+          </a:fillRef>
+          <a:effectRef idx="0">
+            <a:schemeClr val="accent1"/>
+          </a:effectRef>
+          <a:fontRef idx="minor">
+            <a:schemeClr val="lt1"/>
+          </a:fontRef>
+        </p:style>
+        <p:txBody>
+          <a:bodyPr rtlCol="0" anchor="ctr"/>
+          <a:lstStyle/>
+          <a:p>
+            <a:pPr algn="ctr"/>
+            <a:endParaRPr lang="en-US"/>
+          </a:p>
+        </p:txBody>
+      </p:sp>
+      <p:sp>
+        <p:nvSpPr>
+          <p:cNvPr id="42" name="Oval 41">
+            <a:extLst>
+              <a:ext uri="{FF2B5EF4-FFF2-40B4-BE49-F238E27FC236}">
+                <a16:creationId xmlns:a16="http://schemas.microsoft.com/office/drawing/2014/main" id="{A8D7C612-885A-1297-59E8-DBFD99DAEFF3}"/>
+              </a:ext>
+            </a:extLst>
+          </p:cNvPr>
+          <p:cNvSpPr/>
+          <p:nvPr/>
+        </p:nvSpPr>
+        <p:spPr>
+          <a:xfrm>
+            <a:off x="5419036" y="2375064"/>
+            <a:ext cx="142504" cy="142504"/>
+          </a:xfrm>
+          <a:prstGeom prst="ellipse">
+            <a:avLst/>
+          </a:prstGeom>
+        </p:spPr>
+        <p:style>
+          <a:lnRef idx="2">
+            <a:schemeClr val="accent1">
+              <a:shade val="15000"/>
+            </a:schemeClr>
+          </a:lnRef>
+          <a:fillRef idx="1">
+            <a:schemeClr val="accent1"/>
+          </a:fillRef>
+          <a:effectRef idx="0">
+            <a:schemeClr val="accent1"/>
+          </a:effectRef>
+          <a:fontRef idx="minor">
+            <a:schemeClr val="lt1"/>
+          </a:fontRef>
+        </p:style>
+        <p:txBody>
+          <a:bodyPr rtlCol="0" anchor="ctr"/>
+          <a:lstStyle/>
+          <a:p>
+            <a:pPr algn="ctr"/>
+            <a:endParaRPr lang="en-US"/>
+          </a:p>
+        </p:txBody>
+      </p:sp>
+      <p:sp>
+        <p:nvSpPr>
+          <p:cNvPr id="43" name="Oval 42">
+            <a:extLst>
+              <a:ext uri="{FF2B5EF4-FFF2-40B4-BE49-F238E27FC236}">
+                <a16:creationId xmlns:a16="http://schemas.microsoft.com/office/drawing/2014/main" id="{C79F0E65-AE50-502F-BFBC-90ABAA6A433D}"/>
+              </a:ext>
+            </a:extLst>
+          </p:cNvPr>
+          <p:cNvSpPr/>
+          <p:nvPr/>
+        </p:nvSpPr>
+        <p:spPr>
+          <a:xfrm>
+            <a:off x="5419036" y="1768528"/>
+            <a:ext cx="142504" cy="142504"/>
+          </a:xfrm>
+          <a:prstGeom prst="ellipse">
+            <a:avLst/>
+          </a:prstGeom>
+        </p:spPr>
+        <p:style>
+          <a:lnRef idx="2">
+            <a:schemeClr val="accent1">
+              <a:shade val="15000"/>
+            </a:schemeClr>
+          </a:lnRef>
+          <a:fillRef idx="1">
+            <a:schemeClr val="accent1"/>
+          </a:fillRef>
+          <a:effectRef idx="0">
+            <a:schemeClr val="accent1"/>
+          </a:effectRef>
+          <a:fontRef idx="minor">
+            <a:schemeClr val="lt1"/>
+          </a:fontRef>
+        </p:style>
+        <p:txBody>
+          <a:bodyPr rtlCol="0" anchor="ctr"/>
+          <a:lstStyle/>
+          <a:p>
+            <a:pPr algn="ctr"/>
+            <a:endParaRPr lang="en-US"/>
+          </a:p>
+        </p:txBody>
+      </p:sp>
+      <p:sp>
+        <p:nvSpPr>
+          <p:cNvPr id="44" name="Oval 43">
+            <a:extLst>
+              <a:ext uri="{FF2B5EF4-FFF2-40B4-BE49-F238E27FC236}">
+                <a16:creationId xmlns:a16="http://schemas.microsoft.com/office/drawing/2014/main" id="{AFE03C79-AC85-12DD-D612-873D80C2124F}"/>
+              </a:ext>
+            </a:extLst>
+          </p:cNvPr>
+          <p:cNvSpPr/>
+          <p:nvPr/>
+        </p:nvSpPr>
+        <p:spPr>
+          <a:xfrm>
+            <a:off x="6032542" y="1762601"/>
+            <a:ext cx="142504" cy="142504"/>
+          </a:xfrm>
+          <a:prstGeom prst="ellipse">
+            <a:avLst/>
+          </a:prstGeom>
+        </p:spPr>
+        <p:style>
+          <a:lnRef idx="2">
+            <a:schemeClr val="accent1">
+              <a:shade val="15000"/>
+            </a:schemeClr>
+          </a:lnRef>
+          <a:fillRef idx="1">
+            <a:schemeClr val="accent1"/>
+          </a:fillRef>
+          <a:effectRef idx="0">
+            <a:schemeClr val="accent1"/>
+          </a:effectRef>
+          <a:fontRef idx="minor">
+            <a:schemeClr val="lt1"/>
+          </a:fontRef>
+        </p:style>
+        <p:txBody>
+          <a:bodyPr rtlCol="0" anchor="ctr"/>
+          <a:lstStyle/>
+          <a:p>
+            <a:pPr algn="ctr"/>
+            <a:endParaRPr lang="en-US"/>
+          </a:p>
+        </p:txBody>
+      </p:sp>
+      <p:sp>
+        <p:nvSpPr>
+          <p:cNvPr id="45" name="Oval 44">
+            <a:extLst>
+              <a:ext uri="{FF2B5EF4-FFF2-40B4-BE49-F238E27FC236}">
+                <a16:creationId xmlns:a16="http://schemas.microsoft.com/office/drawing/2014/main" id="{C412A946-D4C7-B68F-9CED-FEC22D6020AF}"/>
+              </a:ext>
+            </a:extLst>
+          </p:cNvPr>
+          <p:cNvSpPr/>
+          <p:nvPr/>
+        </p:nvSpPr>
+        <p:spPr>
+          <a:xfrm>
+            <a:off x="6029776" y="2981597"/>
+            <a:ext cx="142504" cy="142504"/>
+          </a:xfrm>
+          <a:prstGeom prst="ellipse">
+            <a:avLst/>
+          </a:prstGeom>
+        </p:spPr>
+        <p:style>
+          <a:lnRef idx="2">
+            <a:schemeClr val="accent1">
+              <a:shade val="15000"/>
+            </a:schemeClr>
+          </a:lnRef>
+          <a:fillRef idx="1">
+            <a:schemeClr val="accent1"/>
+          </a:fillRef>
+          <a:effectRef idx="0">
+            <a:schemeClr val="accent1"/>
+          </a:effectRef>
+          <a:fontRef idx="minor">
+            <a:schemeClr val="lt1"/>
+          </a:fontRef>
+        </p:style>
+        <p:txBody>
+          <a:bodyPr rtlCol="0" anchor="ctr"/>
+          <a:lstStyle/>
+          <a:p>
+            <a:pPr algn="ctr"/>
+            <a:endParaRPr lang="en-US"/>
+          </a:p>
+        </p:txBody>
+      </p:sp>
+      <p:sp>
+        <p:nvSpPr>
+          <p:cNvPr id="19" name="Oval 18">
+            <a:extLst>
+              <a:ext uri="{FF2B5EF4-FFF2-40B4-BE49-F238E27FC236}">
+                <a16:creationId xmlns:a16="http://schemas.microsoft.com/office/drawing/2014/main" id="{6E48F913-8C98-0317-7125-27830A0DC232}"/>
+              </a:ext>
+            </a:extLst>
+          </p:cNvPr>
+          <p:cNvSpPr/>
+          <p:nvPr/>
+        </p:nvSpPr>
+        <p:spPr>
+          <a:xfrm>
+            <a:off x="6032878" y="2375064"/>
+            <a:ext cx="142504" cy="142504"/>
+          </a:xfrm>
+          <a:prstGeom prst="ellipse">
+            <a:avLst/>
+          </a:prstGeom>
+          <a:solidFill>
+            <a:srgbClr val="FF0000"/>
+          </a:solidFill>
+        </p:spPr>
+        <p:style>
+          <a:lnRef idx="2">
+            <a:schemeClr val="accent1">
+              <a:shade val="15000"/>
+            </a:schemeClr>
+          </a:lnRef>
+          <a:fillRef idx="1">
+            <a:schemeClr val="accent1"/>
+          </a:fillRef>
+          <a:effectRef idx="0">
+            <a:schemeClr val="accent1"/>
+          </a:effectRef>
+          <a:fontRef idx="minor">
+            <a:schemeClr val="lt1"/>
+          </a:fontRef>
+        </p:style>
+        <p:txBody>
+          <a:bodyPr rtlCol="0" anchor="ctr"/>
+          <a:lstStyle/>
+          <a:p>
+            <a:pPr algn="ctr"/>
+            <a:endParaRPr lang="en-US"/>
+          </a:p>
+        </p:txBody>
+      </p:sp>
     </p:spTree>
     <p:extLst>
       <p:ext uri="{BB962C8B-B14F-4D97-AF65-F5344CB8AC3E}">
         <p14:creationId xmlns:p14="http://schemas.microsoft.com/office/powerpoint/2010/main" val="2793390008"/>
+      </p:ext>
+    </p:extLst>
+  </p:cSld>
+  <p:clrMapOvr>
+    <a:masterClrMapping/>
+  </p:clrMapOvr>
+</p:sld>
+</file>
+
+<file path=ppt/slides/slide2.xml><?xml version="1.0" encoding="utf-8"?>
+<p:sld xmlns:a="http://schemas.openxmlformats.org/drawingml/2006/main" xmlns:r="http://schemas.openxmlformats.org/officeDocument/2006/relationships" xmlns:p="http://schemas.openxmlformats.org/presentationml/2006/main">
+  <p:cSld>
+    <p:spTree>
+      <p:nvGrpSpPr>
+        <p:cNvPr id="1" name=""/>
+        <p:cNvGrpSpPr/>
+        <p:nvPr/>
+      </p:nvGrpSpPr>
+      <p:grpSpPr>
+        <a:xfrm>
+          <a:off x="0" y="0"/>
+          <a:ext cx="0" cy="0"/>
+          <a:chOff x="0" y="0"/>
+          <a:chExt cx="0" cy="0"/>
+        </a:xfrm>
+      </p:grpSpPr>
+      <p:grpSp>
+        <p:nvGrpSpPr>
+          <p:cNvPr id="94" name="Group 93">
+            <a:extLst>
+              <a:ext uri="{FF2B5EF4-FFF2-40B4-BE49-F238E27FC236}">
+                <a16:creationId xmlns:a16="http://schemas.microsoft.com/office/drawing/2014/main" id="{D3AD89D5-A7E3-6940-7AFB-2CFEC600BE43}"/>
+              </a:ext>
+            </a:extLst>
+          </p:cNvPr>
+          <p:cNvGrpSpPr/>
+          <p:nvPr/>
+        </p:nvGrpSpPr>
+        <p:grpSpPr>
+          <a:xfrm>
+            <a:off x="914075" y="2246603"/>
+            <a:ext cx="1353929" cy="1361503"/>
+            <a:chOff x="1951573" y="2244381"/>
+            <a:chExt cx="1353929" cy="1361503"/>
+          </a:xfrm>
+        </p:grpSpPr>
+        <p:grpSp>
+          <p:nvGrpSpPr>
+            <p:cNvPr id="2" name="Group 1">
+              <a:extLst>
+                <a:ext uri="{FF2B5EF4-FFF2-40B4-BE49-F238E27FC236}">
+                  <a16:creationId xmlns:a16="http://schemas.microsoft.com/office/drawing/2014/main" id="{5CFA487E-4F79-DB27-FCDE-7E1DEF497495}"/>
+                </a:ext>
+              </a:extLst>
+            </p:cNvPr>
+            <p:cNvGrpSpPr/>
+            <p:nvPr/>
+          </p:nvGrpSpPr>
+          <p:grpSpPr>
+            <a:xfrm>
+              <a:off x="1951573" y="2321563"/>
+              <a:ext cx="1282677" cy="1218998"/>
+              <a:chOff x="5419036" y="1839783"/>
+              <a:chExt cx="1282677" cy="1218998"/>
+            </a:xfrm>
+          </p:grpSpPr>
+          <p:sp>
+            <p:nvSpPr>
+              <p:cNvPr id="3" name="Rectangle 2">
+                <a:extLst>
+                  <a:ext uri="{FF2B5EF4-FFF2-40B4-BE49-F238E27FC236}">
+                    <a16:creationId xmlns:a16="http://schemas.microsoft.com/office/drawing/2014/main" id="{4715FAC0-F2E3-D4EA-34F6-315C66EDC497}"/>
+                  </a:ext>
+                </a:extLst>
+              </p:cNvPr>
+              <p:cNvSpPr/>
+              <p:nvPr/>
+            </p:nvSpPr>
+            <p:spPr>
+              <a:xfrm>
+                <a:off x="5482464" y="1839783"/>
+                <a:ext cx="1219249" cy="1218998"/>
+              </a:xfrm>
+              <a:prstGeom prst="rect">
+                <a:avLst/>
+              </a:prstGeom>
+              <a:noFill/>
+              <a:ln w="15875">
+                <a:solidFill>
+                  <a:schemeClr val="bg2"/>
+                </a:solidFill>
+                <a:prstDash val="sysDash"/>
+              </a:ln>
+            </p:spPr>
+            <p:style>
+              <a:lnRef idx="2">
+                <a:schemeClr val="accent1">
+                  <a:shade val="15000"/>
+                </a:schemeClr>
+              </a:lnRef>
+              <a:fillRef idx="1">
+                <a:schemeClr val="accent1"/>
+              </a:fillRef>
+              <a:effectRef idx="0">
+                <a:schemeClr val="accent1"/>
+              </a:effectRef>
+              <a:fontRef idx="minor">
+                <a:schemeClr val="lt1"/>
+              </a:fontRef>
+            </p:style>
+            <p:txBody>
+              <a:bodyPr rtlCol="0" anchor="ctr"/>
+              <a:lstStyle/>
+              <a:p>
+                <a:pPr algn="ctr"/>
+                <a:endParaRPr lang="en-US"/>
+              </a:p>
+            </p:txBody>
+          </p:sp>
+          <p:cxnSp>
+            <p:nvCxnSpPr>
+              <p:cNvPr id="4" name="Straight Connector 3">
+                <a:extLst>
+                  <a:ext uri="{FF2B5EF4-FFF2-40B4-BE49-F238E27FC236}">
+                    <a16:creationId xmlns:a16="http://schemas.microsoft.com/office/drawing/2014/main" id="{632DAA26-75D5-81F2-9F7C-763B3F24CAEE}"/>
+                  </a:ext>
+                </a:extLst>
+              </p:cNvPr>
+              <p:cNvCxnSpPr>
+                <a:cxnSpLocks/>
+                <a:stCxn id="12" idx="4"/>
+              </p:cNvCxnSpPr>
+              <p:nvPr/>
+            </p:nvCxnSpPr>
+            <p:spPr>
+              <a:xfrm flipH="1">
+                <a:off x="6101028" y="1905105"/>
+                <a:ext cx="2766" cy="1147744"/>
+              </a:xfrm>
+              <a:prstGeom prst="line">
+                <a:avLst/>
+              </a:prstGeom>
+              <a:ln w="15875">
+                <a:solidFill>
+                  <a:schemeClr val="bg2"/>
+                </a:solidFill>
+                <a:prstDash val="sysDash"/>
+              </a:ln>
+            </p:spPr>
+            <p:style>
+              <a:lnRef idx="2">
+                <a:schemeClr val="accent1"/>
+              </a:lnRef>
+              <a:fillRef idx="0">
+                <a:schemeClr val="accent1"/>
+              </a:fillRef>
+              <a:effectRef idx="1">
+                <a:schemeClr val="accent1"/>
+              </a:effectRef>
+              <a:fontRef idx="minor">
+                <a:schemeClr val="tx1"/>
+              </a:fontRef>
+            </p:style>
+          </p:cxnSp>
+          <p:cxnSp>
+            <p:nvCxnSpPr>
+              <p:cNvPr id="5" name="Straight Connector 4">
+                <a:extLst>
+                  <a:ext uri="{FF2B5EF4-FFF2-40B4-BE49-F238E27FC236}">
+                    <a16:creationId xmlns:a16="http://schemas.microsoft.com/office/drawing/2014/main" id="{D5057EDF-126A-DB6C-D2D7-D9F73DA50EB9}"/>
+                  </a:ext>
+                </a:extLst>
+              </p:cNvPr>
+              <p:cNvCxnSpPr>
+                <a:stCxn id="10" idx="2"/>
+                <a:endCxn id="7" idx="2"/>
+              </p:cNvCxnSpPr>
+              <p:nvPr/>
+            </p:nvCxnSpPr>
+            <p:spPr>
+              <a:xfrm>
+                <a:off x="5419036" y="2446316"/>
+                <a:ext cx="1211425" cy="0"/>
+              </a:xfrm>
+              <a:prstGeom prst="line">
+                <a:avLst/>
+              </a:prstGeom>
+              <a:ln w="15875">
+                <a:solidFill>
+                  <a:schemeClr val="bg2"/>
+                </a:solidFill>
+                <a:prstDash val="sysDash"/>
+              </a:ln>
+            </p:spPr>
+            <p:style>
+              <a:lnRef idx="2">
+                <a:schemeClr val="accent1"/>
+              </a:lnRef>
+              <a:fillRef idx="0">
+                <a:schemeClr val="accent1"/>
+              </a:fillRef>
+              <a:effectRef idx="1">
+                <a:schemeClr val="accent1"/>
+              </a:effectRef>
+              <a:fontRef idx="minor">
+                <a:schemeClr val="tx1"/>
+              </a:fontRef>
+            </p:style>
+          </p:cxnSp>
+        </p:grpSp>
+        <p:sp>
+          <p:nvSpPr>
+            <p:cNvPr id="6" name="Oval 5">
+              <a:extLst>
+                <a:ext uri="{FF2B5EF4-FFF2-40B4-BE49-F238E27FC236}">
+                  <a16:creationId xmlns:a16="http://schemas.microsoft.com/office/drawing/2014/main" id="{2C9B2C05-DB76-2A00-7794-4704E98F6104}"/>
+                </a:ext>
+              </a:extLst>
+            </p:cNvPr>
+            <p:cNvSpPr/>
+            <p:nvPr/>
+          </p:nvSpPr>
+          <p:spPr>
+            <a:xfrm>
+              <a:off x="3162998" y="3463380"/>
+              <a:ext cx="142504" cy="142504"/>
+            </a:xfrm>
+            <a:prstGeom prst="ellipse">
+              <a:avLst/>
+            </a:prstGeom>
+            <a:solidFill>
+              <a:schemeClr val="bg2">
+                <a:lumMod val="90000"/>
+              </a:schemeClr>
+            </a:solidFill>
+            <a:ln>
+              <a:solidFill>
+                <a:schemeClr val="bg2"/>
+              </a:solidFill>
+            </a:ln>
+          </p:spPr>
+          <p:style>
+            <a:lnRef idx="2">
+              <a:schemeClr val="accent1">
+                <a:shade val="15000"/>
+              </a:schemeClr>
+            </a:lnRef>
+            <a:fillRef idx="1">
+              <a:schemeClr val="accent1"/>
+            </a:fillRef>
+            <a:effectRef idx="0">
+              <a:schemeClr val="accent1"/>
+            </a:effectRef>
+            <a:fontRef idx="minor">
+              <a:schemeClr val="lt1"/>
+            </a:fontRef>
+          </p:style>
+          <p:txBody>
+            <a:bodyPr rtlCol="0" anchor="ctr"/>
+            <a:lstStyle/>
+            <a:p>
+              <a:pPr algn="ctr"/>
+              <a:endParaRPr lang="en-US"/>
+            </a:p>
+          </p:txBody>
+        </p:sp>
+        <p:sp>
+          <p:nvSpPr>
+            <p:cNvPr id="7" name="Oval 6">
+              <a:extLst>
+                <a:ext uri="{FF2B5EF4-FFF2-40B4-BE49-F238E27FC236}">
+                  <a16:creationId xmlns:a16="http://schemas.microsoft.com/office/drawing/2014/main" id="{9EFDC634-D555-424E-81DE-30F73B47A333}"/>
+                </a:ext>
+              </a:extLst>
+            </p:cNvPr>
+            <p:cNvSpPr/>
+            <p:nvPr/>
+          </p:nvSpPr>
+          <p:spPr>
+            <a:xfrm>
+              <a:off x="3162998" y="2856844"/>
+              <a:ext cx="142504" cy="142504"/>
+            </a:xfrm>
+            <a:prstGeom prst="ellipse">
+              <a:avLst/>
+            </a:prstGeom>
+            <a:solidFill>
+              <a:schemeClr val="bg2">
+                <a:lumMod val="90000"/>
+              </a:schemeClr>
+            </a:solidFill>
+            <a:ln>
+              <a:solidFill>
+                <a:schemeClr val="bg2"/>
+              </a:solidFill>
+            </a:ln>
+          </p:spPr>
+          <p:style>
+            <a:lnRef idx="2">
+              <a:schemeClr val="accent1">
+                <a:shade val="15000"/>
+              </a:schemeClr>
+            </a:lnRef>
+            <a:fillRef idx="1">
+              <a:schemeClr val="accent1"/>
+            </a:fillRef>
+            <a:effectRef idx="0">
+              <a:schemeClr val="accent1"/>
+            </a:effectRef>
+            <a:fontRef idx="minor">
+              <a:schemeClr val="lt1"/>
+            </a:fontRef>
+          </p:style>
+          <p:txBody>
+            <a:bodyPr rtlCol="0" anchor="ctr"/>
+            <a:lstStyle/>
+            <a:p>
+              <a:pPr algn="ctr"/>
+              <a:endParaRPr lang="en-US"/>
+            </a:p>
+          </p:txBody>
+        </p:sp>
+        <p:sp>
+          <p:nvSpPr>
+            <p:cNvPr id="8" name="Oval 7">
+              <a:extLst>
+                <a:ext uri="{FF2B5EF4-FFF2-40B4-BE49-F238E27FC236}">
+                  <a16:creationId xmlns:a16="http://schemas.microsoft.com/office/drawing/2014/main" id="{EE1A2805-F27D-2DCA-BF75-B1FA02377817}"/>
+                </a:ext>
+              </a:extLst>
+            </p:cNvPr>
+            <p:cNvSpPr/>
+            <p:nvPr/>
+          </p:nvSpPr>
+          <p:spPr>
+            <a:xfrm>
+              <a:off x="3162998" y="2250308"/>
+              <a:ext cx="142504" cy="142504"/>
+            </a:xfrm>
+            <a:prstGeom prst="ellipse">
+              <a:avLst/>
+            </a:prstGeom>
+            <a:solidFill>
+              <a:schemeClr val="bg2">
+                <a:lumMod val="90000"/>
+              </a:schemeClr>
+            </a:solidFill>
+            <a:ln>
+              <a:solidFill>
+                <a:schemeClr val="bg2"/>
+              </a:solidFill>
+            </a:ln>
+          </p:spPr>
+          <p:style>
+            <a:lnRef idx="2">
+              <a:schemeClr val="accent1">
+                <a:shade val="15000"/>
+              </a:schemeClr>
+            </a:lnRef>
+            <a:fillRef idx="1">
+              <a:schemeClr val="accent1"/>
+            </a:fillRef>
+            <a:effectRef idx="0">
+              <a:schemeClr val="accent1"/>
+            </a:effectRef>
+            <a:fontRef idx="minor">
+              <a:schemeClr val="lt1"/>
+            </a:fontRef>
+          </p:style>
+          <p:txBody>
+            <a:bodyPr rtlCol="0" anchor="ctr"/>
+            <a:lstStyle/>
+            <a:p>
+              <a:pPr algn="ctr"/>
+              <a:endParaRPr lang="en-US"/>
+            </a:p>
+          </p:txBody>
+        </p:sp>
+        <p:sp>
+          <p:nvSpPr>
+            <p:cNvPr id="9" name="Oval 8">
+              <a:extLst>
+                <a:ext uri="{FF2B5EF4-FFF2-40B4-BE49-F238E27FC236}">
+                  <a16:creationId xmlns:a16="http://schemas.microsoft.com/office/drawing/2014/main" id="{39B81481-7C40-2D46-FCF0-4ADCD1782893}"/>
+                </a:ext>
+              </a:extLst>
+            </p:cNvPr>
+            <p:cNvSpPr/>
+            <p:nvPr/>
+          </p:nvSpPr>
+          <p:spPr>
+            <a:xfrm>
+              <a:off x="1951573" y="3463380"/>
+              <a:ext cx="142504" cy="142504"/>
+            </a:xfrm>
+            <a:prstGeom prst="ellipse">
+              <a:avLst/>
+            </a:prstGeom>
+            <a:solidFill>
+              <a:schemeClr val="bg2">
+                <a:lumMod val="90000"/>
+              </a:schemeClr>
+            </a:solidFill>
+            <a:ln>
+              <a:solidFill>
+                <a:schemeClr val="bg2"/>
+              </a:solidFill>
+            </a:ln>
+          </p:spPr>
+          <p:style>
+            <a:lnRef idx="2">
+              <a:schemeClr val="accent1">
+                <a:shade val="15000"/>
+              </a:schemeClr>
+            </a:lnRef>
+            <a:fillRef idx="1">
+              <a:schemeClr val="accent1"/>
+            </a:fillRef>
+            <a:effectRef idx="0">
+              <a:schemeClr val="accent1"/>
+            </a:effectRef>
+            <a:fontRef idx="minor">
+              <a:schemeClr val="lt1"/>
+            </a:fontRef>
+          </p:style>
+          <p:txBody>
+            <a:bodyPr rtlCol="0" anchor="ctr"/>
+            <a:lstStyle/>
+            <a:p>
+              <a:pPr algn="ctr"/>
+              <a:endParaRPr lang="en-US"/>
+            </a:p>
+          </p:txBody>
+        </p:sp>
+        <p:sp>
+          <p:nvSpPr>
+            <p:cNvPr id="10" name="Oval 9">
+              <a:extLst>
+                <a:ext uri="{FF2B5EF4-FFF2-40B4-BE49-F238E27FC236}">
+                  <a16:creationId xmlns:a16="http://schemas.microsoft.com/office/drawing/2014/main" id="{725BFED5-6AD6-20A4-8C83-0E1A55E053FE}"/>
+                </a:ext>
+              </a:extLst>
+            </p:cNvPr>
+            <p:cNvSpPr/>
+            <p:nvPr/>
+          </p:nvSpPr>
+          <p:spPr>
+            <a:xfrm>
+              <a:off x="1951573" y="2856844"/>
+              <a:ext cx="142504" cy="142504"/>
+            </a:xfrm>
+            <a:prstGeom prst="ellipse">
+              <a:avLst/>
+            </a:prstGeom>
+            <a:solidFill>
+              <a:schemeClr val="bg2">
+                <a:lumMod val="90000"/>
+              </a:schemeClr>
+            </a:solidFill>
+            <a:ln>
+              <a:solidFill>
+                <a:schemeClr val="bg2"/>
+              </a:solidFill>
+            </a:ln>
+          </p:spPr>
+          <p:style>
+            <a:lnRef idx="2">
+              <a:schemeClr val="accent1">
+                <a:shade val="15000"/>
+              </a:schemeClr>
+            </a:lnRef>
+            <a:fillRef idx="1">
+              <a:schemeClr val="accent1"/>
+            </a:fillRef>
+            <a:effectRef idx="0">
+              <a:schemeClr val="accent1"/>
+            </a:effectRef>
+            <a:fontRef idx="minor">
+              <a:schemeClr val="lt1"/>
+            </a:fontRef>
+          </p:style>
+          <p:txBody>
+            <a:bodyPr rtlCol="0" anchor="ctr"/>
+            <a:lstStyle/>
+            <a:p>
+              <a:pPr algn="ctr"/>
+              <a:endParaRPr lang="en-US"/>
+            </a:p>
+          </p:txBody>
+        </p:sp>
+        <p:sp>
+          <p:nvSpPr>
+            <p:cNvPr id="11" name="Oval 10">
+              <a:extLst>
+                <a:ext uri="{FF2B5EF4-FFF2-40B4-BE49-F238E27FC236}">
+                  <a16:creationId xmlns:a16="http://schemas.microsoft.com/office/drawing/2014/main" id="{D8D55293-DDE5-4983-DC91-20F15BE558F2}"/>
+                </a:ext>
+              </a:extLst>
+            </p:cNvPr>
+            <p:cNvSpPr/>
+            <p:nvPr/>
+          </p:nvSpPr>
+          <p:spPr>
+            <a:xfrm>
+              <a:off x="1951573" y="2250308"/>
+              <a:ext cx="142504" cy="142504"/>
+            </a:xfrm>
+            <a:prstGeom prst="ellipse">
+              <a:avLst/>
+            </a:prstGeom>
+            <a:solidFill>
+              <a:schemeClr val="bg2">
+                <a:lumMod val="90000"/>
+              </a:schemeClr>
+            </a:solidFill>
+            <a:ln>
+              <a:solidFill>
+                <a:schemeClr val="bg2"/>
+              </a:solidFill>
+            </a:ln>
+          </p:spPr>
+          <p:style>
+            <a:lnRef idx="2">
+              <a:schemeClr val="accent1">
+                <a:shade val="15000"/>
+              </a:schemeClr>
+            </a:lnRef>
+            <a:fillRef idx="1">
+              <a:schemeClr val="accent1"/>
+            </a:fillRef>
+            <a:effectRef idx="0">
+              <a:schemeClr val="accent1"/>
+            </a:effectRef>
+            <a:fontRef idx="minor">
+              <a:schemeClr val="lt1"/>
+            </a:fontRef>
+          </p:style>
+          <p:txBody>
+            <a:bodyPr rtlCol="0" anchor="ctr"/>
+            <a:lstStyle/>
+            <a:p>
+              <a:pPr algn="ctr"/>
+              <a:endParaRPr lang="en-US"/>
+            </a:p>
+          </p:txBody>
+        </p:sp>
+        <p:sp>
+          <p:nvSpPr>
+            <p:cNvPr id="12" name="Oval 11">
+              <a:extLst>
+                <a:ext uri="{FF2B5EF4-FFF2-40B4-BE49-F238E27FC236}">
+                  <a16:creationId xmlns:a16="http://schemas.microsoft.com/office/drawing/2014/main" id="{4FBB1B01-0345-3C0D-C996-AFEE0F2BE1A1}"/>
+                </a:ext>
+              </a:extLst>
+            </p:cNvPr>
+            <p:cNvSpPr/>
+            <p:nvPr/>
+          </p:nvSpPr>
+          <p:spPr>
+            <a:xfrm>
+              <a:off x="2565079" y="2244381"/>
+              <a:ext cx="142504" cy="142504"/>
+            </a:xfrm>
+            <a:prstGeom prst="ellipse">
+              <a:avLst/>
+            </a:prstGeom>
+            <a:solidFill>
+              <a:schemeClr val="bg2">
+                <a:lumMod val="90000"/>
+              </a:schemeClr>
+            </a:solidFill>
+            <a:ln>
+              <a:solidFill>
+                <a:schemeClr val="bg2"/>
+              </a:solidFill>
+            </a:ln>
+          </p:spPr>
+          <p:style>
+            <a:lnRef idx="2">
+              <a:schemeClr val="accent1">
+                <a:shade val="15000"/>
+              </a:schemeClr>
+            </a:lnRef>
+            <a:fillRef idx="1">
+              <a:schemeClr val="accent1"/>
+            </a:fillRef>
+            <a:effectRef idx="0">
+              <a:schemeClr val="accent1"/>
+            </a:effectRef>
+            <a:fontRef idx="minor">
+              <a:schemeClr val="lt1"/>
+            </a:fontRef>
+          </p:style>
+          <p:txBody>
+            <a:bodyPr rtlCol="0" anchor="ctr"/>
+            <a:lstStyle/>
+            <a:p>
+              <a:pPr algn="ctr"/>
+              <a:endParaRPr lang="en-US"/>
+            </a:p>
+          </p:txBody>
+        </p:sp>
+        <p:sp>
+          <p:nvSpPr>
+            <p:cNvPr id="13" name="Oval 12">
+              <a:extLst>
+                <a:ext uri="{FF2B5EF4-FFF2-40B4-BE49-F238E27FC236}">
+                  <a16:creationId xmlns:a16="http://schemas.microsoft.com/office/drawing/2014/main" id="{C19BF410-5025-B84D-7F57-8E3D76DBF651}"/>
+                </a:ext>
+              </a:extLst>
+            </p:cNvPr>
+            <p:cNvSpPr/>
+            <p:nvPr/>
+          </p:nvSpPr>
+          <p:spPr>
+            <a:xfrm>
+              <a:off x="2562313" y="3463377"/>
+              <a:ext cx="142504" cy="142504"/>
+            </a:xfrm>
+            <a:prstGeom prst="ellipse">
+              <a:avLst/>
+            </a:prstGeom>
+            <a:solidFill>
+              <a:schemeClr val="bg2">
+                <a:lumMod val="90000"/>
+              </a:schemeClr>
+            </a:solidFill>
+            <a:ln>
+              <a:solidFill>
+                <a:schemeClr val="bg2"/>
+              </a:solidFill>
+            </a:ln>
+          </p:spPr>
+          <p:style>
+            <a:lnRef idx="2">
+              <a:schemeClr val="accent1">
+                <a:shade val="15000"/>
+              </a:schemeClr>
+            </a:lnRef>
+            <a:fillRef idx="1">
+              <a:schemeClr val="accent1"/>
+            </a:fillRef>
+            <a:effectRef idx="0">
+              <a:schemeClr val="accent1"/>
+            </a:effectRef>
+            <a:fontRef idx="minor">
+              <a:schemeClr val="lt1"/>
+            </a:fontRef>
+          </p:style>
+          <p:txBody>
+            <a:bodyPr rtlCol="0" anchor="ctr"/>
+            <a:lstStyle/>
+            <a:p>
+              <a:pPr algn="ctr"/>
+              <a:endParaRPr lang="en-US"/>
+            </a:p>
+          </p:txBody>
+        </p:sp>
+        <p:sp>
+          <p:nvSpPr>
+            <p:cNvPr id="14" name="Oval 13">
+              <a:extLst>
+                <a:ext uri="{FF2B5EF4-FFF2-40B4-BE49-F238E27FC236}">
+                  <a16:creationId xmlns:a16="http://schemas.microsoft.com/office/drawing/2014/main" id="{BF085970-016F-A644-4328-082968F08911}"/>
+                </a:ext>
+              </a:extLst>
+            </p:cNvPr>
+            <p:cNvSpPr/>
+            <p:nvPr/>
+          </p:nvSpPr>
+          <p:spPr>
+            <a:xfrm>
+              <a:off x="2565415" y="2856844"/>
+              <a:ext cx="142504" cy="142504"/>
+            </a:xfrm>
+            <a:prstGeom prst="ellipse">
+              <a:avLst/>
+            </a:prstGeom>
+            <a:solidFill>
+              <a:schemeClr val="bg2">
+                <a:lumMod val="90000"/>
+              </a:schemeClr>
+            </a:solidFill>
+            <a:ln>
+              <a:solidFill>
+                <a:schemeClr val="bg2"/>
+              </a:solidFill>
+            </a:ln>
+          </p:spPr>
+          <p:style>
+            <a:lnRef idx="2">
+              <a:schemeClr val="accent1">
+                <a:shade val="15000"/>
+              </a:schemeClr>
+            </a:lnRef>
+            <a:fillRef idx="1">
+              <a:schemeClr val="accent1"/>
+            </a:fillRef>
+            <a:effectRef idx="0">
+              <a:schemeClr val="accent1"/>
+            </a:effectRef>
+            <a:fontRef idx="minor">
+              <a:schemeClr val="lt1"/>
+            </a:fontRef>
+          </p:style>
+          <p:txBody>
+            <a:bodyPr rtlCol="0" anchor="ctr"/>
+            <a:lstStyle/>
+            <a:p>
+              <a:pPr algn="ctr"/>
+              <a:endParaRPr lang="en-US"/>
+            </a:p>
+          </p:txBody>
+        </p:sp>
+      </p:grpSp>
+      <p:grpSp>
+        <p:nvGrpSpPr>
+          <p:cNvPr id="34" name="Group 33">
+            <a:extLst>
+              <a:ext uri="{FF2B5EF4-FFF2-40B4-BE49-F238E27FC236}">
+                <a16:creationId xmlns:a16="http://schemas.microsoft.com/office/drawing/2014/main" id="{D9D9CD67-0AAB-08CA-348E-E9AD5A6ED403}"/>
+              </a:ext>
+            </a:extLst>
+          </p:cNvPr>
+          <p:cNvGrpSpPr/>
+          <p:nvPr/>
+        </p:nvGrpSpPr>
+        <p:grpSpPr>
+          <a:xfrm>
+            <a:off x="1527581" y="1643030"/>
+            <a:ext cx="1353929" cy="1361503"/>
+            <a:chOff x="5419036" y="1762601"/>
+            <a:chExt cx="1353929" cy="1361503"/>
+          </a:xfrm>
+        </p:grpSpPr>
+        <p:grpSp>
+          <p:nvGrpSpPr>
+            <p:cNvPr id="35" name="Group 34">
+              <a:extLst>
+                <a:ext uri="{FF2B5EF4-FFF2-40B4-BE49-F238E27FC236}">
+                  <a16:creationId xmlns:a16="http://schemas.microsoft.com/office/drawing/2014/main" id="{EF18BD67-197B-F176-EC7D-7933A233278E}"/>
+                </a:ext>
+              </a:extLst>
+            </p:cNvPr>
+            <p:cNvGrpSpPr/>
+            <p:nvPr/>
+          </p:nvGrpSpPr>
+          <p:grpSpPr>
+            <a:xfrm>
+              <a:off x="5419036" y="1839783"/>
+              <a:ext cx="1282677" cy="1218998"/>
+              <a:chOff x="5419036" y="1839783"/>
+              <a:chExt cx="1282677" cy="1218998"/>
+            </a:xfrm>
+          </p:grpSpPr>
+          <p:sp>
+            <p:nvSpPr>
+              <p:cNvPr id="45" name="Rectangle 44">
+                <a:extLst>
+                  <a:ext uri="{FF2B5EF4-FFF2-40B4-BE49-F238E27FC236}">
+                    <a16:creationId xmlns:a16="http://schemas.microsoft.com/office/drawing/2014/main" id="{BE1BFB3C-8C7E-55C0-5086-8370DC2A3DEC}"/>
+                  </a:ext>
+                </a:extLst>
+              </p:cNvPr>
+              <p:cNvSpPr/>
+              <p:nvPr/>
+            </p:nvSpPr>
+            <p:spPr>
+              <a:xfrm>
+                <a:off x="5482464" y="1839783"/>
+                <a:ext cx="1219249" cy="1218998"/>
+              </a:xfrm>
+              <a:prstGeom prst="rect">
+                <a:avLst/>
+              </a:prstGeom>
+              <a:noFill/>
+              <a:ln w="15875">
+                <a:solidFill>
+                  <a:schemeClr val="tx1"/>
+                </a:solidFill>
+                <a:prstDash val="sysDash"/>
+              </a:ln>
+            </p:spPr>
+            <p:style>
+              <a:lnRef idx="2">
+                <a:schemeClr val="accent1">
+                  <a:shade val="15000"/>
+                </a:schemeClr>
+              </a:lnRef>
+              <a:fillRef idx="1">
+                <a:schemeClr val="accent1"/>
+              </a:fillRef>
+              <a:effectRef idx="0">
+                <a:schemeClr val="accent1"/>
+              </a:effectRef>
+              <a:fontRef idx="minor">
+                <a:schemeClr val="lt1"/>
+              </a:fontRef>
+            </p:style>
+            <p:txBody>
+              <a:bodyPr rtlCol="0" anchor="ctr"/>
+              <a:lstStyle/>
+              <a:p>
+                <a:pPr algn="ctr"/>
+                <a:endParaRPr lang="en-US"/>
+              </a:p>
+            </p:txBody>
+          </p:sp>
+          <p:cxnSp>
+            <p:nvCxnSpPr>
+              <p:cNvPr id="46" name="Straight Connector 45">
+                <a:extLst>
+                  <a:ext uri="{FF2B5EF4-FFF2-40B4-BE49-F238E27FC236}">
+                    <a16:creationId xmlns:a16="http://schemas.microsoft.com/office/drawing/2014/main" id="{EBBD3C8A-FF5A-7195-F28E-421B340B0F49}"/>
+                  </a:ext>
+                </a:extLst>
+              </p:cNvPr>
+              <p:cNvCxnSpPr>
+                <a:cxnSpLocks/>
+                <a:stCxn id="42" idx="4"/>
+              </p:cNvCxnSpPr>
+              <p:nvPr/>
+            </p:nvCxnSpPr>
+            <p:spPr>
+              <a:xfrm flipH="1">
+                <a:off x="6101028" y="1905105"/>
+                <a:ext cx="2766" cy="1147744"/>
+              </a:xfrm>
+              <a:prstGeom prst="line">
+                <a:avLst/>
+              </a:prstGeom>
+              <a:ln w="15875">
+                <a:solidFill>
+                  <a:schemeClr val="tx1"/>
+                </a:solidFill>
+                <a:prstDash val="sysDash"/>
+              </a:ln>
+            </p:spPr>
+            <p:style>
+              <a:lnRef idx="2">
+                <a:schemeClr val="accent1"/>
+              </a:lnRef>
+              <a:fillRef idx="0">
+                <a:schemeClr val="accent1"/>
+              </a:fillRef>
+              <a:effectRef idx="1">
+                <a:schemeClr val="accent1"/>
+              </a:effectRef>
+              <a:fontRef idx="minor">
+                <a:schemeClr val="tx1"/>
+              </a:fontRef>
+            </p:style>
+          </p:cxnSp>
+          <p:cxnSp>
+            <p:nvCxnSpPr>
+              <p:cNvPr id="47" name="Straight Connector 46">
+                <a:extLst>
+                  <a:ext uri="{FF2B5EF4-FFF2-40B4-BE49-F238E27FC236}">
+                    <a16:creationId xmlns:a16="http://schemas.microsoft.com/office/drawing/2014/main" id="{FA720BFA-319D-ED80-8B83-EEC65140CF98}"/>
+                  </a:ext>
+                </a:extLst>
+              </p:cNvPr>
+              <p:cNvCxnSpPr>
+                <a:stCxn id="40" idx="2"/>
+                <a:endCxn id="37" idx="2"/>
+              </p:cNvCxnSpPr>
+              <p:nvPr/>
+            </p:nvCxnSpPr>
+            <p:spPr>
+              <a:xfrm>
+                <a:off x="5419036" y="2446316"/>
+                <a:ext cx="1211425" cy="0"/>
+              </a:xfrm>
+              <a:prstGeom prst="line">
+                <a:avLst/>
+              </a:prstGeom>
+              <a:ln w="15875">
+                <a:solidFill>
+                  <a:schemeClr val="tx1"/>
+                </a:solidFill>
+                <a:prstDash val="sysDash"/>
+              </a:ln>
+            </p:spPr>
+            <p:style>
+              <a:lnRef idx="2">
+                <a:schemeClr val="accent1"/>
+              </a:lnRef>
+              <a:fillRef idx="0">
+                <a:schemeClr val="accent1"/>
+              </a:fillRef>
+              <a:effectRef idx="1">
+                <a:schemeClr val="accent1"/>
+              </a:effectRef>
+              <a:fontRef idx="minor">
+                <a:schemeClr val="tx1"/>
+              </a:fontRef>
+            </p:style>
+          </p:cxnSp>
+        </p:grpSp>
+        <p:sp>
+          <p:nvSpPr>
+            <p:cNvPr id="36" name="Oval 35">
+              <a:extLst>
+                <a:ext uri="{FF2B5EF4-FFF2-40B4-BE49-F238E27FC236}">
+                  <a16:creationId xmlns:a16="http://schemas.microsoft.com/office/drawing/2014/main" id="{7AA5BB1C-6FB5-44C9-4DFB-5F9B378779A1}"/>
+                </a:ext>
+              </a:extLst>
+            </p:cNvPr>
+            <p:cNvSpPr/>
+            <p:nvPr/>
+          </p:nvSpPr>
+          <p:spPr>
+            <a:xfrm>
+              <a:off x="6630461" y="2981600"/>
+              <a:ext cx="142504" cy="142504"/>
+            </a:xfrm>
+            <a:prstGeom prst="ellipse">
+              <a:avLst/>
+            </a:prstGeom>
+          </p:spPr>
+          <p:style>
+            <a:lnRef idx="2">
+              <a:schemeClr val="accent1">
+                <a:shade val="15000"/>
+              </a:schemeClr>
+            </a:lnRef>
+            <a:fillRef idx="1">
+              <a:schemeClr val="accent1"/>
+            </a:fillRef>
+            <a:effectRef idx="0">
+              <a:schemeClr val="accent1"/>
+            </a:effectRef>
+            <a:fontRef idx="minor">
+              <a:schemeClr val="lt1"/>
+            </a:fontRef>
+          </p:style>
+          <p:txBody>
+            <a:bodyPr rtlCol="0" anchor="ctr"/>
+            <a:lstStyle/>
+            <a:p>
+              <a:pPr algn="ctr"/>
+              <a:endParaRPr lang="en-US"/>
+            </a:p>
+          </p:txBody>
+        </p:sp>
+        <p:sp>
+          <p:nvSpPr>
+            <p:cNvPr id="37" name="Oval 36">
+              <a:extLst>
+                <a:ext uri="{FF2B5EF4-FFF2-40B4-BE49-F238E27FC236}">
+                  <a16:creationId xmlns:a16="http://schemas.microsoft.com/office/drawing/2014/main" id="{987749CC-3311-F391-A2FD-4EF9C5DCB328}"/>
+                </a:ext>
+              </a:extLst>
+            </p:cNvPr>
+            <p:cNvSpPr/>
+            <p:nvPr/>
+          </p:nvSpPr>
+          <p:spPr>
+            <a:xfrm>
+              <a:off x="6630461" y="2375064"/>
+              <a:ext cx="142504" cy="142504"/>
+            </a:xfrm>
+            <a:prstGeom prst="ellipse">
+              <a:avLst/>
+            </a:prstGeom>
+          </p:spPr>
+          <p:style>
+            <a:lnRef idx="2">
+              <a:schemeClr val="accent1">
+                <a:shade val="15000"/>
+              </a:schemeClr>
+            </a:lnRef>
+            <a:fillRef idx="1">
+              <a:schemeClr val="accent1"/>
+            </a:fillRef>
+            <a:effectRef idx="0">
+              <a:schemeClr val="accent1"/>
+            </a:effectRef>
+            <a:fontRef idx="minor">
+              <a:schemeClr val="lt1"/>
+            </a:fontRef>
+          </p:style>
+          <p:txBody>
+            <a:bodyPr rtlCol="0" anchor="ctr"/>
+            <a:lstStyle/>
+            <a:p>
+              <a:pPr algn="ctr"/>
+              <a:endParaRPr lang="en-US"/>
+            </a:p>
+          </p:txBody>
+        </p:sp>
+        <p:sp>
+          <p:nvSpPr>
+            <p:cNvPr id="38" name="Oval 37">
+              <a:extLst>
+                <a:ext uri="{FF2B5EF4-FFF2-40B4-BE49-F238E27FC236}">
+                  <a16:creationId xmlns:a16="http://schemas.microsoft.com/office/drawing/2014/main" id="{F01A1D00-8FF2-A5DB-AEA2-A530FCD31A1B}"/>
+                </a:ext>
+              </a:extLst>
+            </p:cNvPr>
+            <p:cNvSpPr/>
+            <p:nvPr/>
+          </p:nvSpPr>
+          <p:spPr>
+            <a:xfrm>
+              <a:off x="6630461" y="1768528"/>
+              <a:ext cx="142504" cy="142504"/>
+            </a:xfrm>
+            <a:prstGeom prst="ellipse">
+              <a:avLst/>
+            </a:prstGeom>
+          </p:spPr>
+          <p:style>
+            <a:lnRef idx="2">
+              <a:schemeClr val="accent1">
+                <a:shade val="15000"/>
+              </a:schemeClr>
+            </a:lnRef>
+            <a:fillRef idx="1">
+              <a:schemeClr val="accent1"/>
+            </a:fillRef>
+            <a:effectRef idx="0">
+              <a:schemeClr val="accent1"/>
+            </a:effectRef>
+            <a:fontRef idx="minor">
+              <a:schemeClr val="lt1"/>
+            </a:fontRef>
+          </p:style>
+          <p:txBody>
+            <a:bodyPr rtlCol="0" anchor="ctr"/>
+            <a:lstStyle/>
+            <a:p>
+              <a:pPr algn="ctr"/>
+              <a:endParaRPr lang="en-US"/>
+            </a:p>
+          </p:txBody>
+        </p:sp>
+        <p:sp>
+          <p:nvSpPr>
+            <p:cNvPr id="39" name="Oval 38">
+              <a:extLst>
+                <a:ext uri="{FF2B5EF4-FFF2-40B4-BE49-F238E27FC236}">
+                  <a16:creationId xmlns:a16="http://schemas.microsoft.com/office/drawing/2014/main" id="{9916C034-B1A3-DBAD-16FF-BA47E980B86A}"/>
+                </a:ext>
+              </a:extLst>
+            </p:cNvPr>
+            <p:cNvSpPr/>
+            <p:nvPr/>
+          </p:nvSpPr>
+          <p:spPr>
+            <a:xfrm>
+              <a:off x="5419036" y="2981600"/>
+              <a:ext cx="142504" cy="142504"/>
+            </a:xfrm>
+            <a:prstGeom prst="ellipse">
+              <a:avLst/>
+            </a:prstGeom>
+          </p:spPr>
+          <p:style>
+            <a:lnRef idx="2">
+              <a:schemeClr val="accent1">
+                <a:shade val="15000"/>
+              </a:schemeClr>
+            </a:lnRef>
+            <a:fillRef idx="1">
+              <a:schemeClr val="accent1"/>
+            </a:fillRef>
+            <a:effectRef idx="0">
+              <a:schemeClr val="accent1"/>
+            </a:effectRef>
+            <a:fontRef idx="minor">
+              <a:schemeClr val="lt1"/>
+            </a:fontRef>
+          </p:style>
+          <p:txBody>
+            <a:bodyPr rtlCol="0" anchor="ctr"/>
+            <a:lstStyle/>
+            <a:p>
+              <a:pPr algn="ctr"/>
+              <a:endParaRPr lang="en-US"/>
+            </a:p>
+          </p:txBody>
+        </p:sp>
+        <p:sp>
+          <p:nvSpPr>
+            <p:cNvPr id="40" name="Oval 39">
+              <a:extLst>
+                <a:ext uri="{FF2B5EF4-FFF2-40B4-BE49-F238E27FC236}">
+                  <a16:creationId xmlns:a16="http://schemas.microsoft.com/office/drawing/2014/main" id="{2F720273-CC89-C61E-CF60-21DFE13E25FF}"/>
+                </a:ext>
+              </a:extLst>
+            </p:cNvPr>
+            <p:cNvSpPr/>
+            <p:nvPr/>
+          </p:nvSpPr>
+          <p:spPr>
+            <a:xfrm>
+              <a:off x="5419036" y="2375064"/>
+              <a:ext cx="142504" cy="142504"/>
+            </a:xfrm>
+            <a:prstGeom prst="ellipse">
+              <a:avLst/>
+            </a:prstGeom>
+          </p:spPr>
+          <p:style>
+            <a:lnRef idx="2">
+              <a:schemeClr val="accent1">
+                <a:shade val="15000"/>
+              </a:schemeClr>
+            </a:lnRef>
+            <a:fillRef idx="1">
+              <a:schemeClr val="accent1"/>
+            </a:fillRef>
+            <a:effectRef idx="0">
+              <a:schemeClr val="accent1"/>
+            </a:effectRef>
+            <a:fontRef idx="minor">
+              <a:schemeClr val="lt1"/>
+            </a:fontRef>
+          </p:style>
+          <p:txBody>
+            <a:bodyPr rtlCol="0" anchor="ctr"/>
+            <a:lstStyle/>
+            <a:p>
+              <a:pPr algn="ctr"/>
+              <a:endParaRPr lang="en-US"/>
+            </a:p>
+          </p:txBody>
+        </p:sp>
+        <p:sp>
+          <p:nvSpPr>
+            <p:cNvPr id="41" name="Oval 40">
+              <a:extLst>
+                <a:ext uri="{FF2B5EF4-FFF2-40B4-BE49-F238E27FC236}">
+                  <a16:creationId xmlns:a16="http://schemas.microsoft.com/office/drawing/2014/main" id="{8ABA4E55-0B2D-CBEB-2BE1-B1185BD5F68C}"/>
+                </a:ext>
+              </a:extLst>
+            </p:cNvPr>
+            <p:cNvSpPr/>
+            <p:nvPr/>
+          </p:nvSpPr>
+          <p:spPr>
+            <a:xfrm>
+              <a:off x="5419036" y="1768528"/>
+              <a:ext cx="142504" cy="142504"/>
+            </a:xfrm>
+            <a:prstGeom prst="ellipse">
+              <a:avLst/>
+            </a:prstGeom>
+          </p:spPr>
+          <p:style>
+            <a:lnRef idx="2">
+              <a:schemeClr val="accent1">
+                <a:shade val="15000"/>
+              </a:schemeClr>
+            </a:lnRef>
+            <a:fillRef idx="1">
+              <a:schemeClr val="accent1"/>
+            </a:fillRef>
+            <a:effectRef idx="0">
+              <a:schemeClr val="accent1"/>
+            </a:effectRef>
+            <a:fontRef idx="minor">
+              <a:schemeClr val="lt1"/>
+            </a:fontRef>
+          </p:style>
+          <p:txBody>
+            <a:bodyPr rtlCol="0" anchor="ctr"/>
+            <a:lstStyle/>
+            <a:p>
+              <a:pPr algn="ctr"/>
+              <a:endParaRPr lang="en-US"/>
+            </a:p>
+          </p:txBody>
+        </p:sp>
+        <p:sp>
+          <p:nvSpPr>
+            <p:cNvPr id="42" name="Oval 41">
+              <a:extLst>
+                <a:ext uri="{FF2B5EF4-FFF2-40B4-BE49-F238E27FC236}">
+                  <a16:creationId xmlns:a16="http://schemas.microsoft.com/office/drawing/2014/main" id="{EFBD0F27-4D24-A554-C9E1-31DD14794F61}"/>
+                </a:ext>
+              </a:extLst>
+            </p:cNvPr>
+            <p:cNvSpPr/>
+            <p:nvPr/>
+          </p:nvSpPr>
+          <p:spPr>
+            <a:xfrm>
+              <a:off x="6032542" y="1762601"/>
+              <a:ext cx="142504" cy="142504"/>
+            </a:xfrm>
+            <a:prstGeom prst="ellipse">
+              <a:avLst/>
+            </a:prstGeom>
+          </p:spPr>
+          <p:style>
+            <a:lnRef idx="2">
+              <a:schemeClr val="accent1">
+                <a:shade val="15000"/>
+              </a:schemeClr>
+            </a:lnRef>
+            <a:fillRef idx="1">
+              <a:schemeClr val="accent1"/>
+            </a:fillRef>
+            <a:effectRef idx="0">
+              <a:schemeClr val="accent1"/>
+            </a:effectRef>
+            <a:fontRef idx="minor">
+              <a:schemeClr val="lt1"/>
+            </a:fontRef>
+          </p:style>
+          <p:txBody>
+            <a:bodyPr rtlCol="0" anchor="ctr"/>
+            <a:lstStyle/>
+            <a:p>
+              <a:pPr algn="ctr"/>
+              <a:endParaRPr lang="en-US"/>
+            </a:p>
+          </p:txBody>
+        </p:sp>
+        <p:sp>
+          <p:nvSpPr>
+            <p:cNvPr id="43" name="Oval 42">
+              <a:extLst>
+                <a:ext uri="{FF2B5EF4-FFF2-40B4-BE49-F238E27FC236}">
+                  <a16:creationId xmlns:a16="http://schemas.microsoft.com/office/drawing/2014/main" id="{E7DB45EE-AF8A-998B-91AA-01F1C30DC4BE}"/>
+                </a:ext>
+              </a:extLst>
+            </p:cNvPr>
+            <p:cNvSpPr/>
+            <p:nvPr/>
+          </p:nvSpPr>
+          <p:spPr>
+            <a:xfrm>
+              <a:off x="6029776" y="2981597"/>
+              <a:ext cx="142504" cy="142504"/>
+            </a:xfrm>
+            <a:prstGeom prst="ellipse">
+              <a:avLst/>
+            </a:prstGeom>
+          </p:spPr>
+          <p:style>
+            <a:lnRef idx="2">
+              <a:schemeClr val="accent1">
+                <a:shade val="15000"/>
+              </a:schemeClr>
+            </a:lnRef>
+            <a:fillRef idx="1">
+              <a:schemeClr val="accent1"/>
+            </a:fillRef>
+            <a:effectRef idx="0">
+              <a:schemeClr val="accent1"/>
+            </a:effectRef>
+            <a:fontRef idx="minor">
+              <a:schemeClr val="lt1"/>
+            </a:fontRef>
+          </p:style>
+          <p:txBody>
+            <a:bodyPr rtlCol="0" anchor="ctr"/>
+            <a:lstStyle/>
+            <a:p>
+              <a:pPr algn="ctr"/>
+              <a:endParaRPr lang="en-US"/>
+            </a:p>
+          </p:txBody>
+        </p:sp>
+        <p:sp>
+          <p:nvSpPr>
+            <p:cNvPr id="44" name="Oval 43">
+              <a:extLst>
+                <a:ext uri="{FF2B5EF4-FFF2-40B4-BE49-F238E27FC236}">
+                  <a16:creationId xmlns:a16="http://schemas.microsoft.com/office/drawing/2014/main" id="{9461F45F-68C0-77EA-2883-D6A09A782BF5}"/>
+                </a:ext>
+              </a:extLst>
+            </p:cNvPr>
+            <p:cNvSpPr/>
+            <p:nvPr/>
+          </p:nvSpPr>
+          <p:spPr>
+            <a:xfrm>
+              <a:off x="6032878" y="2375064"/>
+              <a:ext cx="142504" cy="142504"/>
+            </a:xfrm>
+            <a:prstGeom prst="ellipse">
+              <a:avLst/>
+            </a:prstGeom>
+            <a:solidFill>
+              <a:srgbClr val="FF0000"/>
+            </a:solidFill>
+          </p:spPr>
+          <p:style>
+            <a:lnRef idx="2">
+              <a:schemeClr val="accent1">
+                <a:shade val="15000"/>
+              </a:schemeClr>
+            </a:lnRef>
+            <a:fillRef idx="1">
+              <a:schemeClr val="accent1"/>
+            </a:fillRef>
+            <a:effectRef idx="0">
+              <a:schemeClr val="accent1"/>
+            </a:effectRef>
+            <a:fontRef idx="minor">
+              <a:schemeClr val="lt1"/>
+            </a:fontRef>
+          </p:style>
+          <p:txBody>
+            <a:bodyPr rtlCol="0" anchor="ctr"/>
+            <a:lstStyle/>
+            <a:p>
+              <a:pPr algn="ctr"/>
+              <a:endParaRPr lang="en-US"/>
+            </a:p>
+          </p:txBody>
+        </p:sp>
+      </p:grpSp>
+      <p:sp>
+        <p:nvSpPr>
+          <p:cNvPr id="49" name="TextBox 48">
+            <a:extLst>
+              <a:ext uri="{FF2B5EF4-FFF2-40B4-BE49-F238E27FC236}">
+                <a16:creationId xmlns:a16="http://schemas.microsoft.com/office/drawing/2014/main" id="{2036FF36-1FB1-8AD6-E518-8AFA19EE1AF4}"/>
+              </a:ext>
+            </a:extLst>
+          </p:cNvPr>
+          <p:cNvSpPr txBox="1"/>
+          <p:nvPr/>
+        </p:nvSpPr>
+        <p:spPr>
+          <a:xfrm>
+            <a:off x="1405922" y="1281915"/>
+            <a:ext cx="779381" cy="369332"/>
+          </a:xfrm>
+          <a:prstGeom prst="rect">
+            <a:avLst/>
+          </a:prstGeom>
+          <a:noFill/>
+        </p:spPr>
+        <p:txBody>
+          <a:bodyPr wrap="none" rtlCol="0">
+            <a:spAutoFit/>
+          </a:bodyPr>
+          <a:lstStyle/>
+          <a:p>
+            <a:r>
+              <a:rPr lang="en-US" dirty="0"/>
+              <a:t>Grid 2</a:t>
+            </a:r>
+          </a:p>
+        </p:txBody>
+      </p:sp>
+      <p:grpSp>
+        <p:nvGrpSpPr>
+          <p:cNvPr id="95" name="Group 94">
+            <a:extLst>
+              <a:ext uri="{FF2B5EF4-FFF2-40B4-BE49-F238E27FC236}">
+                <a16:creationId xmlns:a16="http://schemas.microsoft.com/office/drawing/2014/main" id="{FCDE272B-A66E-95C5-A12D-1E39CA2E32D4}"/>
+              </a:ext>
+            </a:extLst>
+          </p:cNvPr>
+          <p:cNvGrpSpPr/>
+          <p:nvPr/>
+        </p:nvGrpSpPr>
+        <p:grpSpPr>
+          <a:xfrm>
+            <a:off x="4694101" y="2177918"/>
+            <a:ext cx="1353929" cy="1361503"/>
+            <a:chOff x="1951573" y="2244381"/>
+            <a:chExt cx="1353929" cy="1361503"/>
+          </a:xfrm>
+        </p:grpSpPr>
+        <p:grpSp>
+          <p:nvGrpSpPr>
+            <p:cNvPr id="96" name="Group 95">
+              <a:extLst>
+                <a:ext uri="{FF2B5EF4-FFF2-40B4-BE49-F238E27FC236}">
+                  <a16:creationId xmlns:a16="http://schemas.microsoft.com/office/drawing/2014/main" id="{82917BA0-FCE5-94B2-A42F-2CC40E43EE2C}"/>
+                </a:ext>
+              </a:extLst>
+            </p:cNvPr>
+            <p:cNvGrpSpPr/>
+            <p:nvPr/>
+          </p:nvGrpSpPr>
+          <p:grpSpPr>
+            <a:xfrm>
+              <a:off x="1951573" y="2321563"/>
+              <a:ext cx="1282677" cy="1218998"/>
+              <a:chOff x="5419036" y="1839783"/>
+              <a:chExt cx="1282677" cy="1218998"/>
+            </a:xfrm>
+          </p:grpSpPr>
+          <p:sp>
+            <p:nvSpPr>
+              <p:cNvPr id="106" name="Rectangle 105">
+                <a:extLst>
+                  <a:ext uri="{FF2B5EF4-FFF2-40B4-BE49-F238E27FC236}">
+                    <a16:creationId xmlns:a16="http://schemas.microsoft.com/office/drawing/2014/main" id="{AB72334D-B430-3A41-A6DB-42BBA95F8458}"/>
+                  </a:ext>
+                </a:extLst>
+              </p:cNvPr>
+              <p:cNvSpPr/>
+              <p:nvPr/>
+            </p:nvSpPr>
+            <p:spPr>
+              <a:xfrm>
+                <a:off x="5482464" y="1839783"/>
+                <a:ext cx="1219249" cy="1218998"/>
+              </a:xfrm>
+              <a:prstGeom prst="rect">
+                <a:avLst/>
+              </a:prstGeom>
+              <a:noFill/>
+              <a:ln w="15875">
+                <a:solidFill>
+                  <a:schemeClr val="bg2"/>
+                </a:solidFill>
+                <a:prstDash val="sysDash"/>
+              </a:ln>
+            </p:spPr>
+            <p:style>
+              <a:lnRef idx="2">
+                <a:schemeClr val="accent1">
+                  <a:shade val="15000"/>
+                </a:schemeClr>
+              </a:lnRef>
+              <a:fillRef idx="1">
+                <a:schemeClr val="accent1"/>
+              </a:fillRef>
+              <a:effectRef idx="0">
+                <a:schemeClr val="accent1"/>
+              </a:effectRef>
+              <a:fontRef idx="minor">
+                <a:schemeClr val="lt1"/>
+              </a:fontRef>
+            </p:style>
+            <p:txBody>
+              <a:bodyPr rtlCol="0" anchor="ctr"/>
+              <a:lstStyle/>
+              <a:p>
+                <a:pPr algn="ctr"/>
+                <a:endParaRPr lang="en-US"/>
+              </a:p>
+            </p:txBody>
+          </p:sp>
+          <p:cxnSp>
+            <p:nvCxnSpPr>
+              <p:cNvPr id="107" name="Straight Connector 106">
+                <a:extLst>
+                  <a:ext uri="{FF2B5EF4-FFF2-40B4-BE49-F238E27FC236}">
+                    <a16:creationId xmlns:a16="http://schemas.microsoft.com/office/drawing/2014/main" id="{7D414CB9-EBF3-9EDE-E450-8AEE709C832D}"/>
+                  </a:ext>
+                </a:extLst>
+              </p:cNvPr>
+              <p:cNvCxnSpPr>
+                <a:cxnSpLocks/>
+                <a:stCxn id="103" idx="4"/>
+              </p:cNvCxnSpPr>
+              <p:nvPr/>
+            </p:nvCxnSpPr>
+            <p:spPr>
+              <a:xfrm flipH="1">
+                <a:off x="6101028" y="1905105"/>
+                <a:ext cx="2766" cy="1147744"/>
+              </a:xfrm>
+              <a:prstGeom prst="line">
+                <a:avLst/>
+              </a:prstGeom>
+              <a:ln w="15875">
+                <a:solidFill>
+                  <a:schemeClr val="bg2"/>
+                </a:solidFill>
+                <a:prstDash val="sysDash"/>
+              </a:ln>
+            </p:spPr>
+            <p:style>
+              <a:lnRef idx="2">
+                <a:schemeClr val="accent1"/>
+              </a:lnRef>
+              <a:fillRef idx="0">
+                <a:schemeClr val="accent1"/>
+              </a:fillRef>
+              <a:effectRef idx="1">
+                <a:schemeClr val="accent1"/>
+              </a:effectRef>
+              <a:fontRef idx="minor">
+                <a:schemeClr val="tx1"/>
+              </a:fontRef>
+            </p:style>
+          </p:cxnSp>
+          <p:cxnSp>
+            <p:nvCxnSpPr>
+              <p:cNvPr id="108" name="Straight Connector 107">
+                <a:extLst>
+                  <a:ext uri="{FF2B5EF4-FFF2-40B4-BE49-F238E27FC236}">
+                    <a16:creationId xmlns:a16="http://schemas.microsoft.com/office/drawing/2014/main" id="{D3BABE9B-94C5-B3E1-B7CF-871E1ECD6322}"/>
+                  </a:ext>
+                </a:extLst>
+              </p:cNvPr>
+              <p:cNvCxnSpPr>
+                <a:stCxn id="101" idx="2"/>
+                <a:endCxn id="98" idx="2"/>
+              </p:cNvCxnSpPr>
+              <p:nvPr/>
+            </p:nvCxnSpPr>
+            <p:spPr>
+              <a:xfrm>
+                <a:off x="5419036" y="2446316"/>
+                <a:ext cx="1211425" cy="0"/>
+              </a:xfrm>
+              <a:prstGeom prst="line">
+                <a:avLst/>
+              </a:prstGeom>
+              <a:ln w="15875">
+                <a:solidFill>
+                  <a:schemeClr val="bg2"/>
+                </a:solidFill>
+                <a:prstDash val="sysDash"/>
+              </a:ln>
+            </p:spPr>
+            <p:style>
+              <a:lnRef idx="2">
+                <a:schemeClr val="accent1"/>
+              </a:lnRef>
+              <a:fillRef idx="0">
+                <a:schemeClr val="accent1"/>
+              </a:fillRef>
+              <a:effectRef idx="1">
+                <a:schemeClr val="accent1"/>
+              </a:effectRef>
+              <a:fontRef idx="minor">
+                <a:schemeClr val="tx1"/>
+              </a:fontRef>
+            </p:style>
+          </p:cxnSp>
+        </p:grpSp>
+        <p:sp>
+          <p:nvSpPr>
+            <p:cNvPr id="97" name="Oval 96">
+              <a:extLst>
+                <a:ext uri="{FF2B5EF4-FFF2-40B4-BE49-F238E27FC236}">
+                  <a16:creationId xmlns:a16="http://schemas.microsoft.com/office/drawing/2014/main" id="{23C9ABBB-718C-9848-13FE-0C2BE0FA2D29}"/>
+                </a:ext>
+              </a:extLst>
+            </p:cNvPr>
+            <p:cNvSpPr/>
+            <p:nvPr/>
+          </p:nvSpPr>
+          <p:spPr>
+            <a:xfrm>
+              <a:off x="3162998" y="3463380"/>
+              <a:ext cx="142504" cy="142504"/>
+            </a:xfrm>
+            <a:prstGeom prst="ellipse">
+              <a:avLst/>
+            </a:prstGeom>
+            <a:solidFill>
+              <a:schemeClr val="bg2">
+                <a:lumMod val="90000"/>
+              </a:schemeClr>
+            </a:solidFill>
+            <a:ln>
+              <a:solidFill>
+                <a:schemeClr val="bg2"/>
+              </a:solidFill>
+            </a:ln>
+          </p:spPr>
+          <p:style>
+            <a:lnRef idx="2">
+              <a:schemeClr val="accent1">
+                <a:shade val="15000"/>
+              </a:schemeClr>
+            </a:lnRef>
+            <a:fillRef idx="1">
+              <a:schemeClr val="accent1"/>
+            </a:fillRef>
+            <a:effectRef idx="0">
+              <a:schemeClr val="accent1"/>
+            </a:effectRef>
+            <a:fontRef idx="minor">
+              <a:schemeClr val="lt1"/>
+            </a:fontRef>
+          </p:style>
+          <p:txBody>
+            <a:bodyPr rtlCol="0" anchor="ctr"/>
+            <a:lstStyle/>
+            <a:p>
+              <a:pPr algn="ctr"/>
+              <a:endParaRPr lang="en-US"/>
+            </a:p>
+          </p:txBody>
+        </p:sp>
+        <p:sp>
+          <p:nvSpPr>
+            <p:cNvPr id="98" name="Oval 97">
+              <a:extLst>
+                <a:ext uri="{FF2B5EF4-FFF2-40B4-BE49-F238E27FC236}">
+                  <a16:creationId xmlns:a16="http://schemas.microsoft.com/office/drawing/2014/main" id="{536AB4A3-117A-E861-6DDF-4967D9D1AAE3}"/>
+                </a:ext>
+              </a:extLst>
+            </p:cNvPr>
+            <p:cNvSpPr/>
+            <p:nvPr/>
+          </p:nvSpPr>
+          <p:spPr>
+            <a:xfrm>
+              <a:off x="3162998" y="2856844"/>
+              <a:ext cx="142504" cy="142504"/>
+            </a:xfrm>
+            <a:prstGeom prst="ellipse">
+              <a:avLst/>
+            </a:prstGeom>
+            <a:solidFill>
+              <a:schemeClr val="bg2">
+                <a:lumMod val="90000"/>
+              </a:schemeClr>
+            </a:solidFill>
+            <a:ln>
+              <a:solidFill>
+                <a:schemeClr val="bg2"/>
+              </a:solidFill>
+            </a:ln>
+          </p:spPr>
+          <p:style>
+            <a:lnRef idx="2">
+              <a:schemeClr val="accent1">
+                <a:shade val="15000"/>
+              </a:schemeClr>
+            </a:lnRef>
+            <a:fillRef idx="1">
+              <a:schemeClr val="accent1"/>
+            </a:fillRef>
+            <a:effectRef idx="0">
+              <a:schemeClr val="accent1"/>
+            </a:effectRef>
+            <a:fontRef idx="minor">
+              <a:schemeClr val="lt1"/>
+            </a:fontRef>
+          </p:style>
+          <p:txBody>
+            <a:bodyPr rtlCol="0" anchor="ctr"/>
+            <a:lstStyle/>
+            <a:p>
+              <a:pPr algn="ctr"/>
+              <a:endParaRPr lang="en-US"/>
+            </a:p>
+          </p:txBody>
+        </p:sp>
+        <p:sp>
+          <p:nvSpPr>
+            <p:cNvPr id="99" name="Oval 98">
+              <a:extLst>
+                <a:ext uri="{FF2B5EF4-FFF2-40B4-BE49-F238E27FC236}">
+                  <a16:creationId xmlns:a16="http://schemas.microsoft.com/office/drawing/2014/main" id="{FF0402F7-D4C1-AE8A-AE5C-5CBB7574EFEA}"/>
+                </a:ext>
+              </a:extLst>
+            </p:cNvPr>
+            <p:cNvSpPr/>
+            <p:nvPr/>
+          </p:nvSpPr>
+          <p:spPr>
+            <a:xfrm>
+              <a:off x="3162998" y="2250308"/>
+              <a:ext cx="142504" cy="142504"/>
+            </a:xfrm>
+            <a:prstGeom prst="ellipse">
+              <a:avLst/>
+            </a:prstGeom>
+            <a:solidFill>
+              <a:schemeClr val="bg2">
+                <a:lumMod val="90000"/>
+              </a:schemeClr>
+            </a:solidFill>
+            <a:ln>
+              <a:solidFill>
+                <a:schemeClr val="bg2"/>
+              </a:solidFill>
+            </a:ln>
+          </p:spPr>
+          <p:style>
+            <a:lnRef idx="2">
+              <a:schemeClr val="accent1">
+                <a:shade val="15000"/>
+              </a:schemeClr>
+            </a:lnRef>
+            <a:fillRef idx="1">
+              <a:schemeClr val="accent1"/>
+            </a:fillRef>
+            <a:effectRef idx="0">
+              <a:schemeClr val="accent1"/>
+            </a:effectRef>
+            <a:fontRef idx="minor">
+              <a:schemeClr val="lt1"/>
+            </a:fontRef>
+          </p:style>
+          <p:txBody>
+            <a:bodyPr rtlCol="0" anchor="ctr"/>
+            <a:lstStyle/>
+            <a:p>
+              <a:pPr algn="ctr"/>
+              <a:endParaRPr lang="en-US"/>
+            </a:p>
+          </p:txBody>
+        </p:sp>
+        <p:sp>
+          <p:nvSpPr>
+            <p:cNvPr id="100" name="Oval 99">
+              <a:extLst>
+                <a:ext uri="{FF2B5EF4-FFF2-40B4-BE49-F238E27FC236}">
+                  <a16:creationId xmlns:a16="http://schemas.microsoft.com/office/drawing/2014/main" id="{7E4D247D-EC6D-C8A0-1209-9C5C3A8E173F}"/>
+                </a:ext>
+              </a:extLst>
+            </p:cNvPr>
+            <p:cNvSpPr/>
+            <p:nvPr/>
+          </p:nvSpPr>
+          <p:spPr>
+            <a:xfrm>
+              <a:off x="1951573" y="3463380"/>
+              <a:ext cx="142504" cy="142504"/>
+            </a:xfrm>
+            <a:prstGeom prst="ellipse">
+              <a:avLst/>
+            </a:prstGeom>
+            <a:solidFill>
+              <a:schemeClr val="bg2">
+                <a:lumMod val="90000"/>
+              </a:schemeClr>
+            </a:solidFill>
+            <a:ln>
+              <a:solidFill>
+                <a:schemeClr val="bg2"/>
+              </a:solidFill>
+            </a:ln>
+          </p:spPr>
+          <p:style>
+            <a:lnRef idx="2">
+              <a:schemeClr val="accent1">
+                <a:shade val="15000"/>
+              </a:schemeClr>
+            </a:lnRef>
+            <a:fillRef idx="1">
+              <a:schemeClr val="accent1"/>
+            </a:fillRef>
+            <a:effectRef idx="0">
+              <a:schemeClr val="accent1"/>
+            </a:effectRef>
+            <a:fontRef idx="minor">
+              <a:schemeClr val="lt1"/>
+            </a:fontRef>
+          </p:style>
+          <p:txBody>
+            <a:bodyPr rtlCol="0" anchor="ctr"/>
+            <a:lstStyle/>
+            <a:p>
+              <a:pPr algn="ctr"/>
+              <a:endParaRPr lang="en-US"/>
+            </a:p>
+          </p:txBody>
+        </p:sp>
+        <p:sp>
+          <p:nvSpPr>
+            <p:cNvPr id="101" name="Oval 100">
+              <a:extLst>
+                <a:ext uri="{FF2B5EF4-FFF2-40B4-BE49-F238E27FC236}">
+                  <a16:creationId xmlns:a16="http://schemas.microsoft.com/office/drawing/2014/main" id="{D5601850-DE4B-903C-F5B2-62AC2EB6FBAB}"/>
+                </a:ext>
+              </a:extLst>
+            </p:cNvPr>
+            <p:cNvSpPr/>
+            <p:nvPr/>
+          </p:nvSpPr>
+          <p:spPr>
+            <a:xfrm>
+              <a:off x="1951573" y="2856844"/>
+              <a:ext cx="142504" cy="142504"/>
+            </a:xfrm>
+            <a:prstGeom prst="ellipse">
+              <a:avLst/>
+            </a:prstGeom>
+            <a:solidFill>
+              <a:schemeClr val="bg2">
+                <a:lumMod val="90000"/>
+              </a:schemeClr>
+            </a:solidFill>
+            <a:ln>
+              <a:solidFill>
+                <a:schemeClr val="bg2"/>
+              </a:solidFill>
+            </a:ln>
+          </p:spPr>
+          <p:style>
+            <a:lnRef idx="2">
+              <a:schemeClr val="accent1">
+                <a:shade val="15000"/>
+              </a:schemeClr>
+            </a:lnRef>
+            <a:fillRef idx="1">
+              <a:schemeClr val="accent1"/>
+            </a:fillRef>
+            <a:effectRef idx="0">
+              <a:schemeClr val="accent1"/>
+            </a:effectRef>
+            <a:fontRef idx="minor">
+              <a:schemeClr val="lt1"/>
+            </a:fontRef>
+          </p:style>
+          <p:txBody>
+            <a:bodyPr rtlCol="0" anchor="ctr"/>
+            <a:lstStyle/>
+            <a:p>
+              <a:pPr algn="ctr"/>
+              <a:endParaRPr lang="en-US"/>
+            </a:p>
+          </p:txBody>
+        </p:sp>
+        <p:sp>
+          <p:nvSpPr>
+            <p:cNvPr id="102" name="Oval 101">
+              <a:extLst>
+                <a:ext uri="{FF2B5EF4-FFF2-40B4-BE49-F238E27FC236}">
+                  <a16:creationId xmlns:a16="http://schemas.microsoft.com/office/drawing/2014/main" id="{052B81A3-1411-BFF3-B4B8-73A0D481988D}"/>
+                </a:ext>
+              </a:extLst>
+            </p:cNvPr>
+            <p:cNvSpPr/>
+            <p:nvPr/>
+          </p:nvSpPr>
+          <p:spPr>
+            <a:xfrm>
+              <a:off x="1951573" y="2250308"/>
+              <a:ext cx="142504" cy="142504"/>
+            </a:xfrm>
+            <a:prstGeom prst="ellipse">
+              <a:avLst/>
+            </a:prstGeom>
+            <a:solidFill>
+              <a:schemeClr val="bg2">
+                <a:lumMod val="90000"/>
+              </a:schemeClr>
+            </a:solidFill>
+            <a:ln>
+              <a:solidFill>
+                <a:schemeClr val="bg2"/>
+              </a:solidFill>
+            </a:ln>
+          </p:spPr>
+          <p:style>
+            <a:lnRef idx="2">
+              <a:schemeClr val="accent1">
+                <a:shade val="15000"/>
+              </a:schemeClr>
+            </a:lnRef>
+            <a:fillRef idx="1">
+              <a:schemeClr val="accent1"/>
+            </a:fillRef>
+            <a:effectRef idx="0">
+              <a:schemeClr val="accent1"/>
+            </a:effectRef>
+            <a:fontRef idx="minor">
+              <a:schemeClr val="lt1"/>
+            </a:fontRef>
+          </p:style>
+          <p:txBody>
+            <a:bodyPr rtlCol="0" anchor="ctr"/>
+            <a:lstStyle/>
+            <a:p>
+              <a:pPr algn="ctr"/>
+              <a:endParaRPr lang="en-US"/>
+            </a:p>
+          </p:txBody>
+        </p:sp>
+        <p:sp>
+          <p:nvSpPr>
+            <p:cNvPr id="103" name="Oval 102">
+              <a:extLst>
+                <a:ext uri="{FF2B5EF4-FFF2-40B4-BE49-F238E27FC236}">
+                  <a16:creationId xmlns:a16="http://schemas.microsoft.com/office/drawing/2014/main" id="{3B681E3F-C640-9F9F-68B4-29F05FB5D79A}"/>
+                </a:ext>
+              </a:extLst>
+            </p:cNvPr>
+            <p:cNvSpPr/>
+            <p:nvPr/>
+          </p:nvSpPr>
+          <p:spPr>
+            <a:xfrm>
+              <a:off x="2565079" y="2244381"/>
+              <a:ext cx="142504" cy="142504"/>
+            </a:xfrm>
+            <a:prstGeom prst="ellipse">
+              <a:avLst/>
+            </a:prstGeom>
+            <a:solidFill>
+              <a:schemeClr val="bg2">
+                <a:lumMod val="90000"/>
+              </a:schemeClr>
+            </a:solidFill>
+            <a:ln>
+              <a:solidFill>
+                <a:schemeClr val="bg2"/>
+              </a:solidFill>
+            </a:ln>
+          </p:spPr>
+          <p:style>
+            <a:lnRef idx="2">
+              <a:schemeClr val="accent1">
+                <a:shade val="15000"/>
+              </a:schemeClr>
+            </a:lnRef>
+            <a:fillRef idx="1">
+              <a:schemeClr val="accent1"/>
+            </a:fillRef>
+            <a:effectRef idx="0">
+              <a:schemeClr val="accent1"/>
+            </a:effectRef>
+            <a:fontRef idx="minor">
+              <a:schemeClr val="lt1"/>
+            </a:fontRef>
+          </p:style>
+          <p:txBody>
+            <a:bodyPr rtlCol="0" anchor="ctr"/>
+            <a:lstStyle/>
+            <a:p>
+              <a:pPr algn="ctr"/>
+              <a:endParaRPr lang="en-US"/>
+            </a:p>
+          </p:txBody>
+        </p:sp>
+        <p:sp>
+          <p:nvSpPr>
+            <p:cNvPr id="104" name="Oval 103">
+              <a:extLst>
+                <a:ext uri="{FF2B5EF4-FFF2-40B4-BE49-F238E27FC236}">
+                  <a16:creationId xmlns:a16="http://schemas.microsoft.com/office/drawing/2014/main" id="{3A5F87A2-055E-CAD9-C174-8E7EA4C659C5}"/>
+                </a:ext>
+              </a:extLst>
+            </p:cNvPr>
+            <p:cNvSpPr/>
+            <p:nvPr/>
+          </p:nvSpPr>
+          <p:spPr>
+            <a:xfrm>
+              <a:off x="2562313" y="3463377"/>
+              <a:ext cx="142504" cy="142504"/>
+            </a:xfrm>
+            <a:prstGeom prst="ellipse">
+              <a:avLst/>
+            </a:prstGeom>
+            <a:solidFill>
+              <a:schemeClr val="bg2">
+                <a:lumMod val="90000"/>
+              </a:schemeClr>
+            </a:solidFill>
+            <a:ln>
+              <a:solidFill>
+                <a:schemeClr val="bg2"/>
+              </a:solidFill>
+            </a:ln>
+          </p:spPr>
+          <p:style>
+            <a:lnRef idx="2">
+              <a:schemeClr val="accent1">
+                <a:shade val="15000"/>
+              </a:schemeClr>
+            </a:lnRef>
+            <a:fillRef idx="1">
+              <a:schemeClr val="accent1"/>
+            </a:fillRef>
+            <a:effectRef idx="0">
+              <a:schemeClr val="accent1"/>
+            </a:effectRef>
+            <a:fontRef idx="minor">
+              <a:schemeClr val="lt1"/>
+            </a:fontRef>
+          </p:style>
+          <p:txBody>
+            <a:bodyPr rtlCol="0" anchor="ctr"/>
+            <a:lstStyle/>
+            <a:p>
+              <a:pPr algn="ctr"/>
+              <a:endParaRPr lang="en-US"/>
+            </a:p>
+          </p:txBody>
+        </p:sp>
+        <p:sp>
+          <p:nvSpPr>
+            <p:cNvPr id="105" name="Oval 104">
+              <a:extLst>
+                <a:ext uri="{FF2B5EF4-FFF2-40B4-BE49-F238E27FC236}">
+                  <a16:creationId xmlns:a16="http://schemas.microsoft.com/office/drawing/2014/main" id="{DE5A25F6-AE71-ABDF-3DC1-4354A4710A8B}"/>
+                </a:ext>
+              </a:extLst>
+            </p:cNvPr>
+            <p:cNvSpPr/>
+            <p:nvPr/>
+          </p:nvSpPr>
+          <p:spPr>
+            <a:xfrm>
+              <a:off x="2565415" y="2856844"/>
+              <a:ext cx="142504" cy="142504"/>
+            </a:xfrm>
+            <a:prstGeom prst="ellipse">
+              <a:avLst/>
+            </a:prstGeom>
+            <a:solidFill>
+              <a:schemeClr val="bg2">
+                <a:lumMod val="90000"/>
+              </a:schemeClr>
+            </a:solidFill>
+            <a:ln>
+              <a:solidFill>
+                <a:schemeClr val="bg2"/>
+              </a:solidFill>
+            </a:ln>
+          </p:spPr>
+          <p:style>
+            <a:lnRef idx="2">
+              <a:schemeClr val="accent1">
+                <a:shade val="15000"/>
+              </a:schemeClr>
+            </a:lnRef>
+            <a:fillRef idx="1">
+              <a:schemeClr val="accent1"/>
+            </a:fillRef>
+            <a:effectRef idx="0">
+              <a:schemeClr val="accent1"/>
+            </a:effectRef>
+            <a:fontRef idx="minor">
+              <a:schemeClr val="lt1"/>
+            </a:fontRef>
+          </p:style>
+          <p:txBody>
+            <a:bodyPr rtlCol="0" anchor="ctr"/>
+            <a:lstStyle/>
+            <a:p>
+              <a:pPr algn="ctr"/>
+              <a:endParaRPr lang="en-US"/>
+            </a:p>
+          </p:txBody>
+        </p:sp>
+      </p:grpSp>
+      <p:grpSp>
+        <p:nvGrpSpPr>
+          <p:cNvPr id="109" name="Group 108">
+            <a:extLst>
+              <a:ext uri="{FF2B5EF4-FFF2-40B4-BE49-F238E27FC236}">
+                <a16:creationId xmlns:a16="http://schemas.microsoft.com/office/drawing/2014/main" id="{6D30949C-67CB-9F51-5A73-774B4D79F4B6}"/>
+              </a:ext>
+            </a:extLst>
+          </p:cNvPr>
+          <p:cNvGrpSpPr/>
+          <p:nvPr/>
+        </p:nvGrpSpPr>
+        <p:grpSpPr>
+          <a:xfrm>
+            <a:off x="5309645" y="1571778"/>
+            <a:ext cx="1353929" cy="1361503"/>
+            <a:chOff x="1951573" y="2244381"/>
+            <a:chExt cx="1353929" cy="1361503"/>
+          </a:xfrm>
+        </p:grpSpPr>
+        <p:grpSp>
+          <p:nvGrpSpPr>
+            <p:cNvPr id="110" name="Group 109">
+              <a:extLst>
+                <a:ext uri="{FF2B5EF4-FFF2-40B4-BE49-F238E27FC236}">
+                  <a16:creationId xmlns:a16="http://schemas.microsoft.com/office/drawing/2014/main" id="{4917B3E3-04C0-72CC-14D9-A0E9122F58C4}"/>
+                </a:ext>
+              </a:extLst>
+            </p:cNvPr>
+            <p:cNvGrpSpPr/>
+            <p:nvPr/>
+          </p:nvGrpSpPr>
+          <p:grpSpPr>
+            <a:xfrm>
+              <a:off x="1951573" y="2321563"/>
+              <a:ext cx="1282677" cy="1218998"/>
+              <a:chOff x="5419036" y="1839783"/>
+              <a:chExt cx="1282677" cy="1218998"/>
+            </a:xfrm>
+          </p:grpSpPr>
+          <p:sp>
+            <p:nvSpPr>
+              <p:cNvPr id="120" name="Rectangle 119">
+                <a:extLst>
+                  <a:ext uri="{FF2B5EF4-FFF2-40B4-BE49-F238E27FC236}">
+                    <a16:creationId xmlns:a16="http://schemas.microsoft.com/office/drawing/2014/main" id="{055A87A9-1726-3798-8943-0C68BD844729}"/>
+                  </a:ext>
+                </a:extLst>
+              </p:cNvPr>
+              <p:cNvSpPr/>
+              <p:nvPr/>
+            </p:nvSpPr>
+            <p:spPr>
+              <a:xfrm>
+                <a:off x="5482464" y="1839783"/>
+                <a:ext cx="1219249" cy="1218998"/>
+              </a:xfrm>
+              <a:prstGeom prst="rect">
+                <a:avLst/>
+              </a:prstGeom>
+              <a:noFill/>
+              <a:ln w="15875">
+                <a:solidFill>
+                  <a:schemeClr val="bg2"/>
+                </a:solidFill>
+                <a:prstDash val="sysDash"/>
+              </a:ln>
+            </p:spPr>
+            <p:style>
+              <a:lnRef idx="2">
+                <a:schemeClr val="accent1">
+                  <a:shade val="15000"/>
+                </a:schemeClr>
+              </a:lnRef>
+              <a:fillRef idx="1">
+                <a:schemeClr val="accent1"/>
+              </a:fillRef>
+              <a:effectRef idx="0">
+                <a:schemeClr val="accent1"/>
+              </a:effectRef>
+              <a:fontRef idx="minor">
+                <a:schemeClr val="lt1"/>
+              </a:fontRef>
+            </p:style>
+            <p:txBody>
+              <a:bodyPr rtlCol="0" anchor="ctr"/>
+              <a:lstStyle/>
+              <a:p>
+                <a:pPr algn="ctr"/>
+                <a:endParaRPr lang="en-US"/>
+              </a:p>
+            </p:txBody>
+          </p:sp>
+          <p:cxnSp>
+            <p:nvCxnSpPr>
+              <p:cNvPr id="121" name="Straight Connector 120">
+                <a:extLst>
+                  <a:ext uri="{FF2B5EF4-FFF2-40B4-BE49-F238E27FC236}">
+                    <a16:creationId xmlns:a16="http://schemas.microsoft.com/office/drawing/2014/main" id="{4088DC9C-21A3-FAFB-E9A4-5F1CFACD71F4}"/>
+                  </a:ext>
+                </a:extLst>
+              </p:cNvPr>
+              <p:cNvCxnSpPr>
+                <a:cxnSpLocks/>
+                <a:stCxn id="117" idx="4"/>
+              </p:cNvCxnSpPr>
+              <p:nvPr/>
+            </p:nvCxnSpPr>
+            <p:spPr>
+              <a:xfrm flipH="1">
+                <a:off x="6101028" y="1905105"/>
+                <a:ext cx="2766" cy="1147744"/>
+              </a:xfrm>
+              <a:prstGeom prst="line">
+                <a:avLst/>
+              </a:prstGeom>
+              <a:ln w="15875">
+                <a:solidFill>
+                  <a:schemeClr val="bg2"/>
+                </a:solidFill>
+                <a:prstDash val="sysDash"/>
+              </a:ln>
+            </p:spPr>
+            <p:style>
+              <a:lnRef idx="2">
+                <a:schemeClr val="accent1"/>
+              </a:lnRef>
+              <a:fillRef idx="0">
+                <a:schemeClr val="accent1"/>
+              </a:fillRef>
+              <a:effectRef idx="1">
+                <a:schemeClr val="accent1"/>
+              </a:effectRef>
+              <a:fontRef idx="minor">
+                <a:schemeClr val="tx1"/>
+              </a:fontRef>
+            </p:style>
+          </p:cxnSp>
+          <p:cxnSp>
+            <p:nvCxnSpPr>
+              <p:cNvPr id="122" name="Straight Connector 121">
+                <a:extLst>
+                  <a:ext uri="{FF2B5EF4-FFF2-40B4-BE49-F238E27FC236}">
+                    <a16:creationId xmlns:a16="http://schemas.microsoft.com/office/drawing/2014/main" id="{719E6077-D483-8B26-DB4D-4588E2CD6C64}"/>
+                  </a:ext>
+                </a:extLst>
+              </p:cNvPr>
+              <p:cNvCxnSpPr>
+                <a:stCxn id="115" idx="2"/>
+                <a:endCxn id="112" idx="2"/>
+              </p:cNvCxnSpPr>
+              <p:nvPr/>
+            </p:nvCxnSpPr>
+            <p:spPr>
+              <a:xfrm>
+                <a:off x="5419036" y="2446316"/>
+                <a:ext cx="1211425" cy="0"/>
+              </a:xfrm>
+              <a:prstGeom prst="line">
+                <a:avLst/>
+              </a:prstGeom>
+              <a:ln w="15875">
+                <a:solidFill>
+                  <a:schemeClr val="bg2"/>
+                </a:solidFill>
+                <a:prstDash val="sysDash"/>
+              </a:ln>
+            </p:spPr>
+            <p:style>
+              <a:lnRef idx="2">
+                <a:schemeClr val="accent1"/>
+              </a:lnRef>
+              <a:fillRef idx="0">
+                <a:schemeClr val="accent1"/>
+              </a:fillRef>
+              <a:effectRef idx="1">
+                <a:schemeClr val="accent1"/>
+              </a:effectRef>
+              <a:fontRef idx="minor">
+                <a:schemeClr val="tx1"/>
+              </a:fontRef>
+            </p:style>
+          </p:cxnSp>
+        </p:grpSp>
+        <p:sp>
+          <p:nvSpPr>
+            <p:cNvPr id="111" name="Oval 110">
+              <a:extLst>
+                <a:ext uri="{FF2B5EF4-FFF2-40B4-BE49-F238E27FC236}">
+                  <a16:creationId xmlns:a16="http://schemas.microsoft.com/office/drawing/2014/main" id="{E5A3AECE-7BC3-B10C-436D-F300633C248D}"/>
+                </a:ext>
+              </a:extLst>
+            </p:cNvPr>
+            <p:cNvSpPr/>
+            <p:nvPr/>
+          </p:nvSpPr>
+          <p:spPr>
+            <a:xfrm>
+              <a:off x="3162998" y="3463380"/>
+              <a:ext cx="142504" cy="142504"/>
+            </a:xfrm>
+            <a:prstGeom prst="ellipse">
+              <a:avLst/>
+            </a:prstGeom>
+            <a:solidFill>
+              <a:schemeClr val="bg2">
+                <a:lumMod val="90000"/>
+              </a:schemeClr>
+            </a:solidFill>
+            <a:ln>
+              <a:solidFill>
+                <a:schemeClr val="bg2"/>
+              </a:solidFill>
+            </a:ln>
+          </p:spPr>
+          <p:style>
+            <a:lnRef idx="2">
+              <a:schemeClr val="accent1">
+                <a:shade val="15000"/>
+              </a:schemeClr>
+            </a:lnRef>
+            <a:fillRef idx="1">
+              <a:schemeClr val="accent1"/>
+            </a:fillRef>
+            <a:effectRef idx="0">
+              <a:schemeClr val="accent1"/>
+            </a:effectRef>
+            <a:fontRef idx="minor">
+              <a:schemeClr val="lt1"/>
+            </a:fontRef>
+          </p:style>
+          <p:txBody>
+            <a:bodyPr rtlCol="0" anchor="ctr"/>
+            <a:lstStyle/>
+            <a:p>
+              <a:pPr algn="ctr"/>
+              <a:endParaRPr lang="en-US"/>
+            </a:p>
+          </p:txBody>
+        </p:sp>
+        <p:sp>
+          <p:nvSpPr>
+            <p:cNvPr id="112" name="Oval 111">
+              <a:extLst>
+                <a:ext uri="{FF2B5EF4-FFF2-40B4-BE49-F238E27FC236}">
+                  <a16:creationId xmlns:a16="http://schemas.microsoft.com/office/drawing/2014/main" id="{FB6A72B7-B546-6904-3E60-16FAEEE1A2F4}"/>
+                </a:ext>
+              </a:extLst>
+            </p:cNvPr>
+            <p:cNvSpPr/>
+            <p:nvPr/>
+          </p:nvSpPr>
+          <p:spPr>
+            <a:xfrm>
+              <a:off x="3162998" y="2856844"/>
+              <a:ext cx="142504" cy="142504"/>
+            </a:xfrm>
+            <a:prstGeom prst="ellipse">
+              <a:avLst/>
+            </a:prstGeom>
+            <a:solidFill>
+              <a:schemeClr val="bg2">
+                <a:lumMod val="90000"/>
+              </a:schemeClr>
+            </a:solidFill>
+            <a:ln>
+              <a:solidFill>
+                <a:schemeClr val="bg2"/>
+              </a:solidFill>
+            </a:ln>
+          </p:spPr>
+          <p:style>
+            <a:lnRef idx="2">
+              <a:schemeClr val="accent1">
+                <a:shade val="15000"/>
+              </a:schemeClr>
+            </a:lnRef>
+            <a:fillRef idx="1">
+              <a:schemeClr val="accent1"/>
+            </a:fillRef>
+            <a:effectRef idx="0">
+              <a:schemeClr val="accent1"/>
+            </a:effectRef>
+            <a:fontRef idx="minor">
+              <a:schemeClr val="lt1"/>
+            </a:fontRef>
+          </p:style>
+          <p:txBody>
+            <a:bodyPr rtlCol="0" anchor="ctr"/>
+            <a:lstStyle/>
+            <a:p>
+              <a:pPr algn="ctr"/>
+              <a:endParaRPr lang="en-US"/>
+            </a:p>
+          </p:txBody>
+        </p:sp>
+        <p:sp>
+          <p:nvSpPr>
+            <p:cNvPr id="113" name="Oval 112">
+              <a:extLst>
+                <a:ext uri="{FF2B5EF4-FFF2-40B4-BE49-F238E27FC236}">
+                  <a16:creationId xmlns:a16="http://schemas.microsoft.com/office/drawing/2014/main" id="{53E13411-CFCA-830A-F26E-0D6E8C5E1E29}"/>
+                </a:ext>
+              </a:extLst>
+            </p:cNvPr>
+            <p:cNvSpPr/>
+            <p:nvPr/>
+          </p:nvSpPr>
+          <p:spPr>
+            <a:xfrm>
+              <a:off x="3162998" y="2250308"/>
+              <a:ext cx="142504" cy="142504"/>
+            </a:xfrm>
+            <a:prstGeom prst="ellipse">
+              <a:avLst/>
+            </a:prstGeom>
+            <a:solidFill>
+              <a:schemeClr val="bg2">
+                <a:lumMod val="90000"/>
+              </a:schemeClr>
+            </a:solidFill>
+            <a:ln>
+              <a:solidFill>
+                <a:schemeClr val="bg2"/>
+              </a:solidFill>
+            </a:ln>
+          </p:spPr>
+          <p:style>
+            <a:lnRef idx="2">
+              <a:schemeClr val="accent1">
+                <a:shade val="15000"/>
+              </a:schemeClr>
+            </a:lnRef>
+            <a:fillRef idx="1">
+              <a:schemeClr val="accent1"/>
+            </a:fillRef>
+            <a:effectRef idx="0">
+              <a:schemeClr val="accent1"/>
+            </a:effectRef>
+            <a:fontRef idx="minor">
+              <a:schemeClr val="lt1"/>
+            </a:fontRef>
+          </p:style>
+          <p:txBody>
+            <a:bodyPr rtlCol="0" anchor="ctr"/>
+            <a:lstStyle/>
+            <a:p>
+              <a:pPr algn="ctr"/>
+              <a:endParaRPr lang="en-US"/>
+            </a:p>
+          </p:txBody>
+        </p:sp>
+        <p:sp>
+          <p:nvSpPr>
+            <p:cNvPr id="114" name="Oval 113">
+              <a:extLst>
+                <a:ext uri="{FF2B5EF4-FFF2-40B4-BE49-F238E27FC236}">
+                  <a16:creationId xmlns:a16="http://schemas.microsoft.com/office/drawing/2014/main" id="{B9EC06D0-6185-AF09-F716-402B4E23CBE8}"/>
+                </a:ext>
+              </a:extLst>
+            </p:cNvPr>
+            <p:cNvSpPr/>
+            <p:nvPr/>
+          </p:nvSpPr>
+          <p:spPr>
+            <a:xfrm>
+              <a:off x="1951573" y="3463380"/>
+              <a:ext cx="142504" cy="142504"/>
+            </a:xfrm>
+            <a:prstGeom prst="ellipse">
+              <a:avLst/>
+            </a:prstGeom>
+            <a:solidFill>
+              <a:schemeClr val="bg2">
+                <a:lumMod val="90000"/>
+              </a:schemeClr>
+            </a:solidFill>
+            <a:ln>
+              <a:solidFill>
+                <a:schemeClr val="bg2"/>
+              </a:solidFill>
+            </a:ln>
+          </p:spPr>
+          <p:style>
+            <a:lnRef idx="2">
+              <a:schemeClr val="accent1">
+                <a:shade val="15000"/>
+              </a:schemeClr>
+            </a:lnRef>
+            <a:fillRef idx="1">
+              <a:schemeClr val="accent1"/>
+            </a:fillRef>
+            <a:effectRef idx="0">
+              <a:schemeClr val="accent1"/>
+            </a:effectRef>
+            <a:fontRef idx="minor">
+              <a:schemeClr val="lt1"/>
+            </a:fontRef>
+          </p:style>
+          <p:txBody>
+            <a:bodyPr rtlCol="0" anchor="ctr"/>
+            <a:lstStyle/>
+            <a:p>
+              <a:pPr algn="ctr"/>
+              <a:endParaRPr lang="en-US"/>
+            </a:p>
+          </p:txBody>
+        </p:sp>
+        <p:sp>
+          <p:nvSpPr>
+            <p:cNvPr id="115" name="Oval 114">
+              <a:extLst>
+                <a:ext uri="{FF2B5EF4-FFF2-40B4-BE49-F238E27FC236}">
+                  <a16:creationId xmlns:a16="http://schemas.microsoft.com/office/drawing/2014/main" id="{D4A3D764-56D8-0C7A-A407-FF1D46EB57A0}"/>
+                </a:ext>
+              </a:extLst>
+            </p:cNvPr>
+            <p:cNvSpPr/>
+            <p:nvPr/>
+          </p:nvSpPr>
+          <p:spPr>
+            <a:xfrm>
+              <a:off x="1951573" y="2856844"/>
+              <a:ext cx="142504" cy="142504"/>
+            </a:xfrm>
+            <a:prstGeom prst="ellipse">
+              <a:avLst/>
+            </a:prstGeom>
+            <a:solidFill>
+              <a:schemeClr val="bg2">
+                <a:lumMod val="90000"/>
+              </a:schemeClr>
+            </a:solidFill>
+            <a:ln>
+              <a:solidFill>
+                <a:schemeClr val="bg2"/>
+              </a:solidFill>
+            </a:ln>
+          </p:spPr>
+          <p:style>
+            <a:lnRef idx="2">
+              <a:schemeClr val="accent1">
+                <a:shade val="15000"/>
+              </a:schemeClr>
+            </a:lnRef>
+            <a:fillRef idx="1">
+              <a:schemeClr val="accent1"/>
+            </a:fillRef>
+            <a:effectRef idx="0">
+              <a:schemeClr val="accent1"/>
+            </a:effectRef>
+            <a:fontRef idx="minor">
+              <a:schemeClr val="lt1"/>
+            </a:fontRef>
+          </p:style>
+          <p:txBody>
+            <a:bodyPr rtlCol="0" anchor="ctr"/>
+            <a:lstStyle/>
+            <a:p>
+              <a:pPr algn="ctr"/>
+              <a:endParaRPr lang="en-US"/>
+            </a:p>
+          </p:txBody>
+        </p:sp>
+        <p:sp>
+          <p:nvSpPr>
+            <p:cNvPr id="116" name="Oval 115">
+              <a:extLst>
+                <a:ext uri="{FF2B5EF4-FFF2-40B4-BE49-F238E27FC236}">
+                  <a16:creationId xmlns:a16="http://schemas.microsoft.com/office/drawing/2014/main" id="{75607893-64A5-43DE-AC66-6DC7941E8D05}"/>
+                </a:ext>
+              </a:extLst>
+            </p:cNvPr>
+            <p:cNvSpPr/>
+            <p:nvPr/>
+          </p:nvSpPr>
+          <p:spPr>
+            <a:xfrm>
+              <a:off x="1951573" y="2250308"/>
+              <a:ext cx="142504" cy="142504"/>
+            </a:xfrm>
+            <a:prstGeom prst="ellipse">
+              <a:avLst/>
+            </a:prstGeom>
+            <a:solidFill>
+              <a:schemeClr val="bg2">
+                <a:lumMod val="90000"/>
+              </a:schemeClr>
+            </a:solidFill>
+            <a:ln>
+              <a:solidFill>
+                <a:schemeClr val="bg2"/>
+              </a:solidFill>
+            </a:ln>
+          </p:spPr>
+          <p:style>
+            <a:lnRef idx="2">
+              <a:schemeClr val="accent1">
+                <a:shade val="15000"/>
+              </a:schemeClr>
+            </a:lnRef>
+            <a:fillRef idx="1">
+              <a:schemeClr val="accent1"/>
+            </a:fillRef>
+            <a:effectRef idx="0">
+              <a:schemeClr val="accent1"/>
+            </a:effectRef>
+            <a:fontRef idx="minor">
+              <a:schemeClr val="lt1"/>
+            </a:fontRef>
+          </p:style>
+          <p:txBody>
+            <a:bodyPr rtlCol="0" anchor="ctr"/>
+            <a:lstStyle/>
+            <a:p>
+              <a:pPr algn="ctr"/>
+              <a:endParaRPr lang="en-US"/>
+            </a:p>
+          </p:txBody>
+        </p:sp>
+        <p:sp>
+          <p:nvSpPr>
+            <p:cNvPr id="117" name="Oval 116">
+              <a:extLst>
+                <a:ext uri="{FF2B5EF4-FFF2-40B4-BE49-F238E27FC236}">
+                  <a16:creationId xmlns:a16="http://schemas.microsoft.com/office/drawing/2014/main" id="{4ECED34C-D0A2-6D1B-4C83-8BDE11F895DB}"/>
+                </a:ext>
+              </a:extLst>
+            </p:cNvPr>
+            <p:cNvSpPr/>
+            <p:nvPr/>
+          </p:nvSpPr>
+          <p:spPr>
+            <a:xfrm>
+              <a:off x="2565079" y="2244381"/>
+              <a:ext cx="142504" cy="142504"/>
+            </a:xfrm>
+            <a:prstGeom prst="ellipse">
+              <a:avLst/>
+            </a:prstGeom>
+            <a:solidFill>
+              <a:schemeClr val="bg2">
+                <a:lumMod val="90000"/>
+              </a:schemeClr>
+            </a:solidFill>
+            <a:ln>
+              <a:solidFill>
+                <a:schemeClr val="bg2"/>
+              </a:solidFill>
+            </a:ln>
+          </p:spPr>
+          <p:style>
+            <a:lnRef idx="2">
+              <a:schemeClr val="accent1">
+                <a:shade val="15000"/>
+              </a:schemeClr>
+            </a:lnRef>
+            <a:fillRef idx="1">
+              <a:schemeClr val="accent1"/>
+            </a:fillRef>
+            <a:effectRef idx="0">
+              <a:schemeClr val="accent1"/>
+            </a:effectRef>
+            <a:fontRef idx="minor">
+              <a:schemeClr val="lt1"/>
+            </a:fontRef>
+          </p:style>
+          <p:txBody>
+            <a:bodyPr rtlCol="0" anchor="ctr"/>
+            <a:lstStyle/>
+            <a:p>
+              <a:pPr algn="ctr"/>
+              <a:endParaRPr lang="en-US"/>
+            </a:p>
+          </p:txBody>
+        </p:sp>
+        <p:sp>
+          <p:nvSpPr>
+            <p:cNvPr id="118" name="Oval 117">
+              <a:extLst>
+                <a:ext uri="{FF2B5EF4-FFF2-40B4-BE49-F238E27FC236}">
+                  <a16:creationId xmlns:a16="http://schemas.microsoft.com/office/drawing/2014/main" id="{5A035ABC-44CA-4764-D444-DF8E37BF8309}"/>
+                </a:ext>
+              </a:extLst>
+            </p:cNvPr>
+            <p:cNvSpPr/>
+            <p:nvPr/>
+          </p:nvSpPr>
+          <p:spPr>
+            <a:xfrm>
+              <a:off x="2562313" y="3463377"/>
+              <a:ext cx="142504" cy="142504"/>
+            </a:xfrm>
+            <a:prstGeom prst="ellipse">
+              <a:avLst/>
+            </a:prstGeom>
+            <a:solidFill>
+              <a:schemeClr val="bg2">
+                <a:lumMod val="90000"/>
+              </a:schemeClr>
+            </a:solidFill>
+            <a:ln>
+              <a:solidFill>
+                <a:schemeClr val="bg2"/>
+              </a:solidFill>
+            </a:ln>
+          </p:spPr>
+          <p:style>
+            <a:lnRef idx="2">
+              <a:schemeClr val="accent1">
+                <a:shade val="15000"/>
+              </a:schemeClr>
+            </a:lnRef>
+            <a:fillRef idx="1">
+              <a:schemeClr val="accent1"/>
+            </a:fillRef>
+            <a:effectRef idx="0">
+              <a:schemeClr val="accent1"/>
+            </a:effectRef>
+            <a:fontRef idx="minor">
+              <a:schemeClr val="lt1"/>
+            </a:fontRef>
+          </p:style>
+          <p:txBody>
+            <a:bodyPr rtlCol="0" anchor="ctr"/>
+            <a:lstStyle/>
+            <a:p>
+              <a:pPr algn="ctr"/>
+              <a:endParaRPr lang="en-US"/>
+            </a:p>
+          </p:txBody>
+        </p:sp>
+        <p:sp>
+          <p:nvSpPr>
+            <p:cNvPr id="119" name="Oval 118">
+              <a:extLst>
+                <a:ext uri="{FF2B5EF4-FFF2-40B4-BE49-F238E27FC236}">
+                  <a16:creationId xmlns:a16="http://schemas.microsoft.com/office/drawing/2014/main" id="{35B1CC3A-6906-85D7-68E1-D7B6D5D63C14}"/>
+                </a:ext>
+              </a:extLst>
+            </p:cNvPr>
+            <p:cNvSpPr/>
+            <p:nvPr/>
+          </p:nvSpPr>
+          <p:spPr>
+            <a:xfrm>
+              <a:off x="2565415" y="2856844"/>
+              <a:ext cx="142504" cy="142504"/>
+            </a:xfrm>
+            <a:prstGeom prst="ellipse">
+              <a:avLst/>
+            </a:prstGeom>
+            <a:solidFill>
+              <a:schemeClr val="bg2">
+                <a:lumMod val="90000"/>
+              </a:schemeClr>
+            </a:solidFill>
+            <a:ln>
+              <a:solidFill>
+                <a:schemeClr val="bg2"/>
+              </a:solidFill>
+            </a:ln>
+          </p:spPr>
+          <p:style>
+            <a:lnRef idx="2">
+              <a:schemeClr val="accent1">
+                <a:shade val="15000"/>
+              </a:schemeClr>
+            </a:lnRef>
+            <a:fillRef idx="1">
+              <a:schemeClr val="accent1"/>
+            </a:fillRef>
+            <a:effectRef idx="0">
+              <a:schemeClr val="accent1"/>
+            </a:effectRef>
+            <a:fontRef idx="minor">
+              <a:schemeClr val="lt1"/>
+            </a:fontRef>
+          </p:style>
+          <p:txBody>
+            <a:bodyPr rtlCol="0" anchor="ctr"/>
+            <a:lstStyle/>
+            <a:p>
+              <a:pPr algn="ctr"/>
+              <a:endParaRPr lang="en-US"/>
+            </a:p>
+          </p:txBody>
+        </p:sp>
+      </p:grpSp>
+      <p:grpSp>
+        <p:nvGrpSpPr>
+          <p:cNvPr id="80" name="Group 79">
+            <a:extLst>
+              <a:ext uri="{FF2B5EF4-FFF2-40B4-BE49-F238E27FC236}">
+                <a16:creationId xmlns:a16="http://schemas.microsoft.com/office/drawing/2014/main" id="{B8A87F7E-82F9-8DDE-E22C-0EA0B63682B0}"/>
+              </a:ext>
+            </a:extLst>
+          </p:cNvPr>
+          <p:cNvGrpSpPr/>
+          <p:nvPr/>
+        </p:nvGrpSpPr>
+        <p:grpSpPr>
+          <a:xfrm>
+            <a:off x="5915357" y="1577707"/>
+            <a:ext cx="1353929" cy="1361503"/>
+            <a:chOff x="5419036" y="1762601"/>
+            <a:chExt cx="1353929" cy="1361503"/>
+          </a:xfrm>
+        </p:grpSpPr>
+        <p:grpSp>
+          <p:nvGrpSpPr>
+            <p:cNvPr id="81" name="Group 80">
+              <a:extLst>
+                <a:ext uri="{FF2B5EF4-FFF2-40B4-BE49-F238E27FC236}">
+                  <a16:creationId xmlns:a16="http://schemas.microsoft.com/office/drawing/2014/main" id="{CC3EDAA6-7756-DA67-867D-88374B84FB6E}"/>
+                </a:ext>
+              </a:extLst>
+            </p:cNvPr>
+            <p:cNvGrpSpPr/>
+            <p:nvPr/>
+          </p:nvGrpSpPr>
+          <p:grpSpPr>
+            <a:xfrm>
+              <a:off x="5419036" y="1839783"/>
+              <a:ext cx="1282677" cy="1218998"/>
+              <a:chOff x="5419036" y="1839783"/>
+              <a:chExt cx="1282677" cy="1218998"/>
+            </a:xfrm>
+          </p:grpSpPr>
+          <p:sp>
+            <p:nvSpPr>
+              <p:cNvPr id="91" name="Rectangle 90">
+                <a:extLst>
+                  <a:ext uri="{FF2B5EF4-FFF2-40B4-BE49-F238E27FC236}">
+                    <a16:creationId xmlns:a16="http://schemas.microsoft.com/office/drawing/2014/main" id="{2982B174-8C3C-BF98-E6D2-D26DEF37D90F}"/>
+                  </a:ext>
+                </a:extLst>
+              </p:cNvPr>
+              <p:cNvSpPr/>
+              <p:nvPr/>
+            </p:nvSpPr>
+            <p:spPr>
+              <a:xfrm>
+                <a:off x="5482464" y="1839783"/>
+                <a:ext cx="1219249" cy="1218998"/>
+              </a:xfrm>
+              <a:prstGeom prst="rect">
+                <a:avLst/>
+              </a:prstGeom>
+              <a:noFill/>
+              <a:ln w="15875">
+                <a:solidFill>
+                  <a:schemeClr val="tx1"/>
+                </a:solidFill>
+                <a:prstDash val="sysDash"/>
+              </a:ln>
+            </p:spPr>
+            <p:style>
+              <a:lnRef idx="2">
+                <a:schemeClr val="accent1">
+                  <a:shade val="15000"/>
+                </a:schemeClr>
+              </a:lnRef>
+              <a:fillRef idx="1">
+                <a:schemeClr val="accent1"/>
+              </a:fillRef>
+              <a:effectRef idx="0">
+                <a:schemeClr val="accent1"/>
+              </a:effectRef>
+              <a:fontRef idx="minor">
+                <a:schemeClr val="lt1"/>
+              </a:fontRef>
+            </p:style>
+            <p:txBody>
+              <a:bodyPr rtlCol="0" anchor="ctr"/>
+              <a:lstStyle/>
+              <a:p>
+                <a:pPr algn="ctr"/>
+                <a:endParaRPr lang="en-US"/>
+              </a:p>
+            </p:txBody>
+          </p:sp>
+          <p:cxnSp>
+            <p:nvCxnSpPr>
+              <p:cNvPr id="92" name="Straight Connector 91">
+                <a:extLst>
+                  <a:ext uri="{FF2B5EF4-FFF2-40B4-BE49-F238E27FC236}">
+                    <a16:creationId xmlns:a16="http://schemas.microsoft.com/office/drawing/2014/main" id="{1828E6D1-89E9-9B02-6B75-D8D37E0ED005}"/>
+                  </a:ext>
+                </a:extLst>
+              </p:cNvPr>
+              <p:cNvCxnSpPr>
+                <a:cxnSpLocks/>
+                <a:stCxn id="88" idx="4"/>
+              </p:cNvCxnSpPr>
+              <p:nvPr/>
+            </p:nvCxnSpPr>
+            <p:spPr>
+              <a:xfrm flipH="1">
+                <a:off x="6101028" y="1905105"/>
+                <a:ext cx="2766" cy="1147744"/>
+              </a:xfrm>
+              <a:prstGeom prst="line">
+                <a:avLst/>
+              </a:prstGeom>
+              <a:ln w="15875">
+                <a:solidFill>
+                  <a:schemeClr val="tx1"/>
+                </a:solidFill>
+                <a:prstDash val="sysDash"/>
+              </a:ln>
+            </p:spPr>
+            <p:style>
+              <a:lnRef idx="2">
+                <a:schemeClr val="accent1"/>
+              </a:lnRef>
+              <a:fillRef idx="0">
+                <a:schemeClr val="accent1"/>
+              </a:fillRef>
+              <a:effectRef idx="1">
+                <a:schemeClr val="accent1"/>
+              </a:effectRef>
+              <a:fontRef idx="minor">
+                <a:schemeClr val="tx1"/>
+              </a:fontRef>
+            </p:style>
+          </p:cxnSp>
+          <p:cxnSp>
+            <p:nvCxnSpPr>
+              <p:cNvPr id="93" name="Straight Connector 92">
+                <a:extLst>
+                  <a:ext uri="{FF2B5EF4-FFF2-40B4-BE49-F238E27FC236}">
+                    <a16:creationId xmlns:a16="http://schemas.microsoft.com/office/drawing/2014/main" id="{19238946-5E3F-A203-49D2-635D4B4E0200}"/>
+                  </a:ext>
+                </a:extLst>
+              </p:cNvPr>
+              <p:cNvCxnSpPr>
+                <a:stCxn id="86" idx="2"/>
+                <a:endCxn id="83" idx="2"/>
+              </p:cNvCxnSpPr>
+              <p:nvPr/>
+            </p:nvCxnSpPr>
+            <p:spPr>
+              <a:xfrm>
+                <a:off x="5419036" y="2446316"/>
+                <a:ext cx="1211425" cy="0"/>
+              </a:xfrm>
+              <a:prstGeom prst="line">
+                <a:avLst/>
+              </a:prstGeom>
+              <a:ln w="15875">
+                <a:solidFill>
+                  <a:schemeClr val="tx1"/>
+                </a:solidFill>
+                <a:prstDash val="sysDash"/>
+              </a:ln>
+            </p:spPr>
+            <p:style>
+              <a:lnRef idx="2">
+                <a:schemeClr val="accent1"/>
+              </a:lnRef>
+              <a:fillRef idx="0">
+                <a:schemeClr val="accent1"/>
+              </a:fillRef>
+              <a:effectRef idx="1">
+                <a:schemeClr val="accent1"/>
+              </a:effectRef>
+              <a:fontRef idx="minor">
+                <a:schemeClr val="tx1"/>
+              </a:fontRef>
+            </p:style>
+          </p:cxnSp>
+        </p:grpSp>
+        <p:sp>
+          <p:nvSpPr>
+            <p:cNvPr id="82" name="Oval 81">
+              <a:extLst>
+                <a:ext uri="{FF2B5EF4-FFF2-40B4-BE49-F238E27FC236}">
+                  <a16:creationId xmlns:a16="http://schemas.microsoft.com/office/drawing/2014/main" id="{53F08949-A559-DC46-E10A-E3728600B8C2}"/>
+                </a:ext>
+              </a:extLst>
+            </p:cNvPr>
+            <p:cNvSpPr/>
+            <p:nvPr/>
+          </p:nvSpPr>
+          <p:spPr>
+            <a:xfrm>
+              <a:off x="6630461" y="2981600"/>
+              <a:ext cx="142504" cy="142504"/>
+            </a:xfrm>
+            <a:prstGeom prst="ellipse">
+              <a:avLst/>
+            </a:prstGeom>
+          </p:spPr>
+          <p:style>
+            <a:lnRef idx="2">
+              <a:schemeClr val="accent1">
+                <a:shade val="15000"/>
+              </a:schemeClr>
+            </a:lnRef>
+            <a:fillRef idx="1">
+              <a:schemeClr val="accent1"/>
+            </a:fillRef>
+            <a:effectRef idx="0">
+              <a:schemeClr val="accent1"/>
+            </a:effectRef>
+            <a:fontRef idx="minor">
+              <a:schemeClr val="lt1"/>
+            </a:fontRef>
+          </p:style>
+          <p:txBody>
+            <a:bodyPr rtlCol="0" anchor="ctr"/>
+            <a:lstStyle/>
+            <a:p>
+              <a:pPr algn="ctr"/>
+              <a:endParaRPr lang="en-US"/>
+            </a:p>
+          </p:txBody>
+        </p:sp>
+        <p:sp>
+          <p:nvSpPr>
+            <p:cNvPr id="83" name="Oval 82">
+              <a:extLst>
+                <a:ext uri="{FF2B5EF4-FFF2-40B4-BE49-F238E27FC236}">
+                  <a16:creationId xmlns:a16="http://schemas.microsoft.com/office/drawing/2014/main" id="{61D92D15-C75A-0E1C-1F32-65513894340A}"/>
+                </a:ext>
+              </a:extLst>
+            </p:cNvPr>
+            <p:cNvSpPr/>
+            <p:nvPr/>
+          </p:nvSpPr>
+          <p:spPr>
+            <a:xfrm>
+              <a:off x="6630461" y="2375064"/>
+              <a:ext cx="142504" cy="142504"/>
+            </a:xfrm>
+            <a:prstGeom prst="ellipse">
+              <a:avLst/>
+            </a:prstGeom>
+          </p:spPr>
+          <p:style>
+            <a:lnRef idx="2">
+              <a:schemeClr val="accent1">
+                <a:shade val="15000"/>
+              </a:schemeClr>
+            </a:lnRef>
+            <a:fillRef idx="1">
+              <a:schemeClr val="accent1"/>
+            </a:fillRef>
+            <a:effectRef idx="0">
+              <a:schemeClr val="accent1"/>
+            </a:effectRef>
+            <a:fontRef idx="minor">
+              <a:schemeClr val="lt1"/>
+            </a:fontRef>
+          </p:style>
+          <p:txBody>
+            <a:bodyPr rtlCol="0" anchor="ctr"/>
+            <a:lstStyle/>
+            <a:p>
+              <a:pPr algn="ctr"/>
+              <a:endParaRPr lang="en-US"/>
+            </a:p>
+          </p:txBody>
+        </p:sp>
+        <p:sp>
+          <p:nvSpPr>
+            <p:cNvPr id="84" name="Oval 83">
+              <a:extLst>
+                <a:ext uri="{FF2B5EF4-FFF2-40B4-BE49-F238E27FC236}">
+                  <a16:creationId xmlns:a16="http://schemas.microsoft.com/office/drawing/2014/main" id="{A9ED044E-A798-460B-B166-49FFDF11D612}"/>
+                </a:ext>
+              </a:extLst>
+            </p:cNvPr>
+            <p:cNvSpPr/>
+            <p:nvPr/>
+          </p:nvSpPr>
+          <p:spPr>
+            <a:xfrm>
+              <a:off x="6630461" y="1768528"/>
+              <a:ext cx="142504" cy="142504"/>
+            </a:xfrm>
+            <a:prstGeom prst="ellipse">
+              <a:avLst/>
+            </a:prstGeom>
+          </p:spPr>
+          <p:style>
+            <a:lnRef idx="2">
+              <a:schemeClr val="accent1">
+                <a:shade val="15000"/>
+              </a:schemeClr>
+            </a:lnRef>
+            <a:fillRef idx="1">
+              <a:schemeClr val="accent1"/>
+            </a:fillRef>
+            <a:effectRef idx="0">
+              <a:schemeClr val="accent1"/>
+            </a:effectRef>
+            <a:fontRef idx="minor">
+              <a:schemeClr val="lt1"/>
+            </a:fontRef>
+          </p:style>
+          <p:txBody>
+            <a:bodyPr rtlCol="0" anchor="ctr"/>
+            <a:lstStyle/>
+            <a:p>
+              <a:pPr algn="ctr"/>
+              <a:endParaRPr lang="en-US"/>
+            </a:p>
+          </p:txBody>
+        </p:sp>
+        <p:sp>
+          <p:nvSpPr>
+            <p:cNvPr id="85" name="Oval 84">
+              <a:extLst>
+                <a:ext uri="{FF2B5EF4-FFF2-40B4-BE49-F238E27FC236}">
+                  <a16:creationId xmlns:a16="http://schemas.microsoft.com/office/drawing/2014/main" id="{A80954BA-34CD-DDE3-FEDC-E313E6B16F1C}"/>
+                </a:ext>
+              </a:extLst>
+            </p:cNvPr>
+            <p:cNvSpPr/>
+            <p:nvPr/>
+          </p:nvSpPr>
+          <p:spPr>
+            <a:xfrm>
+              <a:off x="5419036" y="2981600"/>
+              <a:ext cx="142504" cy="142504"/>
+            </a:xfrm>
+            <a:prstGeom prst="ellipse">
+              <a:avLst/>
+            </a:prstGeom>
+          </p:spPr>
+          <p:style>
+            <a:lnRef idx="2">
+              <a:schemeClr val="accent1">
+                <a:shade val="15000"/>
+              </a:schemeClr>
+            </a:lnRef>
+            <a:fillRef idx="1">
+              <a:schemeClr val="accent1"/>
+            </a:fillRef>
+            <a:effectRef idx="0">
+              <a:schemeClr val="accent1"/>
+            </a:effectRef>
+            <a:fontRef idx="minor">
+              <a:schemeClr val="lt1"/>
+            </a:fontRef>
+          </p:style>
+          <p:txBody>
+            <a:bodyPr rtlCol="0" anchor="ctr"/>
+            <a:lstStyle/>
+            <a:p>
+              <a:pPr algn="ctr"/>
+              <a:endParaRPr lang="en-US"/>
+            </a:p>
+          </p:txBody>
+        </p:sp>
+        <p:sp>
+          <p:nvSpPr>
+            <p:cNvPr id="86" name="Oval 85">
+              <a:extLst>
+                <a:ext uri="{FF2B5EF4-FFF2-40B4-BE49-F238E27FC236}">
+                  <a16:creationId xmlns:a16="http://schemas.microsoft.com/office/drawing/2014/main" id="{9BF96F61-184C-0306-F317-A0F9EDDDE289}"/>
+                </a:ext>
+              </a:extLst>
+            </p:cNvPr>
+            <p:cNvSpPr/>
+            <p:nvPr/>
+          </p:nvSpPr>
+          <p:spPr>
+            <a:xfrm>
+              <a:off x="5419036" y="2375064"/>
+              <a:ext cx="142504" cy="142504"/>
+            </a:xfrm>
+            <a:prstGeom prst="ellipse">
+              <a:avLst/>
+            </a:prstGeom>
+          </p:spPr>
+          <p:style>
+            <a:lnRef idx="2">
+              <a:schemeClr val="accent1">
+                <a:shade val="15000"/>
+              </a:schemeClr>
+            </a:lnRef>
+            <a:fillRef idx="1">
+              <a:schemeClr val="accent1"/>
+            </a:fillRef>
+            <a:effectRef idx="0">
+              <a:schemeClr val="accent1"/>
+            </a:effectRef>
+            <a:fontRef idx="minor">
+              <a:schemeClr val="lt1"/>
+            </a:fontRef>
+          </p:style>
+          <p:txBody>
+            <a:bodyPr rtlCol="0" anchor="ctr"/>
+            <a:lstStyle/>
+            <a:p>
+              <a:pPr algn="ctr"/>
+              <a:endParaRPr lang="en-US"/>
+            </a:p>
+          </p:txBody>
+        </p:sp>
+        <p:sp>
+          <p:nvSpPr>
+            <p:cNvPr id="87" name="Oval 86">
+              <a:extLst>
+                <a:ext uri="{FF2B5EF4-FFF2-40B4-BE49-F238E27FC236}">
+                  <a16:creationId xmlns:a16="http://schemas.microsoft.com/office/drawing/2014/main" id="{2DEE170C-1A12-4F9D-1455-D5E16DD02A92}"/>
+                </a:ext>
+              </a:extLst>
+            </p:cNvPr>
+            <p:cNvSpPr/>
+            <p:nvPr/>
+          </p:nvSpPr>
+          <p:spPr>
+            <a:xfrm>
+              <a:off x="5419036" y="1768528"/>
+              <a:ext cx="142504" cy="142504"/>
+            </a:xfrm>
+            <a:prstGeom prst="ellipse">
+              <a:avLst/>
+            </a:prstGeom>
+          </p:spPr>
+          <p:style>
+            <a:lnRef idx="2">
+              <a:schemeClr val="accent1">
+                <a:shade val="15000"/>
+              </a:schemeClr>
+            </a:lnRef>
+            <a:fillRef idx="1">
+              <a:schemeClr val="accent1"/>
+            </a:fillRef>
+            <a:effectRef idx="0">
+              <a:schemeClr val="accent1"/>
+            </a:effectRef>
+            <a:fontRef idx="minor">
+              <a:schemeClr val="lt1"/>
+            </a:fontRef>
+          </p:style>
+          <p:txBody>
+            <a:bodyPr rtlCol="0" anchor="ctr"/>
+            <a:lstStyle/>
+            <a:p>
+              <a:pPr algn="ctr"/>
+              <a:endParaRPr lang="en-US"/>
+            </a:p>
+          </p:txBody>
+        </p:sp>
+        <p:sp>
+          <p:nvSpPr>
+            <p:cNvPr id="88" name="Oval 87">
+              <a:extLst>
+                <a:ext uri="{FF2B5EF4-FFF2-40B4-BE49-F238E27FC236}">
+                  <a16:creationId xmlns:a16="http://schemas.microsoft.com/office/drawing/2014/main" id="{0CAFE5C0-669E-4655-35FA-33569215FA3C}"/>
+                </a:ext>
+              </a:extLst>
+            </p:cNvPr>
+            <p:cNvSpPr/>
+            <p:nvPr/>
+          </p:nvSpPr>
+          <p:spPr>
+            <a:xfrm>
+              <a:off x="6032542" y="1762601"/>
+              <a:ext cx="142504" cy="142504"/>
+            </a:xfrm>
+            <a:prstGeom prst="ellipse">
+              <a:avLst/>
+            </a:prstGeom>
+          </p:spPr>
+          <p:style>
+            <a:lnRef idx="2">
+              <a:schemeClr val="accent1">
+                <a:shade val="15000"/>
+              </a:schemeClr>
+            </a:lnRef>
+            <a:fillRef idx="1">
+              <a:schemeClr val="accent1"/>
+            </a:fillRef>
+            <a:effectRef idx="0">
+              <a:schemeClr val="accent1"/>
+            </a:effectRef>
+            <a:fontRef idx="minor">
+              <a:schemeClr val="lt1"/>
+            </a:fontRef>
+          </p:style>
+          <p:txBody>
+            <a:bodyPr rtlCol="0" anchor="ctr"/>
+            <a:lstStyle/>
+            <a:p>
+              <a:pPr algn="ctr"/>
+              <a:endParaRPr lang="en-US"/>
+            </a:p>
+          </p:txBody>
+        </p:sp>
+        <p:sp>
+          <p:nvSpPr>
+            <p:cNvPr id="89" name="Oval 88">
+              <a:extLst>
+                <a:ext uri="{FF2B5EF4-FFF2-40B4-BE49-F238E27FC236}">
+                  <a16:creationId xmlns:a16="http://schemas.microsoft.com/office/drawing/2014/main" id="{18BB945A-7475-65E6-EFD3-9567C5D2920D}"/>
+                </a:ext>
+              </a:extLst>
+            </p:cNvPr>
+            <p:cNvSpPr/>
+            <p:nvPr/>
+          </p:nvSpPr>
+          <p:spPr>
+            <a:xfrm>
+              <a:off x="6029776" y="2981597"/>
+              <a:ext cx="142504" cy="142504"/>
+            </a:xfrm>
+            <a:prstGeom prst="ellipse">
+              <a:avLst/>
+            </a:prstGeom>
+          </p:spPr>
+          <p:style>
+            <a:lnRef idx="2">
+              <a:schemeClr val="accent1">
+                <a:shade val="15000"/>
+              </a:schemeClr>
+            </a:lnRef>
+            <a:fillRef idx="1">
+              <a:schemeClr val="accent1"/>
+            </a:fillRef>
+            <a:effectRef idx="0">
+              <a:schemeClr val="accent1"/>
+            </a:effectRef>
+            <a:fontRef idx="minor">
+              <a:schemeClr val="lt1"/>
+            </a:fontRef>
+          </p:style>
+          <p:txBody>
+            <a:bodyPr rtlCol="0" anchor="ctr"/>
+            <a:lstStyle/>
+            <a:p>
+              <a:pPr algn="ctr"/>
+              <a:endParaRPr lang="en-US"/>
+            </a:p>
+          </p:txBody>
+        </p:sp>
+        <p:sp>
+          <p:nvSpPr>
+            <p:cNvPr id="90" name="Oval 89">
+              <a:extLst>
+                <a:ext uri="{FF2B5EF4-FFF2-40B4-BE49-F238E27FC236}">
+                  <a16:creationId xmlns:a16="http://schemas.microsoft.com/office/drawing/2014/main" id="{AD80E135-2339-86D9-1E92-B4A4DE90247A}"/>
+                </a:ext>
+              </a:extLst>
+            </p:cNvPr>
+            <p:cNvSpPr/>
+            <p:nvPr/>
+          </p:nvSpPr>
+          <p:spPr>
+            <a:xfrm>
+              <a:off x="6032878" y="2375064"/>
+              <a:ext cx="142504" cy="142504"/>
+            </a:xfrm>
+            <a:prstGeom prst="ellipse">
+              <a:avLst/>
+            </a:prstGeom>
+            <a:solidFill>
+              <a:srgbClr val="FF0000"/>
+            </a:solidFill>
+          </p:spPr>
+          <p:style>
+            <a:lnRef idx="2">
+              <a:schemeClr val="accent1">
+                <a:shade val="15000"/>
+              </a:schemeClr>
+            </a:lnRef>
+            <a:fillRef idx="1">
+              <a:schemeClr val="accent1"/>
+            </a:fillRef>
+            <a:effectRef idx="0">
+              <a:schemeClr val="accent1"/>
+            </a:effectRef>
+            <a:fontRef idx="minor">
+              <a:schemeClr val="lt1"/>
+            </a:fontRef>
+          </p:style>
+          <p:txBody>
+            <a:bodyPr rtlCol="0" anchor="ctr"/>
+            <a:lstStyle/>
+            <a:p>
+              <a:pPr algn="ctr"/>
+              <a:endParaRPr lang="en-US"/>
+            </a:p>
+          </p:txBody>
+        </p:sp>
+      </p:grpSp>
+      <p:sp>
+        <p:nvSpPr>
+          <p:cNvPr id="123" name="TextBox 122">
+            <a:extLst>
+              <a:ext uri="{FF2B5EF4-FFF2-40B4-BE49-F238E27FC236}">
+                <a16:creationId xmlns:a16="http://schemas.microsoft.com/office/drawing/2014/main" id="{8A9B868B-7CDF-8B6D-CD47-FCBD67F0206C}"/>
+              </a:ext>
+            </a:extLst>
+          </p:cNvPr>
+          <p:cNvSpPr txBox="1"/>
+          <p:nvPr/>
+        </p:nvSpPr>
+        <p:spPr>
+          <a:xfrm>
+            <a:off x="6808343" y="1178645"/>
+            <a:ext cx="779381" cy="369332"/>
+          </a:xfrm>
+          <a:prstGeom prst="rect">
+            <a:avLst/>
+          </a:prstGeom>
+          <a:noFill/>
+        </p:spPr>
+        <p:txBody>
+          <a:bodyPr wrap="none" rtlCol="0">
+            <a:spAutoFit/>
+          </a:bodyPr>
+          <a:lstStyle/>
+          <a:p>
+            <a:r>
+              <a:rPr lang="en-US" dirty="0"/>
+              <a:t>Grid 3</a:t>
+            </a:r>
+          </a:p>
+        </p:txBody>
+      </p:sp>
+      <p:grpSp>
+        <p:nvGrpSpPr>
+          <p:cNvPr id="126" name="Group 125">
+            <a:extLst>
+              <a:ext uri="{FF2B5EF4-FFF2-40B4-BE49-F238E27FC236}">
+                <a16:creationId xmlns:a16="http://schemas.microsoft.com/office/drawing/2014/main" id="{690E67E1-A6C9-B896-B1CC-94F6EA08207D}"/>
+              </a:ext>
+            </a:extLst>
+          </p:cNvPr>
+          <p:cNvGrpSpPr/>
+          <p:nvPr/>
+        </p:nvGrpSpPr>
+        <p:grpSpPr>
+          <a:xfrm>
+            <a:off x="7650315" y="4109957"/>
+            <a:ext cx="1353929" cy="1361503"/>
+            <a:chOff x="1951573" y="2244381"/>
+            <a:chExt cx="1353929" cy="1361503"/>
+          </a:xfrm>
+        </p:grpSpPr>
+        <p:grpSp>
+          <p:nvGrpSpPr>
+            <p:cNvPr id="127" name="Group 126">
+              <a:extLst>
+                <a:ext uri="{FF2B5EF4-FFF2-40B4-BE49-F238E27FC236}">
+                  <a16:creationId xmlns:a16="http://schemas.microsoft.com/office/drawing/2014/main" id="{A68F8A26-CED2-2B08-9310-406A1B6C8240}"/>
+                </a:ext>
+              </a:extLst>
+            </p:cNvPr>
+            <p:cNvGrpSpPr/>
+            <p:nvPr/>
+          </p:nvGrpSpPr>
+          <p:grpSpPr>
+            <a:xfrm>
+              <a:off x="1951573" y="2321563"/>
+              <a:ext cx="1282677" cy="1218998"/>
+              <a:chOff x="5419036" y="1839783"/>
+              <a:chExt cx="1282677" cy="1218998"/>
+            </a:xfrm>
+          </p:grpSpPr>
+          <p:sp>
+            <p:nvSpPr>
+              <p:cNvPr id="137" name="Rectangle 136">
+                <a:extLst>
+                  <a:ext uri="{FF2B5EF4-FFF2-40B4-BE49-F238E27FC236}">
+                    <a16:creationId xmlns:a16="http://schemas.microsoft.com/office/drawing/2014/main" id="{ADFD08A6-4A0E-6021-ED7E-6806772F5646}"/>
+                  </a:ext>
+                </a:extLst>
+              </p:cNvPr>
+              <p:cNvSpPr/>
+              <p:nvPr/>
+            </p:nvSpPr>
+            <p:spPr>
+              <a:xfrm>
+                <a:off x="5482464" y="1839783"/>
+                <a:ext cx="1219249" cy="1218998"/>
+              </a:xfrm>
+              <a:prstGeom prst="rect">
+                <a:avLst/>
+              </a:prstGeom>
+              <a:noFill/>
+              <a:ln w="15875">
+                <a:solidFill>
+                  <a:schemeClr val="bg2"/>
+                </a:solidFill>
+                <a:prstDash val="sysDash"/>
+              </a:ln>
+            </p:spPr>
+            <p:style>
+              <a:lnRef idx="2">
+                <a:schemeClr val="accent1">
+                  <a:shade val="15000"/>
+                </a:schemeClr>
+              </a:lnRef>
+              <a:fillRef idx="1">
+                <a:schemeClr val="accent1"/>
+              </a:fillRef>
+              <a:effectRef idx="0">
+                <a:schemeClr val="accent1"/>
+              </a:effectRef>
+              <a:fontRef idx="minor">
+                <a:schemeClr val="lt1"/>
+              </a:fontRef>
+            </p:style>
+            <p:txBody>
+              <a:bodyPr rtlCol="0" anchor="ctr"/>
+              <a:lstStyle/>
+              <a:p>
+                <a:pPr algn="ctr"/>
+                <a:endParaRPr lang="en-US"/>
+              </a:p>
+            </p:txBody>
+          </p:sp>
+          <p:cxnSp>
+            <p:nvCxnSpPr>
+              <p:cNvPr id="138" name="Straight Connector 137">
+                <a:extLst>
+                  <a:ext uri="{FF2B5EF4-FFF2-40B4-BE49-F238E27FC236}">
+                    <a16:creationId xmlns:a16="http://schemas.microsoft.com/office/drawing/2014/main" id="{450CC583-1E90-D1F3-1D0E-F5A77972AD24}"/>
+                  </a:ext>
+                </a:extLst>
+              </p:cNvPr>
+              <p:cNvCxnSpPr>
+                <a:cxnSpLocks/>
+                <a:stCxn id="134" idx="4"/>
+              </p:cNvCxnSpPr>
+              <p:nvPr/>
+            </p:nvCxnSpPr>
+            <p:spPr>
+              <a:xfrm flipH="1">
+                <a:off x="6101028" y="1905105"/>
+                <a:ext cx="2766" cy="1147744"/>
+              </a:xfrm>
+              <a:prstGeom prst="line">
+                <a:avLst/>
+              </a:prstGeom>
+              <a:ln w="15875">
+                <a:solidFill>
+                  <a:schemeClr val="bg2"/>
+                </a:solidFill>
+                <a:prstDash val="sysDash"/>
+              </a:ln>
+            </p:spPr>
+            <p:style>
+              <a:lnRef idx="2">
+                <a:schemeClr val="accent1"/>
+              </a:lnRef>
+              <a:fillRef idx="0">
+                <a:schemeClr val="accent1"/>
+              </a:fillRef>
+              <a:effectRef idx="1">
+                <a:schemeClr val="accent1"/>
+              </a:effectRef>
+              <a:fontRef idx="minor">
+                <a:schemeClr val="tx1"/>
+              </a:fontRef>
+            </p:style>
+          </p:cxnSp>
+          <p:cxnSp>
+            <p:nvCxnSpPr>
+              <p:cNvPr id="139" name="Straight Connector 138">
+                <a:extLst>
+                  <a:ext uri="{FF2B5EF4-FFF2-40B4-BE49-F238E27FC236}">
+                    <a16:creationId xmlns:a16="http://schemas.microsoft.com/office/drawing/2014/main" id="{A3A267F6-AE3F-460A-F78E-F429231B2387}"/>
+                  </a:ext>
+                </a:extLst>
+              </p:cNvPr>
+              <p:cNvCxnSpPr>
+                <a:stCxn id="132" idx="2"/>
+                <a:endCxn id="129" idx="2"/>
+              </p:cNvCxnSpPr>
+              <p:nvPr/>
+            </p:nvCxnSpPr>
+            <p:spPr>
+              <a:xfrm>
+                <a:off x="5419036" y="2446316"/>
+                <a:ext cx="1211425" cy="0"/>
+              </a:xfrm>
+              <a:prstGeom prst="line">
+                <a:avLst/>
+              </a:prstGeom>
+              <a:ln w="15875">
+                <a:solidFill>
+                  <a:schemeClr val="bg2"/>
+                </a:solidFill>
+                <a:prstDash val="sysDash"/>
+              </a:ln>
+            </p:spPr>
+            <p:style>
+              <a:lnRef idx="2">
+                <a:schemeClr val="accent1"/>
+              </a:lnRef>
+              <a:fillRef idx="0">
+                <a:schemeClr val="accent1"/>
+              </a:fillRef>
+              <a:effectRef idx="1">
+                <a:schemeClr val="accent1"/>
+              </a:effectRef>
+              <a:fontRef idx="minor">
+                <a:schemeClr val="tx1"/>
+              </a:fontRef>
+            </p:style>
+          </p:cxnSp>
+        </p:grpSp>
+        <p:sp>
+          <p:nvSpPr>
+            <p:cNvPr id="128" name="Oval 127">
+              <a:extLst>
+                <a:ext uri="{FF2B5EF4-FFF2-40B4-BE49-F238E27FC236}">
+                  <a16:creationId xmlns:a16="http://schemas.microsoft.com/office/drawing/2014/main" id="{15901CD2-E623-20DA-5410-EE37CA0B2021}"/>
+                </a:ext>
+              </a:extLst>
+            </p:cNvPr>
+            <p:cNvSpPr/>
+            <p:nvPr/>
+          </p:nvSpPr>
+          <p:spPr>
+            <a:xfrm>
+              <a:off x="3162998" y="3463380"/>
+              <a:ext cx="142504" cy="142504"/>
+            </a:xfrm>
+            <a:prstGeom prst="ellipse">
+              <a:avLst/>
+            </a:prstGeom>
+            <a:solidFill>
+              <a:schemeClr val="bg2">
+                <a:lumMod val="90000"/>
+              </a:schemeClr>
+            </a:solidFill>
+            <a:ln>
+              <a:solidFill>
+                <a:schemeClr val="bg2"/>
+              </a:solidFill>
+            </a:ln>
+          </p:spPr>
+          <p:style>
+            <a:lnRef idx="2">
+              <a:schemeClr val="accent1">
+                <a:shade val="15000"/>
+              </a:schemeClr>
+            </a:lnRef>
+            <a:fillRef idx="1">
+              <a:schemeClr val="accent1"/>
+            </a:fillRef>
+            <a:effectRef idx="0">
+              <a:schemeClr val="accent1"/>
+            </a:effectRef>
+            <a:fontRef idx="minor">
+              <a:schemeClr val="lt1"/>
+            </a:fontRef>
+          </p:style>
+          <p:txBody>
+            <a:bodyPr rtlCol="0" anchor="ctr"/>
+            <a:lstStyle/>
+            <a:p>
+              <a:pPr algn="ctr"/>
+              <a:endParaRPr lang="en-US"/>
+            </a:p>
+          </p:txBody>
+        </p:sp>
+        <p:sp>
+          <p:nvSpPr>
+            <p:cNvPr id="129" name="Oval 128">
+              <a:extLst>
+                <a:ext uri="{FF2B5EF4-FFF2-40B4-BE49-F238E27FC236}">
+                  <a16:creationId xmlns:a16="http://schemas.microsoft.com/office/drawing/2014/main" id="{2EF5CE04-BA08-27AE-2506-4E1F6589810A}"/>
+                </a:ext>
+              </a:extLst>
+            </p:cNvPr>
+            <p:cNvSpPr/>
+            <p:nvPr/>
+          </p:nvSpPr>
+          <p:spPr>
+            <a:xfrm>
+              <a:off x="3162998" y="2856844"/>
+              <a:ext cx="142504" cy="142504"/>
+            </a:xfrm>
+            <a:prstGeom prst="ellipse">
+              <a:avLst/>
+            </a:prstGeom>
+            <a:solidFill>
+              <a:schemeClr val="bg2">
+                <a:lumMod val="90000"/>
+              </a:schemeClr>
+            </a:solidFill>
+            <a:ln>
+              <a:solidFill>
+                <a:schemeClr val="bg2"/>
+              </a:solidFill>
+            </a:ln>
+          </p:spPr>
+          <p:style>
+            <a:lnRef idx="2">
+              <a:schemeClr val="accent1">
+                <a:shade val="15000"/>
+              </a:schemeClr>
+            </a:lnRef>
+            <a:fillRef idx="1">
+              <a:schemeClr val="accent1"/>
+            </a:fillRef>
+            <a:effectRef idx="0">
+              <a:schemeClr val="accent1"/>
+            </a:effectRef>
+            <a:fontRef idx="minor">
+              <a:schemeClr val="lt1"/>
+            </a:fontRef>
+          </p:style>
+          <p:txBody>
+            <a:bodyPr rtlCol="0" anchor="ctr"/>
+            <a:lstStyle/>
+            <a:p>
+              <a:pPr algn="ctr"/>
+              <a:endParaRPr lang="en-US"/>
+            </a:p>
+          </p:txBody>
+        </p:sp>
+        <p:sp>
+          <p:nvSpPr>
+            <p:cNvPr id="130" name="Oval 129">
+              <a:extLst>
+                <a:ext uri="{FF2B5EF4-FFF2-40B4-BE49-F238E27FC236}">
+                  <a16:creationId xmlns:a16="http://schemas.microsoft.com/office/drawing/2014/main" id="{7ECD4F3C-71A3-74F2-32BB-09F6DE6BB829}"/>
+                </a:ext>
+              </a:extLst>
+            </p:cNvPr>
+            <p:cNvSpPr/>
+            <p:nvPr/>
+          </p:nvSpPr>
+          <p:spPr>
+            <a:xfrm>
+              <a:off x="3162998" y="2250308"/>
+              <a:ext cx="142504" cy="142504"/>
+            </a:xfrm>
+            <a:prstGeom prst="ellipse">
+              <a:avLst/>
+            </a:prstGeom>
+            <a:solidFill>
+              <a:schemeClr val="bg2">
+                <a:lumMod val="90000"/>
+              </a:schemeClr>
+            </a:solidFill>
+            <a:ln>
+              <a:solidFill>
+                <a:schemeClr val="bg2"/>
+              </a:solidFill>
+            </a:ln>
+          </p:spPr>
+          <p:style>
+            <a:lnRef idx="2">
+              <a:schemeClr val="accent1">
+                <a:shade val="15000"/>
+              </a:schemeClr>
+            </a:lnRef>
+            <a:fillRef idx="1">
+              <a:schemeClr val="accent1"/>
+            </a:fillRef>
+            <a:effectRef idx="0">
+              <a:schemeClr val="accent1"/>
+            </a:effectRef>
+            <a:fontRef idx="minor">
+              <a:schemeClr val="lt1"/>
+            </a:fontRef>
+          </p:style>
+          <p:txBody>
+            <a:bodyPr rtlCol="0" anchor="ctr"/>
+            <a:lstStyle/>
+            <a:p>
+              <a:pPr algn="ctr"/>
+              <a:endParaRPr lang="en-US"/>
+            </a:p>
+          </p:txBody>
+        </p:sp>
+        <p:sp>
+          <p:nvSpPr>
+            <p:cNvPr id="131" name="Oval 130">
+              <a:extLst>
+                <a:ext uri="{FF2B5EF4-FFF2-40B4-BE49-F238E27FC236}">
+                  <a16:creationId xmlns:a16="http://schemas.microsoft.com/office/drawing/2014/main" id="{0F5C888C-250A-B5E7-057B-1DCC1FBD0098}"/>
+                </a:ext>
+              </a:extLst>
+            </p:cNvPr>
+            <p:cNvSpPr/>
+            <p:nvPr/>
+          </p:nvSpPr>
+          <p:spPr>
+            <a:xfrm>
+              <a:off x="1951573" y="3463380"/>
+              <a:ext cx="142504" cy="142504"/>
+            </a:xfrm>
+            <a:prstGeom prst="ellipse">
+              <a:avLst/>
+            </a:prstGeom>
+            <a:solidFill>
+              <a:schemeClr val="bg2">
+                <a:lumMod val="90000"/>
+              </a:schemeClr>
+            </a:solidFill>
+            <a:ln>
+              <a:solidFill>
+                <a:schemeClr val="bg2"/>
+              </a:solidFill>
+            </a:ln>
+          </p:spPr>
+          <p:style>
+            <a:lnRef idx="2">
+              <a:schemeClr val="accent1">
+                <a:shade val="15000"/>
+              </a:schemeClr>
+            </a:lnRef>
+            <a:fillRef idx="1">
+              <a:schemeClr val="accent1"/>
+            </a:fillRef>
+            <a:effectRef idx="0">
+              <a:schemeClr val="accent1"/>
+            </a:effectRef>
+            <a:fontRef idx="minor">
+              <a:schemeClr val="lt1"/>
+            </a:fontRef>
+          </p:style>
+          <p:txBody>
+            <a:bodyPr rtlCol="0" anchor="ctr"/>
+            <a:lstStyle/>
+            <a:p>
+              <a:pPr algn="ctr"/>
+              <a:endParaRPr lang="en-US"/>
+            </a:p>
+          </p:txBody>
+        </p:sp>
+        <p:sp>
+          <p:nvSpPr>
+            <p:cNvPr id="132" name="Oval 131">
+              <a:extLst>
+                <a:ext uri="{FF2B5EF4-FFF2-40B4-BE49-F238E27FC236}">
+                  <a16:creationId xmlns:a16="http://schemas.microsoft.com/office/drawing/2014/main" id="{6D56C984-58D2-4FF2-474A-CFEA757D728E}"/>
+                </a:ext>
+              </a:extLst>
+            </p:cNvPr>
+            <p:cNvSpPr/>
+            <p:nvPr/>
+          </p:nvSpPr>
+          <p:spPr>
+            <a:xfrm>
+              <a:off x="1951573" y="2856844"/>
+              <a:ext cx="142504" cy="142504"/>
+            </a:xfrm>
+            <a:prstGeom prst="ellipse">
+              <a:avLst/>
+            </a:prstGeom>
+            <a:solidFill>
+              <a:schemeClr val="bg2">
+                <a:lumMod val="90000"/>
+              </a:schemeClr>
+            </a:solidFill>
+            <a:ln>
+              <a:solidFill>
+                <a:schemeClr val="bg2"/>
+              </a:solidFill>
+            </a:ln>
+          </p:spPr>
+          <p:style>
+            <a:lnRef idx="2">
+              <a:schemeClr val="accent1">
+                <a:shade val="15000"/>
+              </a:schemeClr>
+            </a:lnRef>
+            <a:fillRef idx="1">
+              <a:schemeClr val="accent1"/>
+            </a:fillRef>
+            <a:effectRef idx="0">
+              <a:schemeClr val="accent1"/>
+            </a:effectRef>
+            <a:fontRef idx="minor">
+              <a:schemeClr val="lt1"/>
+            </a:fontRef>
+          </p:style>
+          <p:txBody>
+            <a:bodyPr rtlCol="0" anchor="ctr"/>
+            <a:lstStyle/>
+            <a:p>
+              <a:pPr algn="ctr"/>
+              <a:endParaRPr lang="en-US"/>
+            </a:p>
+          </p:txBody>
+        </p:sp>
+        <p:sp>
+          <p:nvSpPr>
+            <p:cNvPr id="133" name="Oval 132">
+              <a:extLst>
+                <a:ext uri="{FF2B5EF4-FFF2-40B4-BE49-F238E27FC236}">
+                  <a16:creationId xmlns:a16="http://schemas.microsoft.com/office/drawing/2014/main" id="{43E8538B-5D0A-0864-595D-8A811403EAE1}"/>
+                </a:ext>
+              </a:extLst>
+            </p:cNvPr>
+            <p:cNvSpPr/>
+            <p:nvPr/>
+          </p:nvSpPr>
+          <p:spPr>
+            <a:xfrm>
+              <a:off x="1951573" y="2250308"/>
+              <a:ext cx="142504" cy="142504"/>
+            </a:xfrm>
+            <a:prstGeom prst="ellipse">
+              <a:avLst/>
+            </a:prstGeom>
+            <a:solidFill>
+              <a:schemeClr val="bg2">
+                <a:lumMod val="90000"/>
+              </a:schemeClr>
+            </a:solidFill>
+            <a:ln>
+              <a:solidFill>
+                <a:schemeClr val="bg2"/>
+              </a:solidFill>
+            </a:ln>
+          </p:spPr>
+          <p:style>
+            <a:lnRef idx="2">
+              <a:schemeClr val="accent1">
+                <a:shade val="15000"/>
+              </a:schemeClr>
+            </a:lnRef>
+            <a:fillRef idx="1">
+              <a:schemeClr val="accent1"/>
+            </a:fillRef>
+            <a:effectRef idx="0">
+              <a:schemeClr val="accent1"/>
+            </a:effectRef>
+            <a:fontRef idx="minor">
+              <a:schemeClr val="lt1"/>
+            </a:fontRef>
+          </p:style>
+          <p:txBody>
+            <a:bodyPr rtlCol="0" anchor="ctr"/>
+            <a:lstStyle/>
+            <a:p>
+              <a:pPr algn="ctr"/>
+              <a:endParaRPr lang="en-US"/>
+            </a:p>
+          </p:txBody>
+        </p:sp>
+        <p:sp>
+          <p:nvSpPr>
+            <p:cNvPr id="134" name="Oval 133">
+              <a:extLst>
+                <a:ext uri="{FF2B5EF4-FFF2-40B4-BE49-F238E27FC236}">
+                  <a16:creationId xmlns:a16="http://schemas.microsoft.com/office/drawing/2014/main" id="{32949A63-B84F-FB78-F5B4-CA4A3673D9C4}"/>
+                </a:ext>
+              </a:extLst>
+            </p:cNvPr>
+            <p:cNvSpPr/>
+            <p:nvPr/>
+          </p:nvSpPr>
+          <p:spPr>
+            <a:xfrm>
+              <a:off x="2565079" y="2244381"/>
+              <a:ext cx="142504" cy="142504"/>
+            </a:xfrm>
+            <a:prstGeom prst="ellipse">
+              <a:avLst/>
+            </a:prstGeom>
+            <a:solidFill>
+              <a:schemeClr val="bg2">
+                <a:lumMod val="90000"/>
+              </a:schemeClr>
+            </a:solidFill>
+            <a:ln>
+              <a:solidFill>
+                <a:schemeClr val="bg2"/>
+              </a:solidFill>
+            </a:ln>
+          </p:spPr>
+          <p:style>
+            <a:lnRef idx="2">
+              <a:schemeClr val="accent1">
+                <a:shade val="15000"/>
+              </a:schemeClr>
+            </a:lnRef>
+            <a:fillRef idx="1">
+              <a:schemeClr val="accent1"/>
+            </a:fillRef>
+            <a:effectRef idx="0">
+              <a:schemeClr val="accent1"/>
+            </a:effectRef>
+            <a:fontRef idx="minor">
+              <a:schemeClr val="lt1"/>
+            </a:fontRef>
+          </p:style>
+          <p:txBody>
+            <a:bodyPr rtlCol="0" anchor="ctr"/>
+            <a:lstStyle/>
+            <a:p>
+              <a:pPr algn="ctr"/>
+              <a:endParaRPr lang="en-US"/>
+            </a:p>
+          </p:txBody>
+        </p:sp>
+        <p:sp>
+          <p:nvSpPr>
+            <p:cNvPr id="135" name="Oval 134">
+              <a:extLst>
+                <a:ext uri="{FF2B5EF4-FFF2-40B4-BE49-F238E27FC236}">
+                  <a16:creationId xmlns:a16="http://schemas.microsoft.com/office/drawing/2014/main" id="{C3049D62-4D3F-7398-83C1-4E452A330488}"/>
+                </a:ext>
+              </a:extLst>
+            </p:cNvPr>
+            <p:cNvSpPr/>
+            <p:nvPr/>
+          </p:nvSpPr>
+          <p:spPr>
+            <a:xfrm>
+              <a:off x="2562313" y="3463377"/>
+              <a:ext cx="142504" cy="142504"/>
+            </a:xfrm>
+            <a:prstGeom prst="ellipse">
+              <a:avLst/>
+            </a:prstGeom>
+            <a:solidFill>
+              <a:schemeClr val="bg2">
+                <a:lumMod val="90000"/>
+              </a:schemeClr>
+            </a:solidFill>
+            <a:ln>
+              <a:solidFill>
+                <a:schemeClr val="bg2"/>
+              </a:solidFill>
+            </a:ln>
+          </p:spPr>
+          <p:style>
+            <a:lnRef idx="2">
+              <a:schemeClr val="accent1">
+                <a:shade val="15000"/>
+              </a:schemeClr>
+            </a:lnRef>
+            <a:fillRef idx="1">
+              <a:schemeClr val="accent1"/>
+            </a:fillRef>
+            <a:effectRef idx="0">
+              <a:schemeClr val="accent1"/>
+            </a:effectRef>
+            <a:fontRef idx="minor">
+              <a:schemeClr val="lt1"/>
+            </a:fontRef>
+          </p:style>
+          <p:txBody>
+            <a:bodyPr rtlCol="0" anchor="ctr"/>
+            <a:lstStyle/>
+            <a:p>
+              <a:pPr algn="ctr"/>
+              <a:endParaRPr lang="en-US"/>
+            </a:p>
+          </p:txBody>
+        </p:sp>
+        <p:sp>
+          <p:nvSpPr>
+            <p:cNvPr id="136" name="Oval 135">
+              <a:extLst>
+                <a:ext uri="{FF2B5EF4-FFF2-40B4-BE49-F238E27FC236}">
+                  <a16:creationId xmlns:a16="http://schemas.microsoft.com/office/drawing/2014/main" id="{191066BF-52C6-DCB6-1D4C-F699DD4A9A31}"/>
+                </a:ext>
+              </a:extLst>
+            </p:cNvPr>
+            <p:cNvSpPr/>
+            <p:nvPr/>
+          </p:nvSpPr>
+          <p:spPr>
+            <a:xfrm>
+              <a:off x="2565415" y="2856844"/>
+              <a:ext cx="142504" cy="142504"/>
+            </a:xfrm>
+            <a:prstGeom prst="ellipse">
+              <a:avLst/>
+            </a:prstGeom>
+            <a:solidFill>
+              <a:schemeClr val="bg2">
+                <a:lumMod val="90000"/>
+              </a:schemeClr>
+            </a:solidFill>
+            <a:ln>
+              <a:solidFill>
+                <a:schemeClr val="bg2"/>
+              </a:solidFill>
+            </a:ln>
+          </p:spPr>
+          <p:style>
+            <a:lnRef idx="2">
+              <a:schemeClr val="accent1">
+                <a:shade val="15000"/>
+              </a:schemeClr>
+            </a:lnRef>
+            <a:fillRef idx="1">
+              <a:schemeClr val="accent1"/>
+            </a:fillRef>
+            <a:effectRef idx="0">
+              <a:schemeClr val="accent1"/>
+            </a:effectRef>
+            <a:fontRef idx="minor">
+              <a:schemeClr val="lt1"/>
+            </a:fontRef>
+          </p:style>
+          <p:txBody>
+            <a:bodyPr rtlCol="0" anchor="ctr"/>
+            <a:lstStyle/>
+            <a:p>
+              <a:pPr algn="ctr"/>
+              <a:endParaRPr lang="en-US"/>
+            </a:p>
+          </p:txBody>
+        </p:sp>
+      </p:grpSp>
+      <p:grpSp>
+        <p:nvGrpSpPr>
+          <p:cNvPr id="140" name="Group 139">
+            <a:extLst>
+              <a:ext uri="{FF2B5EF4-FFF2-40B4-BE49-F238E27FC236}">
+                <a16:creationId xmlns:a16="http://schemas.microsoft.com/office/drawing/2014/main" id="{41BA4D17-FCCE-8F98-DC05-04FED7C80B72}"/>
+              </a:ext>
+            </a:extLst>
+          </p:cNvPr>
+          <p:cNvGrpSpPr/>
+          <p:nvPr/>
+        </p:nvGrpSpPr>
+        <p:grpSpPr>
+          <a:xfrm>
+            <a:off x="8265859" y="3503817"/>
+            <a:ext cx="1353929" cy="1361503"/>
+            <a:chOff x="1951573" y="2244381"/>
+            <a:chExt cx="1353929" cy="1361503"/>
+          </a:xfrm>
+        </p:grpSpPr>
+        <p:grpSp>
+          <p:nvGrpSpPr>
+            <p:cNvPr id="141" name="Group 140">
+              <a:extLst>
+                <a:ext uri="{FF2B5EF4-FFF2-40B4-BE49-F238E27FC236}">
+                  <a16:creationId xmlns:a16="http://schemas.microsoft.com/office/drawing/2014/main" id="{9A0E2F41-E1B0-F29D-5472-695CAC3A2737}"/>
+                </a:ext>
+              </a:extLst>
+            </p:cNvPr>
+            <p:cNvGrpSpPr/>
+            <p:nvPr/>
+          </p:nvGrpSpPr>
+          <p:grpSpPr>
+            <a:xfrm>
+              <a:off x="1951573" y="2321563"/>
+              <a:ext cx="1282677" cy="1218998"/>
+              <a:chOff x="5419036" y="1839783"/>
+              <a:chExt cx="1282677" cy="1218998"/>
+            </a:xfrm>
+          </p:grpSpPr>
+          <p:sp>
+            <p:nvSpPr>
+              <p:cNvPr id="151" name="Rectangle 150">
+                <a:extLst>
+                  <a:ext uri="{FF2B5EF4-FFF2-40B4-BE49-F238E27FC236}">
+                    <a16:creationId xmlns:a16="http://schemas.microsoft.com/office/drawing/2014/main" id="{A31B7564-0E61-43BB-F3E1-5C5F2E22C34C}"/>
+                  </a:ext>
+                </a:extLst>
+              </p:cNvPr>
+              <p:cNvSpPr/>
+              <p:nvPr/>
+            </p:nvSpPr>
+            <p:spPr>
+              <a:xfrm>
+                <a:off x="5482464" y="1839783"/>
+                <a:ext cx="1219249" cy="1218998"/>
+              </a:xfrm>
+              <a:prstGeom prst="rect">
+                <a:avLst/>
+              </a:prstGeom>
+              <a:noFill/>
+              <a:ln w="15875">
+                <a:solidFill>
+                  <a:schemeClr val="bg2"/>
+                </a:solidFill>
+                <a:prstDash val="sysDash"/>
+              </a:ln>
+            </p:spPr>
+            <p:style>
+              <a:lnRef idx="2">
+                <a:schemeClr val="accent1">
+                  <a:shade val="15000"/>
+                </a:schemeClr>
+              </a:lnRef>
+              <a:fillRef idx="1">
+                <a:schemeClr val="accent1"/>
+              </a:fillRef>
+              <a:effectRef idx="0">
+                <a:schemeClr val="accent1"/>
+              </a:effectRef>
+              <a:fontRef idx="minor">
+                <a:schemeClr val="lt1"/>
+              </a:fontRef>
+            </p:style>
+            <p:txBody>
+              <a:bodyPr rtlCol="0" anchor="ctr"/>
+              <a:lstStyle/>
+              <a:p>
+                <a:pPr algn="ctr"/>
+                <a:endParaRPr lang="en-US"/>
+              </a:p>
+            </p:txBody>
+          </p:sp>
+          <p:cxnSp>
+            <p:nvCxnSpPr>
+              <p:cNvPr id="152" name="Straight Connector 151">
+                <a:extLst>
+                  <a:ext uri="{FF2B5EF4-FFF2-40B4-BE49-F238E27FC236}">
+                    <a16:creationId xmlns:a16="http://schemas.microsoft.com/office/drawing/2014/main" id="{6D2DB942-A436-3B03-A73E-46BDF0852E62}"/>
+                  </a:ext>
+                </a:extLst>
+              </p:cNvPr>
+              <p:cNvCxnSpPr>
+                <a:cxnSpLocks/>
+                <a:stCxn id="148" idx="4"/>
+              </p:cNvCxnSpPr>
+              <p:nvPr/>
+            </p:nvCxnSpPr>
+            <p:spPr>
+              <a:xfrm flipH="1">
+                <a:off x="6101028" y="1905105"/>
+                <a:ext cx="2766" cy="1147744"/>
+              </a:xfrm>
+              <a:prstGeom prst="line">
+                <a:avLst/>
+              </a:prstGeom>
+              <a:ln w="15875">
+                <a:solidFill>
+                  <a:schemeClr val="bg2"/>
+                </a:solidFill>
+                <a:prstDash val="sysDash"/>
+              </a:ln>
+            </p:spPr>
+            <p:style>
+              <a:lnRef idx="2">
+                <a:schemeClr val="accent1"/>
+              </a:lnRef>
+              <a:fillRef idx="0">
+                <a:schemeClr val="accent1"/>
+              </a:fillRef>
+              <a:effectRef idx="1">
+                <a:schemeClr val="accent1"/>
+              </a:effectRef>
+              <a:fontRef idx="minor">
+                <a:schemeClr val="tx1"/>
+              </a:fontRef>
+            </p:style>
+          </p:cxnSp>
+          <p:cxnSp>
+            <p:nvCxnSpPr>
+              <p:cNvPr id="153" name="Straight Connector 152">
+                <a:extLst>
+                  <a:ext uri="{FF2B5EF4-FFF2-40B4-BE49-F238E27FC236}">
+                    <a16:creationId xmlns:a16="http://schemas.microsoft.com/office/drawing/2014/main" id="{DAD50F6A-278A-B917-BB86-4665D86D739A}"/>
+                  </a:ext>
+                </a:extLst>
+              </p:cNvPr>
+              <p:cNvCxnSpPr>
+                <a:stCxn id="146" idx="2"/>
+                <a:endCxn id="143" idx="2"/>
+              </p:cNvCxnSpPr>
+              <p:nvPr/>
+            </p:nvCxnSpPr>
+            <p:spPr>
+              <a:xfrm>
+                <a:off x="5419036" y="2446316"/>
+                <a:ext cx="1211425" cy="0"/>
+              </a:xfrm>
+              <a:prstGeom prst="line">
+                <a:avLst/>
+              </a:prstGeom>
+              <a:ln w="15875">
+                <a:solidFill>
+                  <a:schemeClr val="bg2"/>
+                </a:solidFill>
+                <a:prstDash val="sysDash"/>
+              </a:ln>
+            </p:spPr>
+            <p:style>
+              <a:lnRef idx="2">
+                <a:schemeClr val="accent1"/>
+              </a:lnRef>
+              <a:fillRef idx="0">
+                <a:schemeClr val="accent1"/>
+              </a:fillRef>
+              <a:effectRef idx="1">
+                <a:schemeClr val="accent1"/>
+              </a:effectRef>
+              <a:fontRef idx="minor">
+                <a:schemeClr val="tx1"/>
+              </a:fontRef>
+            </p:style>
+          </p:cxnSp>
+        </p:grpSp>
+        <p:sp>
+          <p:nvSpPr>
+            <p:cNvPr id="142" name="Oval 141">
+              <a:extLst>
+                <a:ext uri="{FF2B5EF4-FFF2-40B4-BE49-F238E27FC236}">
+                  <a16:creationId xmlns:a16="http://schemas.microsoft.com/office/drawing/2014/main" id="{8E0A23BD-65BE-0D5E-ADCE-F4FD12BA8464}"/>
+                </a:ext>
+              </a:extLst>
+            </p:cNvPr>
+            <p:cNvSpPr/>
+            <p:nvPr/>
+          </p:nvSpPr>
+          <p:spPr>
+            <a:xfrm>
+              <a:off x="3162998" y="3463380"/>
+              <a:ext cx="142504" cy="142504"/>
+            </a:xfrm>
+            <a:prstGeom prst="ellipse">
+              <a:avLst/>
+            </a:prstGeom>
+            <a:solidFill>
+              <a:schemeClr val="bg2">
+                <a:lumMod val="90000"/>
+              </a:schemeClr>
+            </a:solidFill>
+            <a:ln>
+              <a:solidFill>
+                <a:schemeClr val="bg2"/>
+              </a:solidFill>
+            </a:ln>
+          </p:spPr>
+          <p:style>
+            <a:lnRef idx="2">
+              <a:schemeClr val="accent1">
+                <a:shade val="15000"/>
+              </a:schemeClr>
+            </a:lnRef>
+            <a:fillRef idx="1">
+              <a:schemeClr val="accent1"/>
+            </a:fillRef>
+            <a:effectRef idx="0">
+              <a:schemeClr val="accent1"/>
+            </a:effectRef>
+            <a:fontRef idx="minor">
+              <a:schemeClr val="lt1"/>
+            </a:fontRef>
+          </p:style>
+          <p:txBody>
+            <a:bodyPr rtlCol="0" anchor="ctr"/>
+            <a:lstStyle/>
+            <a:p>
+              <a:pPr algn="ctr"/>
+              <a:endParaRPr lang="en-US"/>
+            </a:p>
+          </p:txBody>
+        </p:sp>
+        <p:sp>
+          <p:nvSpPr>
+            <p:cNvPr id="143" name="Oval 142">
+              <a:extLst>
+                <a:ext uri="{FF2B5EF4-FFF2-40B4-BE49-F238E27FC236}">
+                  <a16:creationId xmlns:a16="http://schemas.microsoft.com/office/drawing/2014/main" id="{0671499D-8EA5-949E-9E8D-291757E26931}"/>
+                </a:ext>
+              </a:extLst>
+            </p:cNvPr>
+            <p:cNvSpPr/>
+            <p:nvPr/>
+          </p:nvSpPr>
+          <p:spPr>
+            <a:xfrm>
+              <a:off x="3162998" y="2856844"/>
+              <a:ext cx="142504" cy="142504"/>
+            </a:xfrm>
+            <a:prstGeom prst="ellipse">
+              <a:avLst/>
+            </a:prstGeom>
+            <a:solidFill>
+              <a:schemeClr val="bg2">
+                <a:lumMod val="90000"/>
+              </a:schemeClr>
+            </a:solidFill>
+            <a:ln>
+              <a:solidFill>
+                <a:schemeClr val="bg2"/>
+              </a:solidFill>
+            </a:ln>
+          </p:spPr>
+          <p:style>
+            <a:lnRef idx="2">
+              <a:schemeClr val="accent1">
+                <a:shade val="15000"/>
+              </a:schemeClr>
+            </a:lnRef>
+            <a:fillRef idx="1">
+              <a:schemeClr val="accent1"/>
+            </a:fillRef>
+            <a:effectRef idx="0">
+              <a:schemeClr val="accent1"/>
+            </a:effectRef>
+            <a:fontRef idx="minor">
+              <a:schemeClr val="lt1"/>
+            </a:fontRef>
+          </p:style>
+          <p:txBody>
+            <a:bodyPr rtlCol="0" anchor="ctr"/>
+            <a:lstStyle/>
+            <a:p>
+              <a:pPr algn="ctr"/>
+              <a:endParaRPr lang="en-US"/>
+            </a:p>
+          </p:txBody>
+        </p:sp>
+        <p:sp>
+          <p:nvSpPr>
+            <p:cNvPr id="144" name="Oval 143">
+              <a:extLst>
+                <a:ext uri="{FF2B5EF4-FFF2-40B4-BE49-F238E27FC236}">
+                  <a16:creationId xmlns:a16="http://schemas.microsoft.com/office/drawing/2014/main" id="{6D7267A8-2924-E38F-6D59-125AF90BE8D0}"/>
+                </a:ext>
+              </a:extLst>
+            </p:cNvPr>
+            <p:cNvSpPr/>
+            <p:nvPr/>
+          </p:nvSpPr>
+          <p:spPr>
+            <a:xfrm>
+              <a:off x="3162998" y="2250308"/>
+              <a:ext cx="142504" cy="142504"/>
+            </a:xfrm>
+            <a:prstGeom prst="ellipse">
+              <a:avLst/>
+            </a:prstGeom>
+            <a:solidFill>
+              <a:schemeClr val="bg2">
+                <a:lumMod val="90000"/>
+              </a:schemeClr>
+            </a:solidFill>
+            <a:ln>
+              <a:solidFill>
+                <a:schemeClr val="bg2"/>
+              </a:solidFill>
+            </a:ln>
+          </p:spPr>
+          <p:style>
+            <a:lnRef idx="2">
+              <a:schemeClr val="accent1">
+                <a:shade val="15000"/>
+              </a:schemeClr>
+            </a:lnRef>
+            <a:fillRef idx="1">
+              <a:schemeClr val="accent1"/>
+            </a:fillRef>
+            <a:effectRef idx="0">
+              <a:schemeClr val="accent1"/>
+            </a:effectRef>
+            <a:fontRef idx="minor">
+              <a:schemeClr val="lt1"/>
+            </a:fontRef>
+          </p:style>
+          <p:txBody>
+            <a:bodyPr rtlCol="0" anchor="ctr"/>
+            <a:lstStyle/>
+            <a:p>
+              <a:pPr algn="ctr"/>
+              <a:endParaRPr lang="en-US"/>
+            </a:p>
+          </p:txBody>
+        </p:sp>
+        <p:sp>
+          <p:nvSpPr>
+            <p:cNvPr id="145" name="Oval 144">
+              <a:extLst>
+                <a:ext uri="{FF2B5EF4-FFF2-40B4-BE49-F238E27FC236}">
+                  <a16:creationId xmlns:a16="http://schemas.microsoft.com/office/drawing/2014/main" id="{08EB82C6-4E35-4AD6-89C0-C9316AC83AB8}"/>
+                </a:ext>
+              </a:extLst>
+            </p:cNvPr>
+            <p:cNvSpPr/>
+            <p:nvPr/>
+          </p:nvSpPr>
+          <p:spPr>
+            <a:xfrm>
+              <a:off x="1951573" y="3463380"/>
+              <a:ext cx="142504" cy="142504"/>
+            </a:xfrm>
+            <a:prstGeom prst="ellipse">
+              <a:avLst/>
+            </a:prstGeom>
+            <a:solidFill>
+              <a:schemeClr val="bg2">
+                <a:lumMod val="90000"/>
+              </a:schemeClr>
+            </a:solidFill>
+            <a:ln>
+              <a:solidFill>
+                <a:schemeClr val="bg2"/>
+              </a:solidFill>
+            </a:ln>
+          </p:spPr>
+          <p:style>
+            <a:lnRef idx="2">
+              <a:schemeClr val="accent1">
+                <a:shade val="15000"/>
+              </a:schemeClr>
+            </a:lnRef>
+            <a:fillRef idx="1">
+              <a:schemeClr val="accent1"/>
+            </a:fillRef>
+            <a:effectRef idx="0">
+              <a:schemeClr val="accent1"/>
+            </a:effectRef>
+            <a:fontRef idx="minor">
+              <a:schemeClr val="lt1"/>
+            </a:fontRef>
+          </p:style>
+          <p:txBody>
+            <a:bodyPr rtlCol="0" anchor="ctr"/>
+            <a:lstStyle/>
+            <a:p>
+              <a:pPr algn="ctr"/>
+              <a:endParaRPr lang="en-US"/>
+            </a:p>
+          </p:txBody>
+        </p:sp>
+        <p:sp>
+          <p:nvSpPr>
+            <p:cNvPr id="146" name="Oval 145">
+              <a:extLst>
+                <a:ext uri="{FF2B5EF4-FFF2-40B4-BE49-F238E27FC236}">
+                  <a16:creationId xmlns:a16="http://schemas.microsoft.com/office/drawing/2014/main" id="{CC0E5B87-9A8E-96E9-3DEB-12418F6D4DFE}"/>
+                </a:ext>
+              </a:extLst>
+            </p:cNvPr>
+            <p:cNvSpPr/>
+            <p:nvPr/>
+          </p:nvSpPr>
+          <p:spPr>
+            <a:xfrm>
+              <a:off x="1951573" y="2856844"/>
+              <a:ext cx="142504" cy="142504"/>
+            </a:xfrm>
+            <a:prstGeom prst="ellipse">
+              <a:avLst/>
+            </a:prstGeom>
+            <a:solidFill>
+              <a:schemeClr val="bg2">
+                <a:lumMod val="90000"/>
+              </a:schemeClr>
+            </a:solidFill>
+            <a:ln>
+              <a:solidFill>
+                <a:schemeClr val="bg2"/>
+              </a:solidFill>
+            </a:ln>
+          </p:spPr>
+          <p:style>
+            <a:lnRef idx="2">
+              <a:schemeClr val="accent1">
+                <a:shade val="15000"/>
+              </a:schemeClr>
+            </a:lnRef>
+            <a:fillRef idx="1">
+              <a:schemeClr val="accent1"/>
+            </a:fillRef>
+            <a:effectRef idx="0">
+              <a:schemeClr val="accent1"/>
+            </a:effectRef>
+            <a:fontRef idx="minor">
+              <a:schemeClr val="lt1"/>
+            </a:fontRef>
+          </p:style>
+          <p:txBody>
+            <a:bodyPr rtlCol="0" anchor="ctr"/>
+            <a:lstStyle/>
+            <a:p>
+              <a:pPr algn="ctr"/>
+              <a:endParaRPr lang="en-US"/>
+            </a:p>
+          </p:txBody>
+        </p:sp>
+        <p:sp>
+          <p:nvSpPr>
+            <p:cNvPr id="147" name="Oval 146">
+              <a:extLst>
+                <a:ext uri="{FF2B5EF4-FFF2-40B4-BE49-F238E27FC236}">
+                  <a16:creationId xmlns:a16="http://schemas.microsoft.com/office/drawing/2014/main" id="{60750012-4652-2E16-61D0-AC176EB3305E}"/>
+                </a:ext>
+              </a:extLst>
+            </p:cNvPr>
+            <p:cNvSpPr/>
+            <p:nvPr/>
+          </p:nvSpPr>
+          <p:spPr>
+            <a:xfrm>
+              <a:off x="1951573" y="2250308"/>
+              <a:ext cx="142504" cy="142504"/>
+            </a:xfrm>
+            <a:prstGeom prst="ellipse">
+              <a:avLst/>
+            </a:prstGeom>
+            <a:solidFill>
+              <a:schemeClr val="bg2">
+                <a:lumMod val="90000"/>
+              </a:schemeClr>
+            </a:solidFill>
+            <a:ln>
+              <a:solidFill>
+                <a:schemeClr val="bg2"/>
+              </a:solidFill>
+            </a:ln>
+          </p:spPr>
+          <p:style>
+            <a:lnRef idx="2">
+              <a:schemeClr val="accent1">
+                <a:shade val="15000"/>
+              </a:schemeClr>
+            </a:lnRef>
+            <a:fillRef idx="1">
+              <a:schemeClr val="accent1"/>
+            </a:fillRef>
+            <a:effectRef idx="0">
+              <a:schemeClr val="accent1"/>
+            </a:effectRef>
+            <a:fontRef idx="minor">
+              <a:schemeClr val="lt1"/>
+            </a:fontRef>
+          </p:style>
+          <p:txBody>
+            <a:bodyPr rtlCol="0" anchor="ctr"/>
+            <a:lstStyle/>
+            <a:p>
+              <a:pPr algn="ctr"/>
+              <a:endParaRPr lang="en-US"/>
+            </a:p>
+          </p:txBody>
+        </p:sp>
+        <p:sp>
+          <p:nvSpPr>
+            <p:cNvPr id="148" name="Oval 147">
+              <a:extLst>
+                <a:ext uri="{FF2B5EF4-FFF2-40B4-BE49-F238E27FC236}">
+                  <a16:creationId xmlns:a16="http://schemas.microsoft.com/office/drawing/2014/main" id="{ABEEA8A5-32A2-3646-F6E2-124046D62D14}"/>
+                </a:ext>
+              </a:extLst>
+            </p:cNvPr>
+            <p:cNvSpPr/>
+            <p:nvPr/>
+          </p:nvSpPr>
+          <p:spPr>
+            <a:xfrm>
+              <a:off x="2565079" y="2244381"/>
+              <a:ext cx="142504" cy="142504"/>
+            </a:xfrm>
+            <a:prstGeom prst="ellipse">
+              <a:avLst/>
+            </a:prstGeom>
+            <a:solidFill>
+              <a:schemeClr val="bg2">
+                <a:lumMod val="90000"/>
+              </a:schemeClr>
+            </a:solidFill>
+            <a:ln>
+              <a:solidFill>
+                <a:schemeClr val="bg2"/>
+              </a:solidFill>
+            </a:ln>
+          </p:spPr>
+          <p:style>
+            <a:lnRef idx="2">
+              <a:schemeClr val="accent1">
+                <a:shade val="15000"/>
+              </a:schemeClr>
+            </a:lnRef>
+            <a:fillRef idx="1">
+              <a:schemeClr val="accent1"/>
+            </a:fillRef>
+            <a:effectRef idx="0">
+              <a:schemeClr val="accent1"/>
+            </a:effectRef>
+            <a:fontRef idx="minor">
+              <a:schemeClr val="lt1"/>
+            </a:fontRef>
+          </p:style>
+          <p:txBody>
+            <a:bodyPr rtlCol="0" anchor="ctr"/>
+            <a:lstStyle/>
+            <a:p>
+              <a:pPr algn="ctr"/>
+              <a:endParaRPr lang="en-US"/>
+            </a:p>
+          </p:txBody>
+        </p:sp>
+        <p:sp>
+          <p:nvSpPr>
+            <p:cNvPr id="149" name="Oval 148">
+              <a:extLst>
+                <a:ext uri="{FF2B5EF4-FFF2-40B4-BE49-F238E27FC236}">
+                  <a16:creationId xmlns:a16="http://schemas.microsoft.com/office/drawing/2014/main" id="{B25B6FF8-8F77-5A33-5F7B-3239CD5A27BC}"/>
+                </a:ext>
+              </a:extLst>
+            </p:cNvPr>
+            <p:cNvSpPr/>
+            <p:nvPr/>
+          </p:nvSpPr>
+          <p:spPr>
+            <a:xfrm>
+              <a:off x="2562313" y="3463377"/>
+              <a:ext cx="142504" cy="142504"/>
+            </a:xfrm>
+            <a:prstGeom prst="ellipse">
+              <a:avLst/>
+            </a:prstGeom>
+            <a:solidFill>
+              <a:schemeClr val="bg2">
+                <a:lumMod val="90000"/>
+              </a:schemeClr>
+            </a:solidFill>
+            <a:ln>
+              <a:solidFill>
+                <a:schemeClr val="bg2"/>
+              </a:solidFill>
+            </a:ln>
+          </p:spPr>
+          <p:style>
+            <a:lnRef idx="2">
+              <a:schemeClr val="accent1">
+                <a:shade val="15000"/>
+              </a:schemeClr>
+            </a:lnRef>
+            <a:fillRef idx="1">
+              <a:schemeClr val="accent1"/>
+            </a:fillRef>
+            <a:effectRef idx="0">
+              <a:schemeClr val="accent1"/>
+            </a:effectRef>
+            <a:fontRef idx="minor">
+              <a:schemeClr val="lt1"/>
+            </a:fontRef>
+          </p:style>
+          <p:txBody>
+            <a:bodyPr rtlCol="0" anchor="ctr"/>
+            <a:lstStyle/>
+            <a:p>
+              <a:pPr algn="ctr"/>
+              <a:endParaRPr lang="en-US"/>
+            </a:p>
+          </p:txBody>
+        </p:sp>
+        <p:sp>
+          <p:nvSpPr>
+            <p:cNvPr id="150" name="Oval 149">
+              <a:extLst>
+                <a:ext uri="{FF2B5EF4-FFF2-40B4-BE49-F238E27FC236}">
+                  <a16:creationId xmlns:a16="http://schemas.microsoft.com/office/drawing/2014/main" id="{2B670860-68B3-ADF5-C302-464D956502AE}"/>
+                </a:ext>
+              </a:extLst>
+            </p:cNvPr>
+            <p:cNvSpPr/>
+            <p:nvPr/>
+          </p:nvSpPr>
+          <p:spPr>
+            <a:xfrm>
+              <a:off x="2565415" y="2856844"/>
+              <a:ext cx="142504" cy="142504"/>
+            </a:xfrm>
+            <a:prstGeom prst="ellipse">
+              <a:avLst/>
+            </a:prstGeom>
+            <a:solidFill>
+              <a:schemeClr val="bg2">
+                <a:lumMod val="90000"/>
+              </a:schemeClr>
+            </a:solidFill>
+            <a:ln>
+              <a:solidFill>
+                <a:schemeClr val="bg2"/>
+              </a:solidFill>
+            </a:ln>
+          </p:spPr>
+          <p:style>
+            <a:lnRef idx="2">
+              <a:schemeClr val="accent1">
+                <a:shade val="15000"/>
+              </a:schemeClr>
+            </a:lnRef>
+            <a:fillRef idx="1">
+              <a:schemeClr val="accent1"/>
+            </a:fillRef>
+            <a:effectRef idx="0">
+              <a:schemeClr val="accent1"/>
+            </a:effectRef>
+            <a:fontRef idx="minor">
+              <a:schemeClr val="lt1"/>
+            </a:fontRef>
+          </p:style>
+          <p:txBody>
+            <a:bodyPr rtlCol="0" anchor="ctr"/>
+            <a:lstStyle/>
+            <a:p>
+              <a:pPr algn="ctr"/>
+              <a:endParaRPr lang="en-US"/>
+            </a:p>
+          </p:txBody>
+        </p:sp>
+      </p:grpSp>
+      <p:grpSp>
+        <p:nvGrpSpPr>
+          <p:cNvPr id="169" name="Group 168">
+            <a:extLst>
+              <a:ext uri="{FF2B5EF4-FFF2-40B4-BE49-F238E27FC236}">
+                <a16:creationId xmlns:a16="http://schemas.microsoft.com/office/drawing/2014/main" id="{6CECE249-424E-B0E7-8AE3-531AFFA63948}"/>
+              </a:ext>
+            </a:extLst>
+          </p:cNvPr>
+          <p:cNvGrpSpPr/>
+          <p:nvPr/>
+        </p:nvGrpSpPr>
+        <p:grpSpPr>
+          <a:xfrm>
+            <a:off x="8870543" y="3501366"/>
+            <a:ext cx="1353929" cy="1361503"/>
+            <a:chOff x="1951573" y="2244381"/>
+            <a:chExt cx="1353929" cy="1361503"/>
+          </a:xfrm>
+        </p:grpSpPr>
+        <p:grpSp>
+          <p:nvGrpSpPr>
+            <p:cNvPr id="170" name="Group 169">
+              <a:extLst>
+                <a:ext uri="{FF2B5EF4-FFF2-40B4-BE49-F238E27FC236}">
+                  <a16:creationId xmlns:a16="http://schemas.microsoft.com/office/drawing/2014/main" id="{89351C86-DB16-9E43-543B-0AD03C065DEB}"/>
+                </a:ext>
+              </a:extLst>
+            </p:cNvPr>
+            <p:cNvGrpSpPr/>
+            <p:nvPr/>
+          </p:nvGrpSpPr>
+          <p:grpSpPr>
+            <a:xfrm>
+              <a:off x="1951573" y="2321563"/>
+              <a:ext cx="1282677" cy="1218998"/>
+              <a:chOff x="5419036" y="1839783"/>
+              <a:chExt cx="1282677" cy="1218998"/>
+            </a:xfrm>
+          </p:grpSpPr>
+          <p:sp>
+            <p:nvSpPr>
+              <p:cNvPr id="180" name="Rectangle 179">
+                <a:extLst>
+                  <a:ext uri="{FF2B5EF4-FFF2-40B4-BE49-F238E27FC236}">
+                    <a16:creationId xmlns:a16="http://schemas.microsoft.com/office/drawing/2014/main" id="{3E190B01-5C56-899B-4177-ABE0A5D5CCA2}"/>
+                  </a:ext>
+                </a:extLst>
+              </p:cNvPr>
+              <p:cNvSpPr/>
+              <p:nvPr/>
+            </p:nvSpPr>
+            <p:spPr>
+              <a:xfrm>
+                <a:off x="5482464" y="1839783"/>
+                <a:ext cx="1219249" cy="1218998"/>
+              </a:xfrm>
+              <a:prstGeom prst="rect">
+                <a:avLst/>
+              </a:prstGeom>
+              <a:noFill/>
+              <a:ln w="15875">
+                <a:solidFill>
+                  <a:schemeClr val="bg2"/>
+                </a:solidFill>
+                <a:prstDash val="sysDash"/>
+              </a:ln>
+            </p:spPr>
+            <p:style>
+              <a:lnRef idx="2">
+                <a:schemeClr val="accent1">
+                  <a:shade val="15000"/>
+                </a:schemeClr>
+              </a:lnRef>
+              <a:fillRef idx="1">
+                <a:schemeClr val="accent1"/>
+              </a:fillRef>
+              <a:effectRef idx="0">
+                <a:schemeClr val="accent1"/>
+              </a:effectRef>
+              <a:fontRef idx="minor">
+                <a:schemeClr val="lt1"/>
+              </a:fontRef>
+            </p:style>
+            <p:txBody>
+              <a:bodyPr rtlCol="0" anchor="ctr"/>
+              <a:lstStyle/>
+              <a:p>
+                <a:pPr algn="ctr"/>
+                <a:endParaRPr lang="en-US"/>
+              </a:p>
+            </p:txBody>
+          </p:sp>
+          <p:cxnSp>
+            <p:nvCxnSpPr>
+              <p:cNvPr id="181" name="Straight Connector 180">
+                <a:extLst>
+                  <a:ext uri="{FF2B5EF4-FFF2-40B4-BE49-F238E27FC236}">
+                    <a16:creationId xmlns:a16="http://schemas.microsoft.com/office/drawing/2014/main" id="{64689F2B-BDD9-CCE5-1509-8DFA0BE2AA0C}"/>
+                  </a:ext>
+                </a:extLst>
+              </p:cNvPr>
+              <p:cNvCxnSpPr>
+                <a:cxnSpLocks/>
+                <a:stCxn id="177" idx="4"/>
+              </p:cNvCxnSpPr>
+              <p:nvPr/>
+            </p:nvCxnSpPr>
+            <p:spPr>
+              <a:xfrm flipH="1">
+                <a:off x="6101028" y="1905105"/>
+                <a:ext cx="2766" cy="1147744"/>
+              </a:xfrm>
+              <a:prstGeom prst="line">
+                <a:avLst/>
+              </a:prstGeom>
+              <a:ln w="15875">
+                <a:solidFill>
+                  <a:schemeClr val="bg2"/>
+                </a:solidFill>
+                <a:prstDash val="sysDash"/>
+              </a:ln>
+            </p:spPr>
+            <p:style>
+              <a:lnRef idx="2">
+                <a:schemeClr val="accent1"/>
+              </a:lnRef>
+              <a:fillRef idx="0">
+                <a:schemeClr val="accent1"/>
+              </a:fillRef>
+              <a:effectRef idx="1">
+                <a:schemeClr val="accent1"/>
+              </a:effectRef>
+              <a:fontRef idx="minor">
+                <a:schemeClr val="tx1"/>
+              </a:fontRef>
+            </p:style>
+          </p:cxnSp>
+          <p:cxnSp>
+            <p:nvCxnSpPr>
+              <p:cNvPr id="182" name="Straight Connector 181">
+                <a:extLst>
+                  <a:ext uri="{FF2B5EF4-FFF2-40B4-BE49-F238E27FC236}">
+                    <a16:creationId xmlns:a16="http://schemas.microsoft.com/office/drawing/2014/main" id="{1C15296D-6C45-4F75-CD11-66CD341C329E}"/>
+                  </a:ext>
+                </a:extLst>
+              </p:cNvPr>
+              <p:cNvCxnSpPr>
+                <a:stCxn id="175" idx="2"/>
+                <a:endCxn id="172" idx="2"/>
+              </p:cNvCxnSpPr>
+              <p:nvPr/>
+            </p:nvCxnSpPr>
+            <p:spPr>
+              <a:xfrm>
+                <a:off x="5419036" y="2446316"/>
+                <a:ext cx="1211425" cy="0"/>
+              </a:xfrm>
+              <a:prstGeom prst="line">
+                <a:avLst/>
+              </a:prstGeom>
+              <a:ln w="15875">
+                <a:solidFill>
+                  <a:schemeClr val="bg2"/>
+                </a:solidFill>
+                <a:prstDash val="sysDash"/>
+              </a:ln>
+            </p:spPr>
+            <p:style>
+              <a:lnRef idx="2">
+                <a:schemeClr val="accent1"/>
+              </a:lnRef>
+              <a:fillRef idx="0">
+                <a:schemeClr val="accent1"/>
+              </a:fillRef>
+              <a:effectRef idx="1">
+                <a:schemeClr val="accent1"/>
+              </a:effectRef>
+              <a:fontRef idx="minor">
+                <a:schemeClr val="tx1"/>
+              </a:fontRef>
+            </p:style>
+          </p:cxnSp>
+        </p:grpSp>
+        <p:sp>
+          <p:nvSpPr>
+            <p:cNvPr id="171" name="Oval 170">
+              <a:extLst>
+                <a:ext uri="{FF2B5EF4-FFF2-40B4-BE49-F238E27FC236}">
+                  <a16:creationId xmlns:a16="http://schemas.microsoft.com/office/drawing/2014/main" id="{62E041A4-6ACB-C35D-7593-FA51DAB5B182}"/>
+                </a:ext>
+              </a:extLst>
+            </p:cNvPr>
+            <p:cNvSpPr/>
+            <p:nvPr/>
+          </p:nvSpPr>
+          <p:spPr>
+            <a:xfrm>
+              <a:off x="3162998" y="3463380"/>
+              <a:ext cx="142504" cy="142504"/>
+            </a:xfrm>
+            <a:prstGeom prst="ellipse">
+              <a:avLst/>
+            </a:prstGeom>
+            <a:solidFill>
+              <a:schemeClr val="bg2">
+                <a:lumMod val="90000"/>
+              </a:schemeClr>
+            </a:solidFill>
+            <a:ln>
+              <a:solidFill>
+                <a:schemeClr val="bg2"/>
+              </a:solidFill>
+            </a:ln>
+          </p:spPr>
+          <p:style>
+            <a:lnRef idx="2">
+              <a:schemeClr val="accent1">
+                <a:shade val="15000"/>
+              </a:schemeClr>
+            </a:lnRef>
+            <a:fillRef idx="1">
+              <a:schemeClr val="accent1"/>
+            </a:fillRef>
+            <a:effectRef idx="0">
+              <a:schemeClr val="accent1"/>
+            </a:effectRef>
+            <a:fontRef idx="minor">
+              <a:schemeClr val="lt1"/>
+            </a:fontRef>
+          </p:style>
+          <p:txBody>
+            <a:bodyPr rtlCol="0" anchor="ctr"/>
+            <a:lstStyle/>
+            <a:p>
+              <a:pPr algn="ctr"/>
+              <a:endParaRPr lang="en-US"/>
+            </a:p>
+          </p:txBody>
+        </p:sp>
+        <p:sp>
+          <p:nvSpPr>
+            <p:cNvPr id="172" name="Oval 171">
+              <a:extLst>
+                <a:ext uri="{FF2B5EF4-FFF2-40B4-BE49-F238E27FC236}">
+                  <a16:creationId xmlns:a16="http://schemas.microsoft.com/office/drawing/2014/main" id="{27971CFE-9C30-FC6A-6966-049426C27773}"/>
+                </a:ext>
+              </a:extLst>
+            </p:cNvPr>
+            <p:cNvSpPr/>
+            <p:nvPr/>
+          </p:nvSpPr>
+          <p:spPr>
+            <a:xfrm>
+              <a:off x="3162998" y="2856844"/>
+              <a:ext cx="142504" cy="142504"/>
+            </a:xfrm>
+            <a:prstGeom prst="ellipse">
+              <a:avLst/>
+            </a:prstGeom>
+            <a:solidFill>
+              <a:schemeClr val="bg2">
+                <a:lumMod val="90000"/>
+              </a:schemeClr>
+            </a:solidFill>
+            <a:ln>
+              <a:solidFill>
+                <a:schemeClr val="bg2"/>
+              </a:solidFill>
+            </a:ln>
+          </p:spPr>
+          <p:style>
+            <a:lnRef idx="2">
+              <a:schemeClr val="accent1">
+                <a:shade val="15000"/>
+              </a:schemeClr>
+            </a:lnRef>
+            <a:fillRef idx="1">
+              <a:schemeClr val="accent1"/>
+            </a:fillRef>
+            <a:effectRef idx="0">
+              <a:schemeClr val="accent1"/>
+            </a:effectRef>
+            <a:fontRef idx="minor">
+              <a:schemeClr val="lt1"/>
+            </a:fontRef>
+          </p:style>
+          <p:txBody>
+            <a:bodyPr rtlCol="0" anchor="ctr"/>
+            <a:lstStyle/>
+            <a:p>
+              <a:pPr algn="ctr"/>
+              <a:endParaRPr lang="en-US"/>
+            </a:p>
+          </p:txBody>
+        </p:sp>
+        <p:sp>
+          <p:nvSpPr>
+            <p:cNvPr id="173" name="Oval 172">
+              <a:extLst>
+                <a:ext uri="{FF2B5EF4-FFF2-40B4-BE49-F238E27FC236}">
+                  <a16:creationId xmlns:a16="http://schemas.microsoft.com/office/drawing/2014/main" id="{CE7588E9-6368-28F5-CA8F-4F6BA145039F}"/>
+                </a:ext>
+              </a:extLst>
+            </p:cNvPr>
+            <p:cNvSpPr/>
+            <p:nvPr/>
+          </p:nvSpPr>
+          <p:spPr>
+            <a:xfrm>
+              <a:off x="3162998" y="2250308"/>
+              <a:ext cx="142504" cy="142504"/>
+            </a:xfrm>
+            <a:prstGeom prst="ellipse">
+              <a:avLst/>
+            </a:prstGeom>
+            <a:solidFill>
+              <a:schemeClr val="bg2">
+                <a:lumMod val="90000"/>
+              </a:schemeClr>
+            </a:solidFill>
+            <a:ln>
+              <a:solidFill>
+                <a:schemeClr val="bg2"/>
+              </a:solidFill>
+            </a:ln>
+          </p:spPr>
+          <p:style>
+            <a:lnRef idx="2">
+              <a:schemeClr val="accent1">
+                <a:shade val="15000"/>
+              </a:schemeClr>
+            </a:lnRef>
+            <a:fillRef idx="1">
+              <a:schemeClr val="accent1"/>
+            </a:fillRef>
+            <a:effectRef idx="0">
+              <a:schemeClr val="accent1"/>
+            </a:effectRef>
+            <a:fontRef idx="minor">
+              <a:schemeClr val="lt1"/>
+            </a:fontRef>
+          </p:style>
+          <p:txBody>
+            <a:bodyPr rtlCol="0" anchor="ctr"/>
+            <a:lstStyle/>
+            <a:p>
+              <a:pPr algn="ctr"/>
+              <a:endParaRPr lang="en-US"/>
+            </a:p>
+          </p:txBody>
+        </p:sp>
+        <p:sp>
+          <p:nvSpPr>
+            <p:cNvPr id="174" name="Oval 173">
+              <a:extLst>
+                <a:ext uri="{FF2B5EF4-FFF2-40B4-BE49-F238E27FC236}">
+                  <a16:creationId xmlns:a16="http://schemas.microsoft.com/office/drawing/2014/main" id="{B72B18CC-0632-0ACB-71B0-F310ECC59452}"/>
+                </a:ext>
+              </a:extLst>
+            </p:cNvPr>
+            <p:cNvSpPr/>
+            <p:nvPr/>
+          </p:nvSpPr>
+          <p:spPr>
+            <a:xfrm>
+              <a:off x="1951573" y="3463380"/>
+              <a:ext cx="142504" cy="142504"/>
+            </a:xfrm>
+            <a:prstGeom prst="ellipse">
+              <a:avLst/>
+            </a:prstGeom>
+            <a:solidFill>
+              <a:schemeClr val="bg2">
+                <a:lumMod val="90000"/>
+              </a:schemeClr>
+            </a:solidFill>
+            <a:ln>
+              <a:solidFill>
+                <a:schemeClr val="bg2"/>
+              </a:solidFill>
+            </a:ln>
+          </p:spPr>
+          <p:style>
+            <a:lnRef idx="2">
+              <a:schemeClr val="accent1">
+                <a:shade val="15000"/>
+              </a:schemeClr>
+            </a:lnRef>
+            <a:fillRef idx="1">
+              <a:schemeClr val="accent1"/>
+            </a:fillRef>
+            <a:effectRef idx="0">
+              <a:schemeClr val="accent1"/>
+            </a:effectRef>
+            <a:fontRef idx="minor">
+              <a:schemeClr val="lt1"/>
+            </a:fontRef>
+          </p:style>
+          <p:txBody>
+            <a:bodyPr rtlCol="0" anchor="ctr"/>
+            <a:lstStyle/>
+            <a:p>
+              <a:pPr algn="ctr"/>
+              <a:endParaRPr lang="en-US"/>
+            </a:p>
+          </p:txBody>
+        </p:sp>
+        <p:sp>
+          <p:nvSpPr>
+            <p:cNvPr id="175" name="Oval 174">
+              <a:extLst>
+                <a:ext uri="{FF2B5EF4-FFF2-40B4-BE49-F238E27FC236}">
+                  <a16:creationId xmlns:a16="http://schemas.microsoft.com/office/drawing/2014/main" id="{5440EF09-AE82-EAD1-C0D0-F0A950AA94DC}"/>
+                </a:ext>
+              </a:extLst>
+            </p:cNvPr>
+            <p:cNvSpPr/>
+            <p:nvPr/>
+          </p:nvSpPr>
+          <p:spPr>
+            <a:xfrm>
+              <a:off x="1951573" y="2856844"/>
+              <a:ext cx="142504" cy="142504"/>
+            </a:xfrm>
+            <a:prstGeom prst="ellipse">
+              <a:avLst/>
+            </a:prstGeom>
+            <a:solidFill>
+              <a:schemeClr val="bg2">
+                <a:lumMod val="90000"/>
+              </a:schemeClr>
+            </a:solidFill>
+            <a:ln>
+              <a:solidFill>
+                <a:schemeClr val="bg2"/>
+              </a:solidFill>
+            </a:ln>
+          </p:spPr>
+          <p:style>
+            <a:lnRef idx="2">
+              <a:schemeClr val="accent1">
+                <a:shade val="15000"/>
+              </a:schemeClr>
+            </a:lnRef>
+            <a:fillRef idx="1">
+              <a:schemeClr val="accent1"/>
+            </a:fillRef>
+            <a:effectRef idx="0">
+              <a:schemeClr val="accent1"/>
+            </a:effectRef>
+            <a:fontRef idx="minor">
+              <a:schemeClr val="lt1"/>
+            </a:fontRef>
+          </p:style>
+          <p:txBody>
+            <a:bodyPr rtlCol="0" anchor="ctr"/>
+            <a:lstStyle/>
+            <a:p>
+              <a:pPr algn="ctr"/>
+              <a:endParaRPr lang="en-US"/>
+            </a:p>
+          </p:txBody>
+        </p:sp>
+        <p:sp>
+          <p:nvSpPr>
+            <p:cNvPr id="176" name="Oval 175">
+              <a:extLst>
+                <a:ext uri="{FF2B5EF4-FFF2-40B4-BE49-F238E27FC236}">
+                  <a16:creationId xmlns:a16="http://schemas.microsoft.com/office/drawing/2014/main" id="{B58A0A32-26CB-430B-13D8-3854CCAE2459}"/>
+                </a:ext>
+              </a:extLst>
+            </p:cNvPr>
+            <p:cNvSpPr/>
+            <p:nvPr/>
+          </p:nvSpPr>
+          <p:spPr>
+            <a:xfrm>
+              <a:off x="1951573" y="2250308"/>
+              <a:ext cx="142504" cy="142504"/>
+            </a:xfrm>
+            <a:prstGeom prst="ellipse">
+              <a:avLst/>
+            </a:prstGeom>
+            <a:solidFill>
+              <a:schemeClr val="bg2">
+                <a:lumMod val="90000"/>
+              </a:schemeClr>
+            </a:solidFill>
+            <a:ln>
+              <a:solidFill>
+                <a:schemeClr val="bg2"/>
+              </a:solidFill>
+            </a:ln>
+          </p:spPr>
+          <p:style>
+            <a:lnRef idx="2">
+              <a:schemeClr val="accent1">
+                <a:shade val="15000"/>
+              </a:schemeClr>
+            </a:lnRef>
+            <a:fillRef idx="1">
+              <a:schemeClr val="accent1"/>
+            </a:fillRef>
+            <a:effectRef idx="0">
+              <a:schemeClr val="accent1"/>
+            </a:effectRef>
+            <a:fontRef idx="minor">
+              <a:schemeClr val="lt1"/>
+            </a:fontRef>
+          </p:style>
+          <p:txBody>
+            <a:bodyPr rtlCol="0" anchor="ctr"/>
+            <a:lstStyle/>
+            <a:p>
+              <a:pPr algn="ctr"/>
+              <a:endParaRPr lang="en-US"/>
+            </a:p>
+          </p:txBody>
+        </p:sp>
+        <p:sp>
+          <p:nvSpPr>
+            <p:cNvPr id="177" name="Oval 176">
+              <a:extLst>
+                <a:ext uri="{FF2B5EF4-FFF2-40B4-BE49-F238E27FC236}">
+                  <a16:creationId xmlns:a16="http://schemas.microsoft.com/office/drawing/2014/main" id="{CCF90B99-B486-709B-4A32-18D1CBD71EF2}"/>
+                </a:ext>
+              </a:extLst>
+            </p:cNvPr>
+            <p:cNvSpPr/>
+            <p:nvPr/>
+          </p:nvSpPr>
+          <p:spPr>
+            <a:xfrm>
+              <a:off x="2565079" y="2244381"/>
+              <a:ext cx="142504" cy="142504"/>
+            </a:xfrm>
+            <a:prstGeom prst="ellipse">
+              <a:avLst/>
+            </a:prstGeom>
+            <a:solidFill>
+              <a:schemeClr val="bg2">
+                <a:lumMod val="90000"/>
+              </a:schemeClr>
+            </a:solidFill>
+            <a:ln>
+              <a:solidFill>
+                <a:schemeClr val="bg2"/>
+              </a:solidFill>
+            </a:ln>
+          </p:spPr>
+          <p:style>
+            <a:lnRef idx="2">
+              <a:schemeClr val="accent1">
+                <a:shade val="15000"/>
+              </a:schemeClr>
+            </a:lnRef>
+            <a:fillRef idx="1">
+              <a:schemeClr val="accent1"/>
+            </a:fillRef>
+            <a:effectRef idx="0">
+              <a:schemeClr val="accent1"/>
+            </a:effectRef>
+            <a:fontRef idx="minor">
+              <a:schemeClr val="lt1"/>
+            </a:fontRef>
+          </p:style>
+          <p:txBody>
+            <a:bodyPr rtlCol="0" anchor="ctr"/>
+            <a:lstStyle/>
+            <a:p>
+              <a:pPr algn="ctr"/>
+              <a:endParaRPr lang="en-US"/>
+            </a:p>
+          </p:txBody>
+        </p:sp>
+        <p:sp>
+          <p:nvSpPr>
+            <p:cNvPr id="178" name="Oval 177">
+              <a:extLst>
+                <a:ext uri="{FF2B5EF4-FFF2-40B4-BE49-F238E27FC236}">
+                  <a16:creationId xmlns:a16="http://schemas.microsoft.com/office/drawing/2014/main" id="{205D9710-961A-0F8D-92A3-0D166026AF77}"/>
+                </a:ext>
+              </a:extLst>
+            </p:cNvPr>
+            <p:cNvSpPr/>
+            <p:nvPr/>
+          </p:nvSpPr>
+          <p:spPr>
+            <a:xfrm>
+              <a:off x="2562313" y="3463377"/>
+              <a:ext cx="142504" cy="142504"/>
+            </a:xfrm>
+            <a:prstGeom prst="ellipse">
+              <a:avLst/>
+            </a:prstGeom>
+            <a:solidFill>
+              <a:schemeClr val="bg2">
+                <a:lumMod val="90000"/>
+              </a:schemeClr>
+            </a:solidFill>
+            <a:ln>
+              <a:solidFill>
+                <a:schemeClr val="bg2"/>
+              </a:solidFill>
+            </a:ln>
+          </p:spPr>
+          <p:style>
+            <a:lnRef idx="2">
+              <a:schemeClr val="accent1">
+                <a:shade val="15000"/>
+              </a:schemeClr>
+            </a:lnRef>
+            <a:fillRef idx="1">
+              <a:schemeClr val="accent1"/>
+            </a:fillRef>
+            <a:effectRef idx="0">
+              <a:schemeClr val="accent1"/>
+            </a:effectRef>
+            <a:fontRef idx="minor">
+              <a:schemeClr val="lt1"/>
+            </a:fontRef>
+          </p:style>
+          <p:txBody>
+            <a:bodyPr rtlCol="0" anchor="ctr"/>
+            <a:lstStyle/>
+            <a:p>
+              <a:pPr algn="ctr"/>
+              <a:endParaRPr lang="en-US"/>
+            </a:p>
+          </p:txBody>
+        </p:sp>
+        <p:sp>
+          <p:nvSpPr>
+            <p:cNvPr id="179" name="Oval 178">
+              <a:extLst>
+                <a:ext uri="{FF2B5EF4-FFF2-40B4-BE49-F238E27FC236}">
+                  <a16:creationId xmlns:a16="http://schemas.microsoft.com/office/drawing/2014/main" id="{3221FBEC-533D-CAF2-1339-53555E636A3D}"/>
+                </a:ext>
+              </a:extLst>
+            </p:cNvPr>
+            <p:cNvSpPr/>
+            <p:nvPr/>
+          </p:nvSpPr>
+          <p:spPr>
+            <a:xfrm>
+              <a:off x="2565415" y="2856844"/>
+              <a:ext cx="142504" cy="142504"/>
+            </a:xfrm>
+            <a:prstGeom prst="ellipse">
+              <a:avLst/>
+            </a:prstGeom>
+            <a:solidFill>
+              <a:schemeClr val="bg2">
+                <a:lumMod val="90000"/>
+              </a:schemeClr>
+            </a:solidFill>
+            <a:ln>
+              <a:solidFill>
+                <a:schemeClr val="bg2"/>
+              </a:solidFill>
+            </a:ln>
+          </p:spPr>
+          <p:style>
+            <a:lnRef idx="2">
+              <a:schemeClr val="accent1">
+                <a:shade val="15000"/>
+              </a:schemeClr>
+            </a:lnRef>
+            <a:fillRef idx="1">
+              <a:schemeClr val="accent1"/>
+            </a:fillRef>
+            <a:effectRef idx="0">
+              <a:schemeClr val="accent1"/>
+            </a:effectRef>
+            <a:fontRef idx="minor">
+              <a:schemeClr val="lt1"/>
+            </a:fontRef>
+          </p:style>
+          <p:txBody>
+            <a:bodyPr rtlCol="0" anchor="ctr"/>
+            <a:lstStyle/>
+            <a:p>
+              <a:pPr algn="ctr"/>
+              <a:endParaRPr lang="en-US"/>
+            </a:p>
+          </p:txBody>
+        </p:sp>
+      </p:grpSp>
+      <p:grpSp>
+        <p:nvGrpSpPr>
+          <p:cNvPr id="154" name="Group 153">
+            <a:extLst>
+              <a:ext uri="{FF2B5EF4-FFF2-40B4-BE49-F238E27FC236}">
+                <a16:creationId xmlns:a16="http://schemas.microsoft.com/office/drawing/2014/main" id="{7B083445-E505-66D7-F757-56AC9A5C64A3}"/>
+              </a:ext>
+            </a:extLst>
+          </p:cNvPr>
+          <p:cNvGrpSpPr/>
+          <p:nvPr/>
+        </p:nvGrpSpPr>
+        <p:grpSpPr>
+          <a:xfrm>
+            <a:off x="9200888" y="3824750"/>
+            <a:ext cx="691787" cy="695656"/>
+            <a:chOff x="5419036" y="1762601"/>
+            <a:chExt cx="1353929" cy="1361503"/>
+          </a:xfrm>
+        </p:grpSpPr>
+        <p:grpSp>
+          <p:nvGrpSpPr>
+            <p:cNvPr id="155" name="Group 154">
+              <a:extLst>
+                <a:ext uri="{FF2B5EF4-FFF2-40B4-BE49-F238E27FC236}">
+                  <a16:creationId xmlns:a16="http://schemas.microsoft.com/office/drawing/2014/main" id="{9421085E-BB28-AA5A-3A98-328C76B40ACB}"/>
+                </a:ext>
+              </a:extLst>
+            </p:cNvPr>
+            <p:cNvGrpSpPr/>
+            <p:nvPr/>
+          </p:nvGrpSpPr>
+          <p:grpSpPr>
+            <a:xfrm>
+              <a:off x="5419036" y="1839783"/>
+              <a:ext cx="1282677" cy="1218998"/>
+              <a:chOff x="5419036" y="1839783"/>
+              <a:chExt cx="1282677" cy="1218998"/>
+            </a:xfrm>
+          </p:grpSpPr>
+          <p:sp>
+            <p:nvSpPr>
+              <p:cNvPr id="165" name="Rectangle 164">
+                <a:extLst>
+                  <a:ext uri="{FF2B5EF4-FFF2-40B4-BE49-F238E27FC236}">
+                    <a16:creationId xmlns:a16="http://schemas.microsoft.com/office/drawing/2014/main" id="{09FE592E-0A1D-822D-02B2-2DBA20807C70}"/>
+                  </a:ext>
+                </a:extLst>
+              </p:cNvPr>
+              <p:cNvSpPr/>
+              <p:nvPr/>
+            </p:nvSpPr>
+            <p:spPr>
+              <a:xfrm>
+                <a:off x="5482464" y="1839783"/>
+                <a:ext cx="1219249" cy="1218998"/>
+              </a:xfrm>
+              <a:prstGeom prst="rect">
+                <a:avLst/>
+              </a:prstGeom>
+              <a:noFill/>
+              <a:ln w="15875">
+                <a:solidFill>
+                  <a:schemeClr val="tx1"/>
+                </a:solidFill>
+                <a:prstDash val="sysDash"/>
+              </a:ln>
+            </p:spPr>
+            <p:style>
+              <a:lnRef idx="2">
+                <a:schemeClr val="accent1">
+                  <a:shade val="15000"/>
+                </a:schemeClr>
+              </a:lnRef>
+              <a:fillRef idx="1">
+                <a:schemeClr val="accent1"/>
+              </a:fillRef>
+              <a:effectRef idx="0">
+                <a:schemeClr val="accent1"/>
+              </a:effectRef>
+              <a:fontRef idx="minor">
+                <a:schemeClr val="lt1"/>
+              </a:fontRef>
+            </p:style>
+            <p:txBody>
+              <a:bodyPr rtlCol="0" anchor="ctr"/>
+              <a:lstStyle/>
+              <a:p>
+                <a:pPr algn="ctr"/>
+                <a:endParaRPr lang="en-US"/>
+              </a:p>
+            </p:txBody>
+          </p:sp>
+          <p:cxnSp>
+            <p:nvCxnSpPr>
+              <p:cNvPr id="166" name="Straight Connector 165">
+                <a:extLst>
+                  <a:ext uri="{FF2B5EF4-FFF2-40B4-BE49-F238E27FC236}">
+                    <a16:creationId xmlns:a16="http://schemas.microsoft.com/office/drawing/2014/main" id="{C3BE2E9E-7D1C-3592-B5F4-682AA600B22A}"/>
+                  </a:ext>
+                </a:extLst>
+              </p:cNvPr>
+              <p:cNvCxnSpPr>
+                <a:cxnSpLocks/>
+                <a:stCxn id="162" idx="4"/>
+              </p:cNvCxnSpPr>
+              <p:nvPr/>
+            </p:nvCxnSpPr>
+            <p:spPr>
+              <a:xfrm flipH="1">
+                <a:off x="6101028" y="1905105"/>
+                <a:ext cx="2766" cy="1147744"/>
+              </a:xfrm>
+              <a:prstGeom prst="line">
+                <a:avLst/>
+              </a:prstGeom>
+              <a:ln w="15875">
+                <a:solidFill>
+                  <a:schemeClr val="tx1"/>
+                </a:solidFill>
+                <a:prstDash val="sysDash"/>
+              </a:ln>
+            </p:spPr>
+            <p:style>
+              <a:lnRef idx="2">
+                <a:schemeClr val="accent1"/>
+              </a:lnRef>
+              <a:fillRef idx="0">
+                <a:schemeClr val="accent1"/>
+              </a:fillRef>
+              <a:effectRef idx="1">
+                <a:schemeClr val="accent1"/>
+              </a:effectRef>
+              <a:fontRef idx="minor">
+                <a:schemeClr val="tx1"/>
+              </a:fontRef>
+            </p:style>
+          </p:cxnSp>
+          <p:cxnSp>
+            <p:nvCxnSpPr>
+              <p:cNvPr id="167" name="Straight Connector 166">
+                <a:extLst>
+                  <a:ext uri="{FF2B5EF4-FFF2-40B4-BE49-F238E27FC236}">
+                    <a16:creationId xmlns:a16="http://schemas.microsoft.com/office/drawing/2014/main" id="{AE162BA2-6F3B-4629-1FE9-21BF7F2A44FE}"/>
+                  </a:ext>
+                </a:extLst>
+              </p:cNvPr>
+              <p:cNvCxnSpPr>
+                <a:stCxn id="160" idx="2"/>
+                <a:endCxn id="157" idx="2"/>
+              </p:cNvCxnSpPr>
+              <p:nvPr/>
+            </p:nvCxnSpPr>
+            <p:spPr>
+              <a:xfrm>
+                <a:off x="5419036" y="2446316"/>
+                <a:ext cx="1211425" cy="0"/>
+              </a:xfrm>
+              <a:prstGeom prst="line">
+                <a:avLst/>
+              </a:prstGeom>
+              <a:ln w="15875">
+                <a:solidFill>
+                  <a:schemeClr val="tx1"/>
+                </a:solidFill>
+                <a:prstDash val="sysDash"/>
+              </a:ln>
+            </p:spPr>
+            <p:style>
+              <a:lnRef idx="2">
+                <a:schemeClr val="accent1"/>
+              </a:lnRef>
+              <a:fillRef idx="0">
+                <a:schemeClr val="accent1"/>
+              </a:fillRef>
+              <a:effectRef idx="1">
+                <a:schemeClr val="accent1"/>
+              </a:effectRef>
+              <a:fontRef idx="minor">
+                <a:schemeClr val="tx1"/>
+              </a:fontRef>
+            </p:style>
+          </p:cxnSp>
+        </p:grpSp>
+        <p:sp>
+          <p:nvSpPr>
+            <p:cNvPr id="156" name="Oval 155">
+              <a:extLst>
+                <a:ext uri="{FF2B5EF4-FFF2-40B4-BE49-F238E27FC236}">
+                  <a16:creationId xmlns:a16="http://schemas.microsoft.com/office/drawing/2014/main" id="{4EAE02CD-1A2F-CC3C-3071-96D7D5981026}"/>
+                </a:ext>
+              </a:extLst>
+            </p:cNvPr>
+            <p:cNvSpPr/>
+            <p:nvPr/>
+          </p:nvSpPr>
+          <p:spPr>
+            <a:xfrm>
+              <a:off x="6630461" y="2981600"/>
+              <a:ext cx="142504" cy="142504"/>
+            </a:xfrm>
+            <a:prstGeom prst="ellipse">
+              <a:avLst/>
+            </a:prstGeom>
+          </p:spPr>
+          <p:style>
+            <a:lnRef idx="2">
+              <a:schemeClr val="accent1">
+                <a:shade val="15000"/>
+              </a:schemeClr>
+            </a:lnRef>
+            <a:fillRef idx="1">
+              <a:schemeClr val="accent1"/>
+            </a:fillRef>
+            <a:effectRef idx="0">
+              <a:schemeClr val="accent1"/>
+            </a:effectRef>
+            <a:fontRef idx="minor">
+              <a:schemeClr val="lt1"/>
+            </a:fontRef>
+          </p:style>
+          <p:txBody>
+            <a:bodyPr rtlCol="0" anchor="ctr"/>
+            <a:lstStyle/>
+            <a:p>
+              <a:pPr algn="ctr"/>
+              <a:endParaRPr lang="en-US"/>
+            </a:p>
+          </p:txBody>
+        </p:sp>
+        <p:sp>
+          <p:nvSpPr>
+            <p:cNvPr id="157" name="Oval 156">
+              <a:extLst>
+                <a:ext uri="{FF2B5EF4-FFF2-40B4-BE49-F238E27FC236}">
+                  <a16:creationId xmlns:a16="http://schemas.microsoft.com/office/drawing/2014/main" id="{E13026AC-C159-AAE6-239C-BD8DE71B02AF}"/>
+                </a:ext>
+              </a:extLst>
+            </p:cNvPr>
+            <p:cNvSpPr/>
+            <p:nvPr/>
+          </p:nvSpPr>
+          <p:spPr>
+            <a:xfrm>
+              <a:off x="6630461" y="2375064"/>
+              <a:ext cx="142504" cy="142504"/>
+            </a:xfrm>
+            <a:prstGeom prst="ellipse">
+              <a:avLst/>
+            </a:prstGeom>
+          </p:spPr>
+          <p:style>
+            <a:lnRef idx="2">
+              <a:schemeClr val="accent1">
+                <a:shade val="15000"/>
+              </a:schemeClr>
+            </a:lnRef>
+            <a:fillRef idx="1">
+              <a:schemeClr val="accent1"/>
+            </a:fillRef>
+            <a:effectRef idx="0">
+              <a:schemeClr val="accent1"/>
+            </a:effectRef>
+            <a:fontRef idx="minor">
+              <a:schemeClr val="lt1"/>
+            </a:fontRef>
+          </p:style>
+          <p:txBody>
+            <a:bodyPr rtlCol="0" anchor="ctr"/>
+            <a:lstStyle/>
+            <a:p>
+              <a:pPr algn="ctr"/>
+              <a:endParaRPr lang="en-US"/>
+            </a:p>
+          </p:txBody>
+        </p:sp>
+        <p:sp>
+          <p:nvSpPr>
+            <p:cNvPr id="158" name="Oval 157">
+              <a:extLst>
+                <a:ext uri="{FF2B5EF4-FFF2-40B4-BE49-F238E27FC236}">
+                  <a16:creationId xmlns:a16="http://schemas.microsoft.com/office/drawing/2014/main" id="{3FE26904-1A7E-6508-A03D-05D080B00A6B}"/>
+                </a:ext>
+              </a:extLst>
+            </p:cNvPr>
+            <p:cNvSpPr/>
+            <p:nvPr/>
+          </p:nvSpPr>
+          <p:spPr>
+            <a:xfrm>
+              <a:off x="6630461" y="1768528"/>
+              <a:ext cx="142504" cy="142504"/>
+            </a:xfrm>
+            <a:prstGeom prst="ellipse">
+              <a:avLst/>
+            </a:prstGeom>
+          </p:spPr>
+          <p:style>
+            <a:lnRef idx="2">
+              <a:schemeClr val="accent1">
+                <a:shade val="15000"/>
+              </a:schemeClr>
+            </a:lnRef>
+            <a:fillRef idx="1">
+              <a:schemeClr val="accent1"/>
+            </a:fillRef>
+            <a:effectRef idx="0">
+              <a:schemeClr val="accent1"/>
+            </a:effectRef>
+            <a:fontRef idx="minor">
+              <a:schemeClr val="lt1"/>
+            </a:fontRef>
+          </p:style>
+          <p:txBody>
+            <a:bodyPr rtlCol="0" anchor="ctr"/>
+            <a:lstStyle/>
+            <a:p>
+              <a:pPr algn="ctr"/>
+              <a:endParaRPr lang="en-US"/>
+            </a:p>
+          </p:txBody>
+        </p:sp>
+        <p:sp>
+          <p:nvSpPr>
+            <p:cNvPr id="159" name="Oval 158">
+              <a:extLst>
+                <a:ext uri="{FF2B5EF4-FFF2-40B4-BE49-F238E27FC236}">
+                  <a16:creationId xmlns:a16="http://schemas.microsoft.com/office/drawing/2014/main" id="{713F6E40-AFDD-5399-7C39-0E05F5F1F7B5}"/>
+                </a:ext>
+              </a:extLst>
+            </p:cNvPr>
+            <p:cNvSpPr/>
+            <p:nvPr/>
+          </p:nvSpPr>
+          <p:spPr>
+            <a:xfrm>
+              <a:off x="5419036" y="2981600"/>
+              <a:ext cx="142504" cy="142504"/>
+            </a:xfrm>
+            <a:prstGeom prst="ellipse">
+              <a:avLst/>
+            </a:prstGeom>
+          </p:spPr>
+          <p:style>
+            <a:lnRef idx="2">
+              <a:schemeClr val="accent1">
+                <a:shade val="15000"/>
+              </a:schemeClr>
+            </a:lnRef>
+            <a:fillRef idx="1">
+              <a:schemeClr val="accent1"/>
+            </a:fillRef>
+            <a:effectRef idx="0">
+              <a:schemeClr val="accent1"/>
+            </a:effectRef>
+            <a:fontRef idx="minor">
+              <a:schemeClr val="lt1"/>
+            </a:fontRef>
+          </p:style>
+          <p:txBody>
+            <a:bodyPr rtlCol="0" anchor="ctr"/>
+            <a:lstStyle/>
+            <a:p>
+              <a:pPr algn="ctr"/>
+              <a:endParaRPr lang="en-US"/>
+            </a:p>
+          </p:txBody>
+        </p:sp>
+        <p:sp>
+          <p:nvSpPr>
+            <p:cNvPr id="160" name="Oval 159">
+              <a:extLst>
+                <a:ext uri="{FF2B5EF4-FFF2-40B4-BE49-F238E27FC236}">
+                  <a16:creationId xmlns:a16="http://schemas.microsoft.com/office/drawing/2014/main" id="{F0DFF659-A75A-1215-DAC0-EAB210F1B0F9}"/>
+                </a:ext>
+              </a:extLst>
+            </p:cNvPr>
+            <p:cNvSpPr/>
+            <p:nvPr/>
+          </p:nvSpPr>
+          <p:spPr>
+            <a:xfrm>
+              <a:off x="5419036" y="2375064"/>
+              <a:ext cx="142504" cy="142504"/>
+            </a:xfrm>
+            <a:prstGeom prst="ellipse">
+              <a:avLst/>
+            </a:prstGeom>
+          </p:spPr>
+          <p:style>
+            <a:lnRef idx="2">
+              <a:schemeClr val="accent1">
+                <a:shade val="15000"/>
+              </a:schemeClr>
+            </a:lnRef>
+            <a:fillRef idx="1">
+              <a:schemeClr val="accent1"/>
+            </a:fillRef>
+            <a:effectRef idx="0">
+              <a:schemeClr val="accent1"/>
+            </a:effectRef>
+            <a:fontRef idx="minor">
+              <a:schemeClr val="lt1"/>
+            </a:fontRef>
+          </p:style>
+          <p:txBody>
+            <a:bodyPr rtlCol="0" anchor="ctr"/>
+            <a:lstStyle/>
+            <a:p>
+              <a:pPr algn="ctr"/>
+              <a:endParaRPr lang="en-US"/>
+            </a:p>
+          </p:txBody>
+        </p:sp>
+        <p:sp>
+          <p:nvSpPr>
+            <p:cNvPr id="161" name="Oval 160">
+              <a:extLst>
+                <a:ext uri="{FF2B5EF4-FFF2-40B4-BE49-F238E27FC236}">
+                  <a16:creationId xmlns:a16="http://schemas.microsoft.com/office/drawing/2014/main" id="{0A007D16-82F1-090B-1A8A-5DA781702B14}"/>
+                </a:ext>
+              </a:extLst>
+            </p:cNvPr>
+            <p:cNvSpPr/>
+            <p:nvPr/>
+          </p:nvSpPr>
+          <p:spPr>
+            <a:xfrm>
+              <a:off x="5419036" y="1768528"/>
+              <a:ext cx="142504" cy="142504"/>
+            </a:xfrm>
+            <a:prstGeom prst="ellipse">
+              <a:avLst/>
+            </a:prstGeom>
+          </p:spPr>
+          <p:style>
+            <a:lnRef idx="2">
+              <a:schemeClr val="accent1">
+                <a:shade val="15000"/>
+              </a:schemeClr>
+            </a:lnRef>
+            <a:fillRef idx="1">
+              <a:schemeClr val="accent1"/>
+            </a:fillRef>
+            <a:effectRef idx="0">
+              <a:schemeClr val="accent1"/>
+            </a:effectRef>
+            <a:fontRef idx="minor">
+              <a:schemeClr val="lt1"/>
+            </a:fontRef>
+          </p:style>
+          <p:txBody>
+            <a:bodyPr rtlCol="0" anchor="ctr"/>
+            <a:lstStyle/>
+            <a:p>
+              <a:pPr algn="ctr"/>
+              <a:endParaRPr lang="en-US"/>
+            </a:p>
+          </p:txBody>
+        </p:sp>
+        <p:sp>
+          <p:nvSpPr>
+            <p:cNvPr id="162" name="Oval 161">
+              <a:extLst>
+                <a:ext uri="{FF2B5EF4-FFF2-40B4-BE49-F238E27FC236}">
+                  <a16:creationId xmlns:a16="http://schemas.microsoft.com/office/drawing/2014/main" id="{49EB668E-E71C-BE3F-9EC1-96657276578D}"/>
+                </a:ext>
+              </a:extLst>
+            </p:cNvPr>
+            <p:cNvSpPr/>
+            <p:nvPr/>
+          </p:nvSpPr>
+          <p:spPr>
+            <a:xfrm>
+              <a:off x="6032542" y="1762601"/>
+              <a:ext cx="142504" cy="142504"/>
+            </a:xfrm>
+            <a:prstGeom prst="ellipse">
+              <a:avLst/>
+            </a:prstGeom>
+          </p:spPr>
+          <p:style>
+            <a:lnRef idx="2">
+              <a:schemeClr val="accent1">
+                <a:shade val="15000"/>
+              </a:schemeClr>
+            </a:lnRef>
+            <a:fillRef idx="1">
+              <a:schemeClr val="accent1"/>
+            </a:fillRef>
+            <a:effectRef idx="0">
+              <a:schemeClr val="accent1"/>
+            </a:effectRef>
+            <a:fontRef idx="minor">
+              <a:schemeClr val="lt1"/>
+            </a:fontRef>
+          </p:style>
+          <p:txBody>
+            <a:bodyPr rtlCol="0" anchor="ctr"/>
+            <a:lstStyle/>
+            <a:p>
+              <a:pPr algn="ctr"/>
+              <a:endParaRPr lang="en-US"/>
+            </a:p>
+          </p:txBody>
+        </p:sp>
+        <p:sp>
+          <p:nvSpPr>
+            <p:cNvPr id="163" name="Oval 162">
+              <a:extLst>
+                <a:ext uri="{FF2B5EF4-FFF2-40B4-BE49-F238E27FC236}">
+                  <a16:creationId xmlns:a16="http://schemas.microsoft.com/office/drawing/2014/main" id="{FEEB58AC-8777-F024-4D3A-01743484E0FC}"/>
+                </a:ext>
+              </a:extLst>
+            </p:cNvPr>
+            <p:cNvSpPr/>
+            <p:nvPr/>
+          </p:nvSpPr>
+          <p:spPr>
+            <a:xfrm>
+              <a:off x="6029776" y="2981597"/>
+              <a:ext cx="142504" cy="142504"/>
+            </a:xfrm>
+            <a:prstGeom prst="ellipse">
+              <a:avLst/>
+            </a:prstGeom>
+          </p:spPr>
+          <p:style>
+            <a:lnRef idx="2">
+              <a:schemeClr val="accent1">
+                <a:shade val="15000"/>
+              </a:schemeClr>
+            </a:lnRef>
+            <a:fillRef idx="1">
+              <a:schemeClr val="accent1"/>
+            </a:fillRef>
+            <a:effectRef idx="0">
+              <a:schemeClr val="accent1"/>
+            </a:effectRef>
+            <a:fontRef idx="minor">
+              <a:schemeClr val="lt1"/>
+            </a:fontRef>
+          </p:style>
+          <p:txBody>
+            <a:bodyPr rtlCol="0" anchor="ctr"/>
+            <a:lstStyle/>
+            <a:p>
+              <a:pPr algn="ctr"/>
+              <a:endParaRPr lang="en-US"/>
+            </a:p>
+          </p:txBody>
+        </p:sp>
+        <p:sp>
+          <p:nvSpPr>
+            <p:cNvPr id="164" name="Oval 163">
+              <a:extLst>
+                <a:ext uri="{FF2B5EF4-FFF2-40B4-BE49-F238E27FC236}">
+                  <a16:creationId xmlns:a16="http://schemas.microsoft.com/office/drawing/2014/main" id="{9148CAF0-E4CB-0375-4C4A-F98FBC6EC286}"/>
+                </a:ext>
+              </a:extLst>
+            </p:cNvPr>
+            <p:cNvSpPr/>
+            <p:nvPr/>
+          </p:nvSpPr>
+          <p:spPr>
+            <a:xfrm>
+              <a:off x="6032878" y="2375064"/>
+              <a:ext cx="142504" cy="142504"/>
+            </a:xfrm>
+            <a:prstGeom prst="ellipse">
+              <a:avLst/>
+            </a:prstGeom>
+            <a:solidFill>
+              <a:srgbClr val="FF0000"/>
+            </a:solidFill>
+          </p:spPr>
+          <p:style>
+            <a:lnRef idx="2">
+              <a:schemeClr val="accent1">
+                <a:shade val="15000"/>
+              </a:schemeClr>
+            </a:lnRef>
+            <a:fillRef idx="1">
+              <a:schemeClr val="accent1"/>
+            </a:fillRef>
+            <a:effectRef idx="0">
+              <a:schemeClr val="accent1"/>
+            </a:effectRef>
+            <a:fontRef idx="minor">
+              <a:schemeClr val="lt1"/>
+            </a:fontRef>
+          </p:style>
+          <p:txBody>
+            <a:bodyPr rtlCol="0" anchor="ctr"/>
+            <a:lstStyle/>
+            <a:p>
+              <a:pPr algn="ctr"/>
+              <a:endParaRPr lang="en-US"/>
+            </a:p>
+          </p:txBody>
+        </p:sp>
+      </p:grpSp>
+      <p:sp>
+        <p:nvSpPr>
+          <p:cNvPr id="183" name="TextBox 182">
+            <a:extLst>
+              <a:ext uri="{FF2B5EF4-FFF2-40B4-BE49-F238E27FC236}">
+                <a16:creationId xmlns:a16="http://schemas.microsoft.com/office/drawing/2014/main" id="{F9BBA7CB-E687-F323-7B17-1E215AFDD216}"/>
+              </a:ext>
+            </a:extLst>
+          </p:cNvPr>
+          <p:cNvSpPr txBox="1"/>
+          <p:nvPr/>
+        </p:nvSpPr>
+        <p:spPr>
+          <a:xfrm>
+            <a:off x="10275834" y="4360606"/>
+            <a:ext cx="779381" cy="369332"/>
+          </a:xfrm>
+          <a:prstGeom prst="rect">
+            <a:avLst/>
+          </a:prstGeom>
+          <a:noFill/>
+        </p:spPr>
+        <p:txBody>
+          <a:bodyPr wrap="none" rtlCol="0">
+            <a:spAutoFit/>
+          </a:bodyPr>
+          <a:lstStyle/>
+          <a:p>
+            <a:r>
+              <a:rPr lang="en-US" dirty="0"/>
+              <a:t>Grid 4</a:t>
+            </a:r>
+          </a:p>
+        </p:txBody>
+      </p:sp>
+      <p:cxnSp>
+        <p:nvCxnSpPr>
+          <p:cNvPr id="185" name="Straight Arrow Connector 184">
+            <a:extLst>
+              <a:ext uri="{FF2B5EF4-FFF2-40B4-BE49-F238E27FC236}">
+                <a16:creationId xmlns:a16="http://schemas.microsoft.com/office/drawing/2014/main" id="{ABCB5CD1-4EF7-E39C-DBBC-2B0816317319}"/>
+              </a:ext>
+            </a:extLst>
+          </p:cNvPr>
+          <p:cNvCxnSpPr>
+            <a:cxnSpLocks/>
+          </p:cNvCxnSpPr>
+          <p:nvPr/>
+        </p:nvCxnSpPr>
+        <p:spPr>
+          <a:xfrm flipH="1" flipV="1">
+            <a:off x="9901084" y="4296697"/>
+            <a:ext cx="374750" cy="127819"/>
+          </a:xfrm>
+          <a:prstGeom prst="straightConnector1">
+            <a:avLst/>
+          </a:prstGeom>
+          <a:ln>
+            <a:tailEnd type="triangle"/>
+          </a:ln>
+        </p:spPr>
+        <p:style>
+          <a:lnRef idx="2">
+            <a:schemeClr val="accent1"/>
+          </a:lnRef>
+          <a:fillRef idx="0">
+            <a:schemeClr val="accent1"/>
+          </a:fillRef>
+          <a:effectRef idx="1">
+            <a:schemeClr val="accent1"/>
+          </a:effectRef>
+          <a:fontRef idx="minor">
+            <a:schemeClr val="tx1"/>
+          </a:fontRef>
+        </p:style>
+      </p:cxnSp>
+    </p:spTree>
+    <p:extLst>
+      <p:ext uri="{BB962C8B-B14F-4D97-AF65-F5344CB8AC3E}">
+        <p14:creationId xmlns:p14="http://schemas.microsoft.com/office/powerpoint/2010/main" val="3547262506"/>
       </p:ext>
     </p:extLst>
   </p:cSld>
